--- a/slides-2-send-to-earth.pptx
+++ b/slides-2-send-to-earth.pptx
@@ -16,6 +16,7 @@
     <p:sldId id="269" r:id="rId7"/>
     <p:sldId id="270" r:id="rId8"/>
     <p:sldId id="261" r:id="rId9"/>
+    <p:sldId id="271" r:id="rId22"/>
     <p:sldId id="262" r:id="rId10"/>
     <p:sldId id="263" r:id="rId11"/>
     <p:sldId id="264" r:id="rId12"/>
@@ -2498,6 +2499,1272 @@
 
 <file path=ppt/slides/slide10.xml><?xml version="1.0" encoding="utf-8"?>
 <p:sld xmlns:a="http://schemas.openxmlformats.org/drawingml/2006/main" xmlns:r="http://schemas.openxmlformats.org/officeDocument/2006/relationships" xmlns:p="http://schemas.openxmlformats.org/presentationml/2006/main">
+  <p:cSld name="Slide 7">
+    <p:bg>
+      <p:bgPr>
+        <a:solidFill>
+          <a:srgbClr val="070B14"/>
+        </a:solidFill>
+        <a:effectLst/>
+      </p:bgPr>
+    </p:bg>
+    <p:spTree>
+      <p:nvGrpSpPr>
+        <p:cNvPr id="1" name=""/>
+        <p:cNvGrpSpPr/>
+        <p:nvPr/>
+      </p:nvGrpSpPr>
+      <p:grpSpPr>
+        <a:xfrm>
+          <a:off x="0" y="0"/>
+          <a:ext cx="0" cy="0"/>
+          <a:chOff x="0" y="0"/>
+          <a:chExt cx="0" cy="0"/>
+        </a:xfrm>
+      </p:grpSpPr>
+      <p:sp>
+        <p:nvSpPr>
+          <p:cNvPr id="2" name="Text 0"/>
+          <p:cNvSpPr/>
+          <p:nvPr/>
+        </p:nvSpPr>
+        <p:spPr>
+          <a:xfrm>
+            <a:off x="457200" y="6473952"/>
+            <a:ext cx="7315200" cy="274320"/>
+          </a:xfrm>
+          <a:prstGeom prst="rect">
+            <a:avLst/>
+          </a:prstGeom>
+          <a:noFill/>
+          <a:ln/>
+        </p:spPr>
+        <p:txBody>
+          <a:bodyPr wrap="square" lIns="0" tIns="0" rIns="0" bIns="0" rtlCol="0" anchor="ctr"/>
+          <a:lstStyle/>
+          <a:p>
+            <a:pPr marL="0" indent="0">
+              <a:buNone/>
+            </a:pPr>
+            <a:r>
+              <a:rPr lang="en-US" sz="900" dirty="0">
+                <a:solidFill>
+                  <a:srgbClr val="7A93AE"/>
+                </a:solidFill>
+                <a:latin typeface="Microsoft JhengHei" pitchFamily="34" charset="0"/>
+                <a:ea typeface="Microsoft JhengHei" pitchFamily="34" charset="-122"/>
+                <a:cs typeface="Microsoft JhengHei" pitchFamily="34" charset="-120"/>
+              </a:rPr>
+              <a:t>MISSION 02 · 火星第一眼：1976 維京一號的拍照任務　7</a:t>
+            </a:r>
+            <a:endParaRPr lang="en-US" sz="900" dirty="0"/>
+          </a:p>
+        </p:txBody>
+      </p:sp>
+      <p:sp>
+        <p:nvSpPr>
+          <p:cNvPr id="4" name="Text 1"/>
+          <p:cNvSpPr/>
+          <p:nvPr/>
+        </p:nvSpPr>
+        <p:spPr>
+          <a:xfrm>
+            <a:off x="457200" y="320040"/>
+            <a:ext cx="11247120" cy="640080"/>
+          </a:xfrm>
+          <a:prstGeom prst="rect">
+            <a:avLst/>
+          </a:prstGeom>
+          <a:noFill/>
+          <a:ln/>
+        </p:spPr>
+        <p:txBody>
+          <a:bodyPr wrap="square" lIns="0" tIns="0" rIns="0" bIns="0" rtlCol="0" anchor="ctr"/>
+          <a:lstStyle/>
+          <a:p>
+            <a:pPr marL="0" indent="0">
+              <a:buNone/>
+            </a:pPr>
+            <a:r>
+              <a:rPr lang="zh-TW" altLang="en-US" sz="3000" b="1" dirty="0" smtClean="0">
+                <a:solidFill>
+                  <a:srgbClr val="F2E3C8"/>
+                </a:solidFill>
+                <a:latin typeface="Microsoft JhengHei" pitchFamily="34" charset="0"/>
+                <a:ea typeface="Microsoft JhengHei" pitchFamily="34" charset="-122"/>
+                <a:cs typeface="Microsoft JhengHei" pitchFamily="34" charset="-120"/>
+              </a:rPr>
+              <a:t>初階任務</a:t>
+            </a:r>
+            <a:r>
+              <a:rPr lang="en-US" sz="3000" b="1" dirty="0" smtClean="0">
+                <a:solidFill>
+                  <a:srgbClr val="F2E3C8"/>
+                </a:solidFill>
+                <a:latin typeface="Microsoft JhengHei" pitchFamily="34" charset="0"/>
+                <a:ea typeface="Microsoft JhengHei" pitchFamily="34" charset="-122"/>
+                <a:cs typeface="Microsoft JhengHei" pitchFamily="34" charset="-120"/>
+              </a:rPr>
+              <a:t>｜</a:t>
+            </a:r>
+            <a:r>
+              <a:rPr lang="en-US" sz="3000" b="1" dirty="0" err="1">
+                <a:solidFill>
+                  <a:srgbClr val="F2E3C8"/>
+                </a:solidFill>
+                <a:latin typeface="Microsoft JhengHei" pitchFamily="34" charset="0"/>
+                <a:ea typeface="Microsoft JhengHei" pitchFamily="34" charset="-122"/>
+                <a:cs typeface="Microsoft JhengHei" pitchFamily="34" charset="-120"/>
+                <a:hlinkClick r:id="rId3"/>
+              </a:rPr>
+              <a:t>光訊號播送台</a:t>
+            </a:r>
+            <a:r>
+              <a:rPr lang="en-US" sz="3000" b="1" dirty="0" smtClean="0">
+                <a:solidFill>
+                  <a:srgbClr val="F2E3C8"/>
+                </a:solidFill>
+                <a:latin typeface="Microsoft JhengHei" pitchFamily="34" charset="0"/>
+                <a:ea typeface="Microsoft JhengHei" pitchFamily="34" charset="-122"/>
+                <a:cs typeface="Microsoft JhengHei" pitchFamily="34" charset="-120"/>
+              </a:rPr>
+              <a:t>：</a:t>
+            </a:r>
+            <a:r>
+              <a:rPr lang="zh-TW" altLang="en-US" sz="3000" b="1" dirty="0" smtClean="0">
+                <a:solidFill>
+                  <a:srgbClr val="F2E3C8"/>
+                </a:solidFill>
+                <a:latin typeface="Microsoft JhengHei" pitchFamily="34" charset="0"/>
+                <a:ea typeface="Microsoft JhengHei" pitchFamily="34" charset="-122"/>
+                <a:cs typeface="Microsoft JhengHei" pitchFamily="34" charset="-120"/>
+              </a:rPr>
+              <a:t>老師先傳訊號</a:t>
+            </a:r>
+            <a:r>
+              <a:rPr lang="en-US" sz="3000" b="1" dirty="0" smtClean="0">
+                <a:solidFill>
+                  <a:srgbClr val="F2E3C8"/>
+                </a:solidFill>
+                <a:latin typeface="Microsoft JhengHei" pitchFamily="34" charset="0"/>
+                <a:ea typeface="Microsoft JhengHei" pitchFamily="34" charset="-122"/>
+                <a:cs typeface="Microsoft JhengHei" pitchFamily="34" charset="-120"/>
+              </a:rPr>
+              <a:t>・</a:t>
+            </a:r>
+            <a:r>
+              <a:rPr lang="zh-TW" altLang="en-US" sz="3000" b="1" dirty="0" smtClean="0">
+                <a:solidFill>
+                  <a:srgbClr val="F2E3C8"/>
+                </a:solidFill>
+                <a:latin typeface="Microsoft JhengHei" pitchFamily="34" charset="0"/>
+                <a:ea typeface="Microsoft JhengHei" pitchFamily="34" charset="-122"/>
+                <a:cs typeface="Microsoft JhengHei" pitchFamily="34" charset="-120"/>
+              </a:rPr>
+              <a:t>你們試著接收</a:t>
+            </a:r>
+            <a:endParaRPr lang="en-US" sz="3000" dirty="0"/>
+          </a:p>
+        </p:txBody>
+      </p:sp>
+      <p:sp>
+        <p:nvSpPr>
+          <p:cNvPr id="5" name="Shape 2"/>
+          <p:cNvSpPr/>
+          <p:nvPr/>
+        </p:nvSpPr>
+        <p:spPr>
+          <a:xfrm>
+            <a:off x="457200" y="1280160"/>
+            <a:ext cx="3611880" cy="2286000"/>
+          </a:xfrm>
+          <a:prstGeom prst="roundRect">
+            <a:avLst>
+              <a:gd name="adj" fmla="val 3200"/>
+            </a:avLst>
+          </a:prstGeom>
+          <a:solidFill>
+            <a:srgbClr val="0D1424"/>
+          </a:solidFill>
+          <a:ln w="12700">
+            <a:solidFill>
+              <a:srgbClr val="1E3A5C"/>
+            </a:solidFill>
+            <a:prstDash val="solid"/>
+          </a:ln>
+        </p:spPr>
+      </p:sp>
+      <p:sp>
+        <p:nvSpPr>
+          <p:cNvPr id="6" name="Shape 3"/>
+          <p:cNvSpPr/>
+          <p:nvPr/>
+        </p:nvSpPr>
+        <p:spPr>
+          <a:xfrm>
+            <a:off x="731520" y="1554480"/>
+            <a:ext cx="548640" cy="548640"/>
+          </a:xfrm>
+          <a:prstGeom prst="ellipse">
+            <a:avLst/>
+          </a:prstGeom>
+          <a:solidFill>
+            <a:srgbClr val="FFB347"/>
+          </a:solidFill>
+          <a:ln/>
+        </p:spPr>
+      </p:sp>
+      <p:sp>
+        <p:nvSpPr>
+          <p:cNvPr id="7" name="Text 4"/>
+          <p:cNvSpPr/>
+          <p:nvPr/>
+        </p:nvSpPr>
+        <p:spPr>
+          <a:xfrm>
+            <a:off x="731520" y="1554480"/>
+            <a:ext cx="548640" cy="548640"/>
+          </a:xfrm>
+          <a:prstGeom prst="rect">
+            <a:avLst/>
+          </a:prstGeom>
+          <a:noFill/>
+          <a:ln/>
+        </p:spPr>
+        <p:txBody>
+          <a:bodyPr wrap="square" lIns="0" tIns="0" rIns="0" bIns="0" rtlCol="0" anchor="ctr"/>
+          <a:lstStyle/>
+          <a:p>
+            <a:pPr marL="0" indent="0" algn="ctr">
+              <a:buNone/>
+            </a:pPr>
+            <a:r>
+              <a:rPr lang="en-US" sz="2000" b="1" dirty="0">
+                <a:solidFill>
+                  <a:srgbClr val="070B14"/>
+                </a:solidFill>
+                <a:latin typeface="Microsoft JhengHei" pitchFamily="34" charset="0"/>
+                <a:ea typeface="Microsoft JhengHei" pitchFamily="34" charset="-122"/>
+                <a:cs typeface="Microsoft JhengHei" pitchFamily="34" charset="-120"/>
+              </a:rPr>
+              <a:t>1</a:t>
+            </a:r>
+            <a:endParaRPr lang="en-US" sz="2000" dirty="0"/>
+          </a:p>
+        </p:txBody>
+      </p:sp>
+      <p:sp>
+        <p:nvSpPr>
+          <p:cNvPr id="8" name="Text 5"/>
+          <p:cNvSpPr/>
+          <p:nvPr/>
+        </p:nvSpPr>
+        <p:spPr>
+          <a:xfrm>
+            <a:off x="1463040" y="1600200"/>
+            <a:ext cx="2468880" cy="457200"/>
+          </a:xfrm>
+          <a:prstGeom prst="rect">
+            <a:avLst/>
+          </a:prstGeom>
+          <a:noFill/>
+          <a:ln/>
+        </p:spPr>
+        <p:txBody>
+          <a:bodyPr wrap="square" lIns="0" tIns="0" rIns="0" bIns="0" rtlCol="0" anchor="ctr"/>
+          <a:lstStyle/>
+          <a:p>
+            <a:pPr marL="0" indent="0">
+              <a:buNone/>
+            </a:pPr>
+            <a:r>
+              <a:rPr lang="en-US" sz="1800" b="1" dirty="0">
+                <a:solidFill>
+                  <a:srgbClr val="F2E3C8"/>
+                </a:solidFill>
+                <a:latin typeface="Microsoft JhengHei" pitchFamily="34" charset="0"/>
+                <a:ea typeface="Microsoft JhengHei" pitchFamily="34" charset="-122"/>
+                <a:cs typeface="Microsoft JhengHei" pitchFamily="34" charset="-120"/>
+              </a:rPr>
+              <a:t>試傳第 1 列</a:t>
+            </a:r>
+            <a:endParaRPr lang="en-US" sz="1800" dirty="0"/>
+          </a:p>
+        </p:txBody>
+      </p:sp>
+      <p:sp>
+        <p:nvSpPr>
+          <p:cNvPr id="9" name="Text 6"/>
+          <p:cNvSpPr/>
+          <p:nvPr/>
+        </p:nvSpPr>
+        <p:spPr>
+          <a:xfrm>
+            <a:off x="777240" y="2286000"/>
+            <a:ext cx="3017520" cy="1097280"/>
+          </a:xfrm>
+          <a:prstGeom prst="rect">
+            <a:avLst/>
+          </a:prstGeom>
+          <a:noFill/>
+          <a:ln/>
+        </p:spPr>
+        <p:txBody>
+          <a:bodyPr wrap="square" lIns="0" tIns="0" rIns="0" bIns="0" rtlCol="0" anchor="t"/>
+          <a:lstStyle/>
+          <a:p>
+            <a:pPr marL="0" indent="0">
+              <a:lnSpc>
+                <a:spcPct val="120000"/>
+              </a:lnSpc>
+              <a:buNone/>
+            </a:pPr>
+            <a:r>
+              <a:rPr lang="en-US" sz="3000" dirty="0" err="1" smtClean="0">
+                <a:solidFill>
+                  <a:srgbClr val="C9D6E8"/>
+                </a:solidFill>
+                <a:latin typeface="Microsoft JhengHei" pitchFamily="34" charset="0"/>
+                <a:ea typeface="Microsoft JhengHei" pitchFamily="34" charset="-122"/>
+                <a:cs typeface="Microsoft JhengHei" pitchFamily="34" charset="-120"/>
+              </a:rPr>
+              <a:t>全班</a:t>
+            </a:r>
+            <a:r>
+              <a:rPr lang="zh-TW" altLang="en-US" sz="3000" dirty="0" smtClean="0">
+                <a:solidFill>
+                  <a:srgbClr val="C9D6E8"/>
+                </a:solidFill>
+                <a:latin typeface="Microsoft JhengHei" pitchFamily="34" charset="0"/>
+                <a:ea typeface="Microsoft JhengHei" pitchFamily="34" charset="-122"/>
+                <a:cs typeface="Microsoft JhengHei" pitchFamily="34" charset="-120"/>
+              </a:rPr>
+              <a:t>練習一次</a:t>
+            </a:r>
+            <a:r>
+              <a:rPr lang="en-US" sz="3000" dirty="0" smtClean="0">
+                <a:solidFill>
+                  <a:srgbClr val="C9D6E8"/>
+                </a:solidFill>
+                <a:latin typeface="Microsoft JhengHei" pitchFamily="34" charset="0"/>
+                <a:ea typeface="Microsoft JhengHei" pitchFamily="34" charset="-122"/>
+                <a:cs typeface="Microsoft JhengHei" pitchFamily="34" charset="-120"/>
+              </a:rPr>
+              <a:t>：</a:t>
+            </a:r>
+            <a:endParaRPr lang="en-US" sz="3000" dirty="0"/>
+          </a:p>
+          <a:p>
+            <a:pPr marL="0" indent="0">
+              <a:lnSpc>
+                <a:spcPct val="120000"/>
+              </a:lnSpc>
+              <a:buNone/>
+            </a:pPr>
+            <a:r>
+              <a:rPr lang="en-US" sz="3000" dirty="0" smtClean="0">
+                <a:solidFill>
+                  <a:srgbClr val="C9D6E8"/>
+                </a:solidFill>
+                <a:latin typeface="Microsoft JhengHei" pitchFamily="34" charset="0"/>
+                <a:ea typeface="Microsoft JhengHei" pitchFamily="34" charset="-122"/>
+                <a:cs typeface="Microsoft JhengHei" pitchFamily="34" charset="-120"/>
+              </a:rPr>
+              <a:t>數</a:t>
+            </a:r>
+            <a:r>
+              <a:rPr lang="zh-TW" altLang="en-US" sz="3000" dirty="0" smtClean="0">
+                <a:solidFill>
+                  <a:srgbClr val="C9D6E8"/>
+                </a:solidFill>
+                <a:latin typeface="Microsoft JhengHei" pitchFamily="34" charset="0"/>
+                <a:ea typeface="Microsoft JhengHei" pitchFamily="34" charset="-122"/>
+                <a:cs typeface="Microsoft JhengHei" pitchFamily="34" charset="-120"/>
+              </a:rPr>
+              <a:t>節拍</a:t>
+            </a:r>
+            <a:r>
+              <a:rPr lang="en-US" sz="3000" dirty="0" smtClean="0">
+                <a:solidFill>
+                  <a:srgbClr val="C9D6E8"/>
+                </a:solidFill>
+                <a:latin typeface="Microsoft JhengHei" pitchFamily="34" charset="0"/>
+                <a:ea typeface="Microsoft JhengHei" pitchFamily="34" charset="-122"/>
+                <a:cs typeface="Microsoft JhengHei" pitchFamily="34" charset="-120"/>
+              </a:rPr>
+              <a:t>、</a:t>
+            </a:r>
+            <a:r>
+              <a:rPr lang="en-US" sz="3000" dirty="0">
+                <a:solidFill>
+                  <a:srgbClr val="C9D6E8"/>
+                </a:solidFill>
+                <a:latin typeface="Microsoft JhengHei" pitchFamily="34" charset="0"/>
+                <a:ea typeface="Microsoft JhengHei" pitchFamily="34" charset="-122"/>
+                <a:cs typeface="Microsoft JhengHei" pitchFamily="34" charset="-120"/>
+              </a:rPr>
+              <a:t>認閃爍</a:t>
+            </a:r>
+            <a:endParaRPr lang="en-US" sz="3000" dirty="0"/>
+          </a:p>
+        </p:txBody>
+      </p:sp>
+      <p:sp>
+        <p:nvSpPr>
+          <p:cNvPr id="10" name="Shape 7"/>
+          <p:cNvSpPr/>
+          <p:nvPr/>
+        </p:nvSpPr>
+        <p:spPr>
+          <a:xfrm>
+            <a:off x="4434840" y="1280160"/>
+            <a:ext cx="3611880" cy="2286000"/>
+          </a:xfrm>
+          <a:prstGeom prst="roundRect">
+            <a:avLst>
+              <a:gd name="adj" fmla="val 3200"/>
+            </a:avLst>
+          </a:prstGeom>
+          <a:solidFill>
+            <a:srgbClr val="0D1424"/>
+          </a:solidFill>
+          <a:ln w="12700">
+            <a:solidFill>
+              <a:srgbClr val="1E3A5C"/>
+            </a:solidFill>
+            <a:prstDash val="solid"/>
+          </a:ln>
+        </p:spPr>
+      </p:sp>
+      <p:sp>
+        <p:nvSpPr>
+          <p:cNvPr id="11" name="Shape 8"/>
+          <p:cNvSpPr/>
+          <p:nvPr/>
+        </p:nvSpPr>
+        <p:spPr>
+          <a:xfrm>
+            <a:off x="4709160" y="1554480"/>
+            <a:ext cx="548640" cy="548640"/>
+          </a:xfrm>
+          <a:prstGeom prst="ellipse">
+            <a:avLst/>
+          </a:prstGeom>
+          <a:solidFill>
+            <a:srgbClr val="FFB347"/>
+          </a:solidFill>
+          <a:ln/>
+        </p:spPr>
+      </p:sp>
+      <p:sp>
+        <p:nvSpPr>
+          <p:cNvPr id="12" name="Text 9"/>
+          <p:cNvSpPr/>
+          <p:nvPr/>
+        </p:nvSpPr>
+        <p:spPr>
+          <a:xfrm>
+            <a:off x="4709160" y="1554480"/>
+            <a:ext cx="548640" cy="548640"/>
+          </a:xfrm>
+          <a:prstGeom prst="rect">
+            <a:avLst/>
+          </a:prstGeom>
+          <a:noFill/>
+          <a:ln/>
+        </p:spPr>
+        <p:txBody>
+          <a:bodyPr wrap="square" lIns="0" tIns="0" rIns="0" bIns="0" rtlCol="0" anchor="ctr"/>
+          <a:lstStyle/>
+          <a:p>
+            <a:pPr marL="0" indent="0" algn="ctr">
+              <a:buNone/>
+            </a:pPr>
+            <a:r>
+              <a:rPr lang="en-US" sz="2000" b="1" dirty="0">
+                <a:solidFill>
+                  <a:srgbClr val="070B14"/>
+                </a:solidFill>
+                <a:latin typeface="Microsoft JhengHei" pitchFamily="34" charset="0"/>
+                <a:ea typeface="Microsoft JhengHei" pitchFamily="34" charset="-122"/>
+                <a:cs typeface="Microsoft JhengHei" pitchFamily="34" charset="-120"/>
+              </a:rPr>
+              <a:t>2</a:t>
+            </a:r>
+            <a:endParaRPr lang="en-US" sz="2000" dirty="0"/>
+          </a:p>
+        </p:txBody>
+      </p:sp>
+      <p:sp>
+        <p:nvSpPr>
+          <p:cNvPr id="13" name="Text 10"/>
+          <p:cNvSpPr/>
+          <p:nvPr/>
+        </p:nvSpPr>
+        <p:spPr>
+          <a:xfrm>
+            <a:off x="5440680" y="1600200"/>
+            <a:ext cx="2468880" cy="457200"/>
+          </a:xfrm>
+          <a:prstGeom prst="rect">
+            <a:avLst/>
+          </a:prstGeom>
+          <a:noFill/>
+          <a:ln/>
+        </p:spPr>
+        <p:txBody>
+          <a:bodyPr wrap="square" lIns="0" tIns="0" rIns="0" bIns="0" rtlCol="0" anchor="ctr"/>
+          <a:lstStyle/>
+          <a:p>
+            <a:pPr marL="0" indent="0">
+              <a:buNone/>
+            </a:pPr>
+            <a:r>
+              <a:rPr lang="en-US" sz="1800" b="1" dirty="0">
+                <a:solidFill>
+                  <a:srgbClr val="F2E3C8"/>
+                </a:solidFill>
+                <a:latin typeface="Microsoft JhengHei" pitchFamily="34" charset="0"/>
+                <a:ea typeface="Microsoft JhengHei" pitchFamily="34" charset="-122"/>
+                <a:cs typeface="Microsoft JhengHei" pitchFamily="34" charset="-120"/>
+              </a:rPr>
+              <a:t>播送整張 5×5</a:t>
+            </a:r>
+            <a:endParaRPr lang="en-US" sz="1800" dirty="0"/>
+          </a:p>
+        </p:txBody>
+      </p:sp>
+      <p:sp>
+        <p:nvSpPr>
+          <p:cNvPr id="14" name="Text 11"/>
+          <p:cNvSpPr/>
+          <p:nvPr/>
+        </p:nvSpPr>
+        <p:spPr>
+          <a:xfrm>
+            <a:off x="4572000" y="2221992"/>
+            <a:ext cx="3200400" cy="1097280"/>
+          </a:xfrm>
+          <a:prstGeom prst="rect">
+            <a:avLst/>
+          </a:prstGeom>
+          <a:noFill/>
+          <a:ln/>
+        </p:spPr>
+        <p:txBody>
+          <a:bodyPr wrap="square" lIns="0" tIns="0" rIns="0" bIns="0" rtlCol="0" anchor="t"/>
+          <a:lstStyle/>
+          <a:p>
+            <a:pPr>
+              <a:lnSpc>
+                <a:spcPct val="120000"/>
+              </a:lnSpc>
+            </a:pPr>
+            <a:r>
+              <a:rPr lang="en-US" sz="2500" dirty="0" err="1" smtClean="0">
+                <a:solidFill>
+                  <a:srgbClr val="C9D6E8"/>
+                </a:solidFill>
+                <a:latin typeface="Microsoft JhengHei" pitchFamily="34" charset="0"/>
+                <a:ea typeface="Microsoft JhengHei" pitchFamily="34" charset="-122"/>
+                <a:cs typeface="Microsoft JhengHei" pitchFamily="34" charset="-120"/>
+              </a:rPr>
+              <a:t>亮</a:t>
+            </a:r>
+            <a:r>
+              <a:rPr lang="en-US" sz="2500" dirty="0" err="1">
+                <a:solidFill>
+                  <a:srgbClr val="C9D6E8"/>
+                </a:solidFill>
+                <a:latin typeface="Microsoft JhengHei" pitchFamily="34" charset="0"/>
+                <a:ea typeface="Microsoft JhengHei" pitchFamily="34" charset="-122"/>
+                <a:cs typeface="Microsoft JhengHei" pitchFamily="34" charset="-120"/>
+              </a:rPr>
+              <a:t>／</a:t>
+            </a:r>
+            <a:r>
+              <a:rPr lang="en-US" sz="2500" dirty="0" err="1" smtClean="0">
+                <a:solidFill>
+                  <a:srgbClr val="C9D6E8"/>
+                </a:solidFill>
+                <a:latin typeface="Microsoft JhengHei" pitchFamily="34" charset="0"/>
+                <a:ea typeface="Microsoft JhengHei" pitchFamily="34" charset="-122"/>
+                <a:cs typeface="Microsoft JhengHei" pitchFamily="34" charset="-120"/>
+              </a:rPr>
+              <a:t>暗</a:t>
+            </a:r>
+            <a:r>
+              <a:rPr lang="zh-TW" altLang="en-US" sz="2500" dirty="0" smtClean="0">
+                <a:solidFill>
+                  <a:srgbClr val="C9D6E8"/>
+                </a:solidFill>
+                <a:latin typeface="Microsoft JhengHei" pitchFamily="34" charset="0"/>
+                <a:ea typeface="Microsoft JhengHei" pitchFamily="34" charset="-122"/>
+                <a:cs typeface="Microsoft JhengHei" pitchFamily="34" charset="-120"/>
+              </a:rPr>
+              <a:t>都是</a:t>
+            </a:r>
+            <a:r>
+              <a:rPr lang="en-US" altLang="zh-TW" sz="2500" dirty="0" err="1" smtClean="0">
+                <a:solidFill>
+                  <a:srgbClr val="C9D6E8"/>
+                </a:solidFill>
+                <a:latin typeface="Microsoft JhengHei" pitchFamily="34" charset="0"/>
+                <a:ea typeface="Microsoft JhengHei" pitchFamily="34" charset="-122"/>
+                <a:cs typeface="Microsoft JhengHei" pitchFamily="34" charset="-120"/>
+              </a:rPr>
+              <a:t>每拍</a:t>
+            </a:r>
+            <a:r>
+              <a:rPr lang="en-US" altLang="zh-TW" sz="2500" dirty="0" smtClean="0">
+                <a:solidFill>
+                  <a:srgbClr val="C9D6E8"/>
+                </a:solidFill>
+                <a:latin typeface="Microsoft JhengHei" pitchFamily="34" charset="0"/>
+                <a:ea typeface="Microsoft JhengHei" pitchFamily="34" charset="-122"/>
+                <a:cs typeface="Microsoft JhengHei" pitchFamily="34" charset="-120"/>
+              </a:rPr>
+              <a:t> </a:t>
+            </a:r>
+            <a:r>
+              <a:rPr lang="en-US" altLang="zh-TW" sz="2500" dirty="0">
+                <a:solidFill>
+                  <a:srgbClr val="C9D6E8"/>
+                </a:solidFill>
+                <a:latin typeface="Microsoft JhengHei" pitchFamily="34" charset="0"/>
+                <a:ea typeface="Microsoft JhengHei" pitchFamily="34" charset="-122"/>
+                <a:cs typeface="Microsoft JhengHei" pitchFamily="34" charset="-120"/>
+              </a:rPr>
+              <a:t>2 秒</a:t>
+            </a:r>
+            <a:endParaRPr lang="en-US" altLang="zh-TW" sz="2500" dirty="0"/>
+          </a:p>
+          <a:p>
+            <a:pPr>
+              <a:lnSpc>
+                <a:spcPct val="120000"/>
+              </a:lnSpc>
+            </a:pPr>
+            <a:r>
+              <a:rPr lang="zh-TW" altLang="en-US" sz="2500" dirty="0" smtClean="0">
+                <a:solidFill>
+                  <a:srgbClr val="C9D6E8"/>
+                </a:solidFill>
+                <a:latin typeface="Microsoft JhengHei" pitchFamily="34" charset="0"/>
+                <a:ea typeface="Microsoft JhengHei" pitchFamily="34" charset="-122"/>
+                <a:cs typeface="Microsoft JhengHei" pitchFamily="34" charset="-120"/>
+              </a:rPr>
+              <a:t>都會</a:t>
+            </a:r>
+            <a:r>
+              <a:rPr lang="en-US" altLang="zh-TW" sz="2500" dirty="0" err="1" smtClean="0">
+                <a:solidFill>
+                  <a:srgbClr val="C9D6E8"/>
+                </a:solidFill>
+                <a:latin typeface="Microsoft JhengHei" pitchFamily="34" charset="0"/>
+                <a:ea typeface="Microsoft JhengHei" pitchFamily="34" charset="-122"/>
+                <a:cs typeface="Microsoft JhengHei" pitchFamily="34" charset="-120"/>
+              </a:rPr>
+              <a:t>閃爍</a:t>
+            </a:r>
+            <a:r>
+              <a:rPr lang="en-US" altLang="zh-TW" sz="2500" dirty="0" smtClean="0">
+                <a:solidFill>
+                  <a:srgbClr val="C9D6E8"/>
+                </a:solidFill>
+                <a:latin typeface="Microsoft JhengHei" pitchFamily="34" charset="0"/>
+                <a:ea typeface="Microsoft JhengHei" pitchFamily="34" charset="-122"/>
+                <a:cs typeface="Microsoft JhengHei" pitchFamily="34" charset="-120"/>
+              </a:rPr>
+              <a:t> →</a:t>
+            </a:r>
+            <a:r>
+              <a:rPr lang="zh-TW" altLang="en-US" sz="2500" dirty="0" smtClean="0">
+                <a:solidFill>
+                  <a:srgbClr val="C9D6E8"/>
+                </a:solidFill>
+                <a:latin typeface="Microsoft JhengHei" pitchFamily="34" charset="0"/>
+                <a:ea typeface="Microsoft JhengHei" pitchFamily="34" charset="-122"/>
+                <a:cs typeface="Microsoft JhengHei" pitchFamily="34" charset="-120"/>
+              </a:rPr>
+              <a:t>每一列開頭與結束</a:t>
+            </a:r>
+            <a:endParaRPr lang="en-US" sz="2500" dirty="0"/>
+          </a:p>
+        </p:txBody>
+      </p:sp>
+      <p:sp>
+        <p:nvSpPr>
+          <p:cNvPr id="15" name="Shape 12"/>
+          <p:cNvSpPr/>
+          <p:nvPr/>
+        </p:nvSpPr>
+        <p:spPr>
+          <a:xfrm>
+            <a:off x="8412480" y="1280160"/>
+            <a:ext cx="3611880" cy="2286000"/>
+          </a:xfrm>
+          <a:prstGeom prst="roundRect">
+            <a:avLst>
+              <a:gd name="adj" fmla="val 3200"/>
+            </a:avLst>
+          </a:prstGeom>
+          <a:solidFill>
+            <a:srgbClr val="0D1424"/>
+          </a:solidFill>
+          <a:ln w="12700">
+            <a:solidFill>
+              <a:srgbClr val="1E3A5C"/>
+            </a:solidFill>
+            <a:prstDash val="solid"/>
+          </a:ln>
+        </p:spPr>
+      </p:sp>
+      <p:sp>
+        <p:nvSpPr>
+          <p:cNvPr id="16" name="Shape 13"/>
+          <p:cNvSpPr/>
+          <p:nvPr/>
+        </p:nvSpPr>
+        <p:spPr>
+          <a:xfrm>
+            <a:off x="8686800" y="1554480"/>
+            <a:ext cx="548640" cy="548640"/>
+          </a:xfrm>
+          <a:prstGeom prst="ellipse">
+            <a:avLst/>
+          </a:prstGeom>
+          <a:solidFill>
+            <a:srgbClr val="FFB347"/>
+          </a:solidFill>
+          <a:ln/>
+        </p:spPr>
+      </p:sp>
+      <p:sp>
+        <p:nvSpPr>
+          <p:cNvPr id="17" name="Text 14"/>
+          <p:cNvSpPr/>
+          <p:nvPr/>
+        </p:nvSpPr>
+        <p:spPr>
+          <a:xfrm>
+            <a:off x="8686800" y="1554480"/>
+            <a:ext cx="548640" cy="548640"/>
+          </a:xfrm>
+          <a:prstGeom prst="rect">
+            <a:avLst/>
+          </a:prstGeom>
+          <a:noFill/>
+          <a:ln/>
+        </p:spPr>
+        <p:txBody>
+          <a:bodyPr wrap="square" lIns="0" tIns="0" rIns="0" bIns="0" rtlCol="0" anchor="ctr"/>
+          <a:lstStyle/>
+          <a:p>
+            <a:pPr marL="0" indent="0" algn="ctr">
+              <a:buNone/>
+            </a:pPr>
+            <a:r>
+              <a:rPr lang="en-US" sz="2000" b="1" dirty="0">
+                <a:solidFill>
+                  <a:srgbClr val="070B14"/>
+                </a:solidFill>
+                <a:latin typeface="Microsoft JhengHei" pitchFamily="34" charset="0"/>
+                <a:ea typeface="Microsoft JhengHei" pitchFamily="34" charset="-122"/>
+                <a:cs typeface="Microsoft JhengHei" pitchFamily="34" charset="-120"/>
+              </a:rPr>
+              <a:t>3</a:t>
+            </a:r>
+            <a:endParaRPr lang="en-US" sz="2000" dirty="0"/>
+          </a:p>
+        </p:txBody>
+      </p:sp>
+      <p:sp>
+        <p:nvSpPr>
+          <p:cNvPr id="18" name="Text 15"/>
+          <p:cNvSpPr/>
+          <p:nvPr/>
+        </p:nvSpPr>
+        <p:spPr>
+          <a:xfrm>
+            <a:off x="9418320" y="1600200"/>
+            <a:ext cx="2468880" cy="457200"/>
+          </a:xfrm>
+          <a:prstGeom prst="rect">
+            <a:avLst/>
+          </a:prstGeom>
+          <a:noFill/>
+          <a:ln/>
+        </p:spPr>
+        <p:txBody>
+          <a:bodyPr wrap="square" lIns="0" tIns="0" rIns="0" bIns="0" rtlCol="0" anchor="ctr"/>
+          <a:lstStyle/>
+          <a:p>
+            <a:pPr marL="0" indent="0">
+              <a:buNone/>
+            </a:pPr>
+            <a:r>
+              <a:rPr lang="zh-TW" altLang="en-US" sz="1800" b="1" dirty="0" smtClean="0">
+                <a:solidFill>
+                  <a:srgbClr val="F2E3C8"/>
+                </a:solidFill>
+                <a:latin typeface="Microsoft JhengHei" pitchFamily="34" charset="0"/>
+                <a:ea typeface="Microsoft JhengHei" pitchFamily="34" charset="-122"/>
+                <a:cs typeface="Microsoft JhengHei" pitchFamily="34" charset="-120"/>
+              </a:rPr>
+              <a:t>圖片比對</a:t>
+            </a:r>
+            <a:endParaRPr lang="en-US" sz="1800" dirty="0"/>
+          </a:p>
+        </p:txBody>
+      </p:sp>
+      <p:sp>
+        <p:nvSpPr>
+          <p:cNvPr id="19" name="Text 16"/>
+          <p:cNvSpPr/>
+          <p:nvPr/>
+        </p:nvSpPr>
+        <p:spPr>
+          <a:xfrm>
+            <a:off x="8732520" y="2011911"/>
+            <a:ext cx="3017520" cy="1097280"/>
+          </a:xfrm>
+          <a:prstGeom prst="rect">
+            <a:avLst/>
+          </a:prstGeom>
+          <a:noFill/>
+          <a:ln/>
+        </p:spPr>
+        <p:txBody>
+          <a:bodyPr wrap="square" lIns="0" tIns="0" rIns="0" bIns="0" rtlCol="0" anchor="t"/>
+          <a:lstStyle/>
+          <a:p>
+            <a:pPr marL="0" indent="0">
+              <a:lnSpc>
+                <a:spcPct val="120000"/>
+              </a:lnSpc>
+              <a:buNone/>
+            </a:pPr>
+            <a:endParaRPr lang="en-US" sz="1400" dirty="0"/>
+          </a:p>
+          <a:p>
+            <a:pPr marL="0" indent="0">
+              <a:lnSpc>
+                <a:spcPct val="120000"/>
+              </a:lnSpc>
+              <a:buNone/>
+            </a:pPr>
+            <a:r>
+              <a:rPr lang="zh-TW" altLang="en-US" sz="3000" dirty="0" smtClean="0">
+                <a:solidFill>
+                  <a:srgbClr val="C9D6E8"/>
+                </a:solidFill>
+                <a:latin typeface="Microsoft JhengHei" pitchFamily="34" charset="0"/>
+                <a:ea typeface="Microsoft JhengHei" pitchFamily="34" charset="-122"/>
+                <a:cs typeface="Microsoft JhengHei" pitchFamily="34" charset="-120"/>
+              </a:rPr>
+              <a:t>看看你們的結果有沒有正確？</a:t>
+            </a:r>
+            <a:endParaRPr lang="en-US" sz="3000" dirty="0"/>
+          </a:p>
+        </p:txBody>
+      </p:sp>
+      <p:sp>
+        <p:nvSpPr>
+          <p:cNvPr id="20" name="Text 17"/>
+          <p:cNvSpPr/>
+          <p:nvPr/>
+        </p:nvSpPr>
+        <p:spPr>
+          <a:xfrm>
+            <a:off x="457200" y="3840480"/>
+            <a:ext cx="11247120" cy="457200"/>
+          </a:xfrm>
+          <a:prstGeom prst="rect">
+            <a:avLst/>
+          </a:prstGeom>
+          <a:noFill/>
+          <a:ln/>
+        </p:spPr>
+        <p:txBody>
+          <a:bodyPr wrap="square" lIns="0" tIns="0" rIns="0" bIns="0" rtlCol="0" anchor="ctr"/>
+          <a:lstStyle/>
+          <a:p>
+            <a:pPr marL="0" indent="0" algn="ctr">
+              <a:buNone/>
+            </a:pPr>
+            <a:r>
+              <a:rPr lang="zh-TW" altLang="en-US" sz="2500" b="1" dirty="0" smtClean="0">
+                <a:solidFill>
+                  <a:srgbClr val="5EC8F2"/>
+                </a:solidFill>
+                <a:latin typeface="Microsoft JhengHei" pitchFamily="34" charset="0"/>
+                <a:ea typeface="Microsoft JhengHei" pitchFamily="34" charset="-122"/>
+                <a:cs typeface="Microsoft JhengHei" pitchFamily="34" charset="-120"/>
+              </a:rPr>
+              <a:t>小組任務</a:t>
+            </a:r>
+            <a:r>
+              <a:rPr lang="en-US" sz="2500" b="1" dirty="0" smtClean="0">
+                <a:solidFill>
+                  <a:srgbClr val="5EC8F2"/>
+                </a:solidFill>
+                <a:latin typeface="Microsoft JhengHei" pitchFamily="34" charset="0"/>
+                <a:ea typeface="Microsoft JhengHei" pitchFamily="34" charset="-122"/>
+                <a:cs typeface="Microsoft JhengHei" pitchFamily="34" charset="-120"/>
+              </a:rPr>
+              <a:t>：</a:t>
+            </a:r>
+            <a:r>
+              <a:rPr lang="en-US" sz="2500" b="1" dirty="0">
+                <a:solidFill>
+                  <a:srgbClr val="5EC8F2"/>
+                </a:solidFill>
+                <a:latin typeface="Microsoft JhengHei" pitchFamily="34" charset="0"/>
+                <a:ea typeface="Microsoft JhengHei" pitchFamily="34" charset="-122"/>
+                <a:cs typeface="Microsoft JhengHei" pitchFamily="34" charset="-120"/>
+              </a:rPr>
+              <a:t>每一拍記下 0 或 1 → </a:t>
+            </a:r>
+            <a:r>
+              <a:rPr lang="en-US" sz="2500" b="1" dirty="0" err="1" smtClean="0">
+                <a:solidFill>
+                  <a:srgbClr val="5EC8F2"/>
+                </a:solidFill>
+                <a:latin typeface="Microsoft JhengHei" pitchFamily="34" charset="0"/>
+                <a:ea typeface="Microsoft JhengHei" pitchFamily="34" charset="-122"/>
+                <a:cs typeface="Microsoft JhengHei" pitchFamily="34" charset="-120"/>
+              </a:rPr>
+              <a:t>收完整列</a:t>
+            </a:r>
+            <a:r>
+              <a:rPr lang="zh-TW" altLang="en-US" sz="2500" b="1" dirty="0" smtClean="0">
+                <a:solidFill>
+                  <a:srgbClr val="5EC8F2"/>
+                </a:solidFill>
+                <a:latin typeface="Microsoft JhengHei" pitchFamily="34" charset="0"/>
+                <a:ea typeface="Microsoft JhengHei" pitchFamily="34" charset="-122"/>
+                <a:cs typeface="Microsoft JhengHei" pitchFamily="34" charset="-120"/>
+              </a:rPr>
+              <a:t>再</a:t>
+            </a:r>
+            <a:r>
+              <a:rPr lang="en-US" sz="2500" b="1" dirty="0" err="1" smtClean="0">
+                <a:solidFill>
+                  <a:srgbClr val="5EC8F2"/>
+                </a:solidFill>
+                <a:latin typeface="Microsoft JhengHei" pitchFamily="34" charset="0"/>
+                <a:ea typeface="Microsoft JhengHei" pitchFamily="34" charset="-122"/>
+                <a:cs typeface="Microsoft JhengHei" pitchFamily="34" charset="-120"/>
+              </a:rPr>
+              <a:t>塗格</a:t>
+            </a:r>
+            <a:r>
+              <a:rPr lang="zh-TW" altLang="en-US" sz="2500" b="1" dirty="0" smtClean="0">
+                <a:solidFill>
+                  <a:srgbClr val="5EC8F2"/>
+                </a:solidFill>
+                <a:latin typeface="Microsoft JhengHei" pitchFamily="34" charset="0"/>
+                <a:ea typeface="Microsoft JhengHei" pitchFamily="34" charset="-122"/>
+                <a:cs typeface="Microsoft JhengHei" pitchFamily="34" charset="-120"/>
+              </a:rPr>
+              <a:t>子</a:t>
+            </a:r>
+            <a:r>
+              <a:rPr lang="en-US" sz="2500" b="1" dirty="0" err="1" smtClean="0">
+                <a:solidFill>
+                  <a:srgbClr val="5EC8F2"/>
+                </a:solidFill>
+                <a:latin typeface="Microsoft JhengHei" pitchFamily="34" charset="0"/>
+                <a:ea typeface="Microsoft JhengHei" pitchFamily="34" charset="-122"/>
+                <a:cs typeface="Microsoft JhengHei" pitchFamily="34" charset="-120"/>
+              </a:rPr>
+              <a:t>還原</a:t>
+            </a:r>
+            <a:endParaRPr lang="en-US" sz="2500" dirty="0"/>
+          </a:p>
+        </p:txBody>
+      </p:sp>
+      <p:sp>
+        <p:nvSpPr>
+          <p:cNvPr id="21" name="Shape 18"/>
+          <p:cNvSpPr/>
+          <p:nvPr/>
+        </p:nvSpPr>
+        <p:spPr>
+          <a:xfrm>
+            <a:off x="457200" y="4526280"/>
+            <a:ext cx="11247120" cy="1234440"/>
+          </a:xfrm>
+          <a:prstGeom prst="roundRect">
+            <a:avLst>
+              <a:gd name="adj" fmla="val 5926"/>
+            </a:avLst>
+          </a:prstGeom>
+          <a:solidFill>
+            <a:srgbClr val="0D1424"/>
+          </a:solidFill>
+          <a:ln w="19050">
+            <a:solidFill>
+              <a:srgbClr val="FFB347"/>
+            </a:solidFill>
+            <a:prstDash val="solid"/>
+          </a:ln>
+        </p:spPr>
+      </p:sp>
+      <p:sp>
+        <p:nvSpPr>
+          <p:cNvPr id="22" name="Text 19"/>
+          <p:cNvSpPr/>
+          <p:nvPr/>
+        </p:nvSpPr>
+        <p:spPr>
+          <a:xfrm>
+            <a:off x="731520" y="4644044"/>
+            <a:ext cx="10607040" cy="868680"/>
+          </a:xfrm>
+          <a:prstGeom prst="rect">
+            <a:avLst/>
+          </a:prstGeom>
+          <a:noFill/>
+          <a:ln/>
+        </p:spPr>
+        <p:txBody>
+          <a:bodyPr wrap="square" lIns="0" tIns="0" rIns="0" bIns="0" rtlCol="0" anchor="t"/>
+          <a:lstStyle/>
+          <a:p>
+            <a:pPr marL="0" indent="0">
+              <a:spcAft>
+                <a:spcPts val="500"/>
+              </a:spcAft>
+              <a:buNone/>
+            </a:pPr>
+            <a:r>
+              <a:rPr lang="en-US" altLang="zh-TW" b="1" dirty="0" smtClean="0">
+                <a:solidFill>
+                  <a:srgbClr val="FFB347"/>
+                </a:solidFill>
+                <a:latin typeface="Microsoft JhengHei" pitchFamily="34" charset="0"/>
+                <a:ea typeface="Microsoft JhengHei" pitchFamily="34" charset="-122"/>
+                <a:cs typeface="Microsoft JhengHei" pitchFamily="34" charset="-120"/>
+              </a:rPr>
+              <a:t>※※</a:t>
+            </a:r>
+            <a:r>
+              <a:rPr lang="zh-TW" altLang="en-US" b="1" dirty="0" smtClean="0">
+                <a:solidFill>
+                  <a:srgbClr val="FFB347"/>
+                </a:solidFill>
+                <a:latin typeface="Microsoft JhengHei" pitchFamily="34" charset="0"/>
+                <a:ea typeface="Microsoft JhengHei" pitchFamily="34" charset="-122"/>
+                <a:cs typeface="Microsoft JhengHei" pitchFamily="34" charset="-120"/>
+              </a:rPr>
+              <a:t>小提示</a:t>
+            </a:r>
+            <a:r>
+              <a:rPr lang="en-US" b="1" dirty="0" smtClean="0">
+                <a:solidFill>
+                  <a:srgbClr val="FFB347"/>
+                </a:solidFill>
+                <a:latin typeface="Microsoft JhengHei" pitchFamily="34" charset="0"/>
+                <a:ea typeface="Microsoft JhengHei" pitchFamily="34" charset="-122"/>
+                <a:cs typeface="Microsoft JhengHei" pitchFamily="34" charset="-120"/>
+              </a:rPr>
+              <a:t>：</a:t>
+            </a:r>
+            <a:r>
+              <a:rPr lang="en-US" b="1" dirty="0">
+                <a:solidFill>
+                  <a:srgbClr val="FFB347"/>
+                </a:solidFill>
+                <a:latin typeface="Microsoft JhengHei" pitchFamily="34" charset="0"/>
+                <a:ea typeface="Microsoft JhengHei" pitchFamily="34" charset="-122"/>
+                <a:cs typeface="Microsoft JhengHei" pitchFamily="34" charset="-120"/>
+              </a:rPr>
+              <a:t>數亂了怎麼辦？
+</a:t>
+            </a:r>
+            <a:endParaRPr lang="en-US" dirty="0"/>
+          </a:p>
+          <a:p>
+            <a:pPr marL="0" indent="0">
+              <a:buNone/>
+            </a:pPr>
+            <a:r>
+              <a:rPr lang="en-US" dirty="0" err="1">
+                <a:solidFill>
+                  <a:srgbClr val="F2E3C8"/>
+                </a:solidFill>
+                <a:latin typeface="Microsoft JhengHei" pitchFamily="34" charset="0"/>
+                <a:ea typeface="Microsoft JhengHei" pitchFamily="34" charset="-122"/>
+                <a:cs typeface="Microsoft JhengHei" pitchFamily="34" charset="-120"/>
+              </a:rPr>
+              <a:t>放棄這一列就好！等下一次</a:t>
+            </a:r>
+            <a:r>
+              <a:rPr lang="en-US" dirty="0" smtClean="0">
+                <a:solidFill>
+                  <a:srgbClr val="F2E3C8"/>
+                </a:solidFill>
+                <a:latin typeface="Microsoft JhengHei" pitchFamily="34" charset="0"/>
+                <a:ea typeface="Microsoft JhengHei" pitchFamily="34" charset="-122"/>
+                <a:cs typeface="Microsoft JhengHei" pitchFamily="34" charset="-120"/>
+              </a:rPr>
+              <a:t>「</a:t>
+            </a:r>
+            <a:r>
+              <a:rPr lang="zh-TW" altLang="en-US" dirty="0" smtClean="0">
+                <a:solidFill>
+                  <a:srgbClr val="F2E3C8"/>
+                </a:solidFill>
+                <a:latin typeface="Microsoft JhengHei" pitchFamily="34" charset="0"/>
+                <a:ea typeface="Microsoft JhengHei" pitchFamily="34" charset="-122"/>
+                <a:cs typeface="Microsoft JhengHei" pitchFamily="34" charset="-120"/>
+              </a:rPr>
+              <a:t>開頭</a:t>
+            </a:r>
+            <a:r>
+              <a:rPr lang="en-US" dirty="0" err="1" smtClean="0">
+                <a:solidFill>
+                  <a:srgbClr val="F2E3C8"/>
+                </a:solidFill>
+                <a:latin typeface="Microsoft JhengHei" pitchFamily="34" charset="0"/>
+                <a:ea typeface="Microsoft JhengHei" pitchFamily="34" charset="-122"/>
+                <a:cs typeface="Microsoft JhengHei" pitchFamily="34" charset="-120"/>
+              </a:rPr>
+              <a:t>快速閃爍</a:t>
+            </a:r>
+            <a:r>
+              <a:rPr lang="en-US" dirty="0" smtClean="0">
+                <a:solidFill>
+                  <a:srgbClr val="F2E3C8"/>
+                </a:solidFill>
+                <a:latin typeface="Microsoft JhengHei" pitchFamily="34" charset="0"/>
+                <a:ea typeface="Microsoft JhengHei" pitchFamily="34" charset="-122"/>
+                <a:cs typeface="Microsoft JhengHei" pitchFamily="34" charset="-120"/>
+              </a:rPr>
+              <a:t>」，</a:t>
+            </a:r>
+            <a:r>
+              <a:rPr lang="zh-TW" altLang="en-US" dirty="0" smtClean="0">
+                <a:solidFill>
+                  <a:srgbClr val="F2E3C8"/>
+                </a:solidFill>
+                <a:latin typeface="Microsoft JhengHei" pitchFamily="34" charset="0"/>
+                <a:ea typeface="Microsoft JhengHei" pitchFamily="34" charset="-122"/>
+                <a:cs typeface="Microsoft JhengHei" pitchFamily="34" charset="-120"/>
+              </a:rPr>
+              <a:t>再</a:t>
+            </a:r>
+            <a:r>
+              <a:rPr lang="en-US" dirty="0" err="1" smtClean="0">
+                <a:solidFill>
+                  <a:srgbClr val="F2E3C8"/>
+                </a:solidFill>
+                <a:latin typeface="Microsoft JhengHei" pitchFamily="34" charset="0"/>
+                <a:ea typeface="Microsoft JhengHei" pitchFamily="34" charset="-122"/>
+                <a:cs typeface="Microsoft JhengHei" pitchFamily="34" charset="-120"/>
+              </a:rPr>
+              <a:t>從新的一列重新開始</a:t>
+            </a:r>
+            <a:r>
+              <a:rPr lang="zh-TW" altLang="en-US" dirty="0" smtClean="0">
+                <a:solidFill>
+                  <a:srgbClr val="F2E3C8"/>
+                </a:solidFill>
+                <a:latin typeface="Microsoft JhengHei" pitchFamily="34" charset="0"/>
+                <a:ea typeface="Microsoft JhengHei" pitchFamily="34" charset="-122"/>
+                <a:cs typeface="Microsoft JhengHei" pitchFamily="34" charset="-120"/>
+              </a:rPr>
+              <a:t>，這樣只有</a:t>
+            </a:r>
+            <a:r>
+              <a:rPr lang="en-US" dirty="0" err="1" smtClean="0">
+                <a:solidFill>
+                  <a:srgbClr val="F2E3C8"/>
+                </a:solidFill>
+                <a:latin typeface="Microsoft JhengHei" pitchFamily="34" charset="0"/>
+                <a:ea typeface="Microsoft JhengHei" pitchFamily="34" charset="-122"/>
+                <a:cs typeface="Microsoft JhengHei" pitchFamily="34" charset="-120"/>
+              </a:rPr>
+              <a:t>一列錯</a:t>
+            </a:r>
+            <a:r>
+              <a:rPr lang="en-US" dirty="0" err="1">
+                <a:solidFill>
+                  <a:srgbClr val="F2E3C8"/>
+                </a:solidFill>
+                <a:latin typeface="Microsoft JhengHei" pitchFamily="34" charset="0"/>
+                <a:ea typeface="Microsoft JhengHei" pitchFamily="34" charset="-122"/>
+                <a:cs typeface="Microsoft JhengHei" pitchFamily="34" charset="-120"/>
+              </a:rPr>
+              <a:t>，</a:t>
+            </a:r>
+            <a:r>
+              <a:rPr lang="en-US" dirty="0" err="1" smtClean="0">
+                <a:solidFill>
+                  <a:srgbClr val="F2E3C8"/>
+                </a:solidFill>
+                <a:latin typeface="Microsoft JhengHei" pitchFamily="34" charset="0"/>
+                <a:ea typeface="Microsoft JhengHei" pitchFamily="34" charset="-122"/>
+                <a:cs typeface="Microsoft JhengHei" pitchFamily="34" charset="-120"/>
+              </a:rPr>
+              <a:t>不會整張</a:t>
+            </a:r>
+            <a:r>
+              <a:rPr lang="zh-TW" altLang="en-US" dirty="0" smtClean="0">
+                <a:solidFill>
+                  <a:srgbClr val="F2E3C8"/>
+                </a:solidFill>
+                <a:latin typeface="Microsoft JhengHei" pitchFamily="34" charset="0"/>
+                <a:ea typeface="Microsoft JhengHei" pitchFamily="34" charset="-122"/>
+                <a:cs typeface="Microsoft JhengHei" pitchFamily="34" charset="-120"/>
+              </a:rPr>
+              <a:t>都</a:t>
+            </a:r>
+            <a:r>
+              <a:rPr lang="en-US" dirty="0" smtClean="0">
+                <a:solidFill>
+                  <a:srgbClr val="F2E3C8"/>
+                </a:solidFill>
+                <a:latin typeface="Microsoft JhengHei" pitchFamily="34" charset="0"/>
+                <a:ea typeface="Microsoft JhengHei" pitchFamily="34" charset="-122"/>
+                <a:cs typeface="Microsoft JhengHei" pitchFamily="34" charset="-120"/>
+              </a:rPr>
+              <a:t>毀</a:t>
+            </a:r>
+            <a:r>
+              <a:rPr lang="en-US" dirty="0">
+                <a:solidFill>
+                  <a:srgbClr val="F2E3C8"/>
+                </a:solidFill>
+                <a:latin typeface="Microsoft JhengHei" pitchFamily="34" charset="0"/>
+                <a:ea typeface="Microsoft JhengHei" pitchFamily="34" charset="-122"/>
+                <a:cs typeface="Microsoft JhengHei" pitchFamily="34" charset="-120"/>
+              </a:rPr>
+              <a:t>。</a:t>
+            </a:r>
+            <a:endParaRPr lang="en-US" dirty="0"/>
+          </a:p>
+        </p:txBody>
+      </p:sp>
+    </p:spTree>
+  </p:cSld>
+  <p:clrMapOvr>
+    <a:masterClrMapping/>
+  </p:clrMapOvr>
+  <p:timing>
+    <p:tnLst>
+      <p:par>
+        <p:cTn id="1" dur="indefinite" restart="never" nodeType="tmRoot"/>
+      </p:par>
+    </p:tnLst>
+  </p:timing>
+</p:sld>
+</file>
+
+<file path=ppt/slides/slide11.xml><?xml version="1.0" encoding="utf-8"?>
+<p:sld xmlns:a="http://schemas.openxmlformats.org/drawingml/2006/main" xmlns:r="http://schemas.openxmlformats.org/officeDocument/2006/relationships" xmlns:p="http://schemas.openxmlformats.org/presentationml/2006/main">
   <p:cSld name="Slide 8">
     <p:bg>
       <p:bgPr>
@@ -3223,7 +4490,7 @@
 </p:sld>
 </file>
 
-<file path=ppt/slides/slide11.xml><?xml version="1.0" encoding="utf-8"?>
+<file path=ppt/slides/slide12.xml><?xml version="1.0" encoding="utf-8"?>
 <p:sld xmlns:a="http://schemas.openxmlformats.org/drawingml/2006/main" xmlns:r="http://schemas.openxmlformats.org/officeDocument/2006/relationships" xmlns:p="http://schemas.openxmlformats.org/presentationml/2006/main">
   <p:cSld name="Slide 9">
     <p:bg>
@@ -3567,7 +4834,7 @@
 </p:sld>
 </file>
 
-<file path=ppt/slides/slide12.xml><?xml version="1.0" encoding="utf-8"?>
+<file path=ppt/slides/slide13.xml><?xml version="1.0" encoding="utf-8"?>
 <p:sld xmlns:a="http://schemas.openxmlformats.org/drawingml/2006/main" xmlns:r="http://schemas.openxmlformats.org/officeDocument/2006/relationships" xmlns:p="http://schemas.openxmlformats.org/presentationml/2006/main">
   <p:cSld name="Slide 10">
     <p:bg>
@@ -4413,7 +5680,7 @@
 </p:sld>
 </file>
 
-<file path=ppt/slides/slide13.xml><?xml version="1.0" encoding="utf-8"?>
+<file path=ppt/slides/slide14.xml><?xml version="1.0" encoding="utf-8"?>
 <p:sld xmlns:a="http://schemas.openxmlformats.org/drawingml/2006/main" xmlns:r="http://schemas.openxmlformats.org/officeDocument/2006/relationships" xmlns:p="http://schemas.openxmlformats.org/presentationml/2006/main">
   <p:cSld name="Slide 12">
     <p:bg>
@@ -5479,7 +6746,7 @@
 </p:sld>
 </file>
 
-<file path=ppt/slides/slide14.xml><?xml version="1.0" encoding="utf-8"?>
+<file path=ppt/slides/slide15.xml><?xml version="1.0" encoding="utf-8"?>
 <p:sld xmlns:a="http://schemas.openxmlformats.org/drawingml/2006/main" xmlns:r="http://schemas.openxmlformats.org/officeDocument/2006/relationships" xmlns:p="http://schemas.openxmlformats.org/presentationml/2006/main">
   <p:cSld name="Slide 11">
     <p:bg>
@@ -6682,7 +7949,7 @@
 </p:sld>
 </file>
 
-<file path=ppt/slides/slide15.xml><?xml version="1.0" encoding="utf-8"?>
+<file path=ppt/slides/slide16.xml><?xml version="1.0" encoding="utf-8"?>
 <p:sld xmlns:a="http://schemas.openxmlformats.org/drawingml/2006/main" xmlns:r="http://schemas.openxmlformats.org/officeDocument/2006/relationships" xmlns:p="http://schemas.openxmlformats.org/presentationml/2006/main">
   <p:cSld name="Slide 13">
     <p:bg>
@@ -12805,7 +14072,7 @@
 
 <file path=ppt/slides/slide9.xml><?xml version="1.0" encoding="utf-8"?>
 <p:sld xmlns:a="http://schemas.openxmlformats.org/drawingml/2006/main" xmlns:r="http://schemas.openxmlformats.org/officeDocument/2006/relationships" xmlns:p="http://schemas.openxmlformats.org/presentationml/2006/main">
-  <p:cSld name="Slide 7">
+  <p:cSld name="Slide 6">
     <p:bg>
       <p:bgPr>
         <a:solidFill>
@@ -12830,163 +14097,18 @@
       </p:grpSpPr>
       <p:sp>
         <p:nvSpPr>
-          <p:cNvPr id="2" name="Text 0"/>
-          <p:cNvSpPr/>
-          <p:nvPr/>
-        </p:nvSpPr>
-        <p:spPr>
-          <a:xfrm>
-            <a:off x="457200" y="6473952"/>
-            <a:ext cx="7315200" cy="274320"/>
-          </a:xfrm>
-          <a:prstGeom prst="rect">
-            <a:avLst/>
-          </a:prstGeom>
-          <a:noFill/>
-          <a:ln/>
-        </p:spPr>
-        <p:txBody>
-          <a:bodyPr wrap="square" lIns="0" tIns="0" rIns="0" bIns="0" rtlCol="0" anchor="ctr"/>
-          <a:lstStyle/>
-          <a:p>
-            <a:pPr marL="0" indent="0">
-              <a:buNone/>
-            </a:pPr>
-            <a:r>
-              <a:rPr lang="en-US" sz="900" dirty="0">
-                <a:solidFill>
-                  <a:srgbClr val="7A93AE"/>
-                </a:solidFill>
-                <a:latin typeface="Microsoft JhengHei" pitchFamily="34" charset="0"/>
-                <a:ea typeface="Microsoft JhengHei" pitchFamily="34" charset="-122"/>
-                <a:cs typeface="Microsoft JhengHei" pitchFamily="34" charset="-120"/>
-              </a:rPr>
-              <a:t>MISSION 02 · 火星第一眼：1976 維京一號的拍照任務　7</a:t>
-            </a:r>
-            <a:endParaRPr lang="en-US" sz="900" dirty="0"/>
-          </a:p>
-        </p:txBody>
-      </p:sp>
-      <p:sp>
-        <p:nvSpPr>
-          <p:cNvPr id="4" name="Text 1"/>
-          <p:cNvSpPr/>
-          <p:nvPr/>
-        </p:nvSpPr>
-        <p:spPr>
-          <a:xfrm>
-            <a:off x="457200" y="320040"/>
-            <a:ext cx="11247120" cy="640080"/>
-          </a:xfrm>
-          <a:prstGeom prst="rect">
-            <a:avLst/>
-          </a:prstGeom>
-          <a:noFill/>
-          <a:ln/>
-        </p:spPr>
-        <p:txBody>
-          <a:bodyPr wrap="square" lIns="0" tIns="0" rIns="0" bIns="0" rtlCol="0" anchor="ctr"/>
-          <a:lstStyle/>
-          <a:p>
-            <a:pPr marL="0" indent="0">
-              <a:buNone/>
-            </a:pPr>
-            <a:r>
-              <a:rPr lang="zh-TW" altLang="en-US" sz="3000" b="1" dirty="0" smtClean="0">
-                <a:solidFill>
-                  <a:srgbClr val="F2E3C8"/>
-                </a:solidFill>
-                <a:latin typeface="Microsoft JhengHei" pitchFamily="34" charset="0"/>
-                <a:ea typeface="Microsoft JhengHei" pitchFamily="34" charset="-122"/>
-                <a:cs typeface="Microsoft JhengHei" pitchFamily="34" charset="-120"/>
-              </a:rPr>
-              <a:t>初階任務</a:t>
-            </a:r>
-            <a:r>
-              <a:rPr lang="en-US" sz="3000" b="1" dirty="0" smtClean="0">
-                <a:solidFill>
-                  <a:srgbClr val="F2E3C8"/>
-                </a:solidFill>
-                <a:latin typeface="Microsoft JhengHei" pitchFamily="34" charset="0"/>
-                <a:ea typeface="Microsoft JhengHei" pitchFamily="34" charset="-122"/>
-                <a:cs typeface="Microsoft JhengHei" pitchFamily="34" charset="-120"/>
-              </a:rPr>
-              <a:t>｜</a:t>
-            </a:r>
-            <a:r>
-              <a:rPr lang="en-US" sz="3000" b="1" dirty="0" err="1">
-                <a:solidFill>
-                  <a:srgbClr val="F2E3C8"/>
-                </a:solidFill>
-                <a:latin typeface="Microsoft JhengHei" pitchFamily="34" charset="0"/>
-                <a:ea typeface="Microsoft JhengHei" pitchFamily="34" charset="-122"/>
-                <a:cs typeface="Microsoft JhengHei" pitchFamily="34" charset="-120"/>
-                <a:hlinkClick r:id="rId3"/>
-              </a:rPr>
-              <a:t>光訊號播送台</a:t>
-            </a:r>
-            <a:r>
-              <a:rPr lang="en-US" sz="3000" b="1" dirty="0" smtClean="0">
-                <a:solidFill>
-                  <a:srgbClr val="F2E3C8"/>
-                </a:solidFill>
-                <a:latin typeface="Microsoft JhengHei" pitchFamily="34" charset="0"/>
-                <a:ea typeface="Microsoft JhengHei" pitchFamily="34" charset="-122"/>
-                <a:cs typeface="Microsoft JhengHei" pitchFamily="34" charset="-120"/>
-              </a:rPr>
-              <a:t>：</a:t>
-            </a:r>
-            <a:r>
-              <a:rPr lang="zh-TW" altLang="en-US" sz="3000" b="1" dirty="0" smtClean="0">
-                <a:solidFill>
-                  <a:srgbClr val="F2E3C8"/>
-                </a:solidFill>
-                <a:latin typeface="Microsoft JhengHei" pitchFamily="34" charset="0"/>
-                <a:ea typeface="Microsoft JhengHei" pitchFamily="34" charset="-122"/>
-                <a:cs typeface="Microsoft JhengHei" pitchFamily="34" charset="-120"/>
-              </a:rPr>
-              <a:t>老師先傳訊號</a:t>
-            </a:r>
-            <a:r>
-              <a:rPr lang="en-US" sz="3000" b="1" dirty="0" smtClean="0">
-                <a:solidFill>
-                  <a:srgbClr val="F2E3C8"/>
-                </a:solidFill>
-                <a:latin typeface="Microsoft JhengHei" pitchFamily="34" charset="0"/>
-                <a:ea typeface="Microsoft JhengHei" pitchFamily="34" charset="-122"/>
-                <a:cs typeface="Microsoft JhengHei" pitchFamily="34" charset="-120"/>
-              </a:rPr>
-              <a:t>・</a:t>
-            </a:r>
-            <a:r>
-              <a:rPr lang="zh-TW" altLang="en-US" sz="3000" b="1" dirty="0" smtClean="0">
-                <a:solidFill>
-                  <a:srgbClr val="F2E3C8"/>
-                </a:solidFill>
-                <a:latin typeface="Microsoft JhengHei" pitchFamily="34" charset="0"/>
-                <a:ea typeface="Microsoft JhengHei" pitchFamily="34" charset="-122"/>
-                <a:cs typeface="Microsoft JhengHei" pitchFamily="34" charset="-120"/>
-              </a:rPr>
-              <a:t>你們試著接收</a:t>
-            </a:r>
-            <a:endParaRPr lang="en-US" sz="3000" dirty="0"/>
-          </a:p>
-        </p:txBody>
-      </p:sp>
-      <p:sp>
-        <p:nvSpPr>
-          <p:cNvPr id="5" name="Shape 2"/>
-          <p:cNvSpPr/>
-          <p:nvPr/>
-        </p:nvSpPr>
-        <p:spPr>
-          <a:xfrm>
-            <a:off x="457200" y="1280160"/>
-            <a:ext cx="3611880" cy="2286000"/>
+          <p:cNvPr id="22" name="Shape 14"/>
+          <p:cNvSpPr/>
+          <p:nvPr/>
+        </p:nvSpPr>
+        <p:spPr>
+          <a:xfrm>
+            <a:off x="5603846" y="6062193"/>
+            <a:ext cx="6100474" cy="646331"/>
           </a:xfrm>
           <a:prstGeom prst="roundRect">
             <a:avLst>
-              <a:gd name="adj" fmla="val 3200"/>
+              <a:gd name="adj" fmla="val 4103"/>
             </a:avLst>
           </a:prstGeom>
           <a:solidFill>
@@ -13002,73 +14124,14 @@
       </p:sp>
       <p:sp>
         <p:nvSpPr>
-          <p:cNvPr id="6" name="Shape 3"/>
-          <p:cNvSpPr/>
-          <p:nvPr/>
-        </p:nvSpPr>
-        <p:spPr>
-          <a:xfrm>
-            <a:off x="731520" y="1554480"/>
-            <a:ext cx="548640" cy="548640"/>
-          </a:xfrm>
-          <a:prstGeom prst="ellipse">
-            <a:avLst/>
-          </a:prstGeom>
-          <a:solidFill>
-            <a:srgbClr val="FFB347"/>
-          </a:solidFill>
-          <a:ln/>
-        </p:spPr>
-      </p:sp>
-      <p:sp>
-        <p:nvSpPr>
-          <p:cNvPr id="7" name="Text 4"/>
-          <p:cNvSpPr/>
-          <p:nvPr/>
-        </p:nvSpPr>
-        <p:spPr>
-          <a:xfrm>
-            <a:off x="731520" y="1554480"/>
-            <a:ext cx="548640" cy="548640"/>
-          </a:xfrm>
-          <a:prstGeom prst="rect">
-            <a:avLst/>
-          </a:prstGeom>
-          <a:noFill/>
-          <a:ln/>
-        </p:spPr>
-        <p:txBody>
-          <a:bodyPr wrap="square" lIns="0" tIns="0" rIns="0" bIns="0" rtlCol="0" anchor="ctr"/>
-          <a:lstStyle/>
-          <a:p>
-            <a:pPr marL="0" indent="0" algn="ctr">
-              <a:buNone/>
-            </a:pPr>
-            <a:r>
-              <a:rPr lang="en-US" sz="2000" b="1" dirty="0">
-                <a:solidFill>
-                  <a:srgbClr val="070B14"/>
-                </a:solidFill>
-                <a:latin typeface="Microsoft JhengHei" pitchFamily="34" charset="0"/>
-                <a:ea typeface="Microsoft JhengHei" pitchFamily="34" charset="-122"/>
-                <a:cs typeface="Microsoft JhengHei" pitchFamily="34" charset="-120"/>
-              </a:rPr>
-              <a:t>1</a:t>
-            </a:r>
-            <a:endParaRPr lang="en-US" sz="2000" dirty="0"/>
-          </a:p>
-        </p:txBody>
-      </p:sp>
-      <p:sp>
-        <p:nvSpPr>
-          <p:cNvPr id="8" name="Text 5"/>
-          <p:cNvSpPr/>
-          <p:nvPr/>
-        </p:nvSpPr>
-        <p:spPr>
-          <a:xfrm>
-            <a:off x="1463040" y="1600200"/>
-            <a:ext cx="2468880" cy="457200"/>
+          <p:cNvPr id="2" name="Text 0"/>
+          <p:cNvSpPr/>
+          <p:nvPr/>
+        </p:nvSpPr>
+        <p:spPr>
+          <a:xfrm>
+            <a:off x="457200" y="6473952"/>
+            <a:ext cx="7315200" cy="274320"/>
           </a:xfrm>
           <a:prstGeom prst="rect">
             <a:avLst/>
@@ -13084,30 +14147,30 @@
               <a:buNone/>
             </a:pPr>
             <a:r>
-              <a:rPr lang="en-US" sz="1800" b="1" dirty="0">
-                <a:solidFill>
-                  <a:srgbClr val="F2E3C8"/>
-                </a:solidFill>
-                <a:latin typeface="Microsoft JhengHei" pitchFamily="34" charset="0"/>
-                <a:ea typeface="Microsoft JhengHei" pitchFamily="34" charset="-122"/>
-                <a:cs typeface="Microsoft JhengHei" pitchFamily="34" charset="-120"/>
-              </a:rPr>
-              <a:t>試傳第 1 列</a:t>
-            </a:r>
-            <a:endParaRPr lang="en-US" sz="1800" dirty="0"/>
-          </a:p>
-        </p:txBody>
-      </p:sp>
-      <p:sp>
-        <p:nvSpPr>
-          <p:cNvPr id="9" name="Text 6"/>
-          <p:cNvSpPr/>
-          <p:nvPr/>
-        </p:nvSpPr>
-        <p:spPr>
-          <a:xfrm>
-            <a:off x="777240" y="2286000"/>
-            <a:ext cx="3017520" cy="1097280"/>
+              <a:rPr lang="en-US" sz="900" dirty="0">
+                <a:solidFill>
+                  <a:srgbClr val="7A93AE"/>
+                </a:solidFill>
+                <a:latin typeface="Microsoft JhengHei" pitchFamily="34" charset="0"/>
+                <a:ea typeface="Microsoft JhengHei" pitchFamily="34" charset="-122"/>
+                <a:cs typeface="Microsoft JhengHei" pitchFamily="34" charset="-120"/>
+              </a:rPr>
+              <a:t>MISSION 02 · 火星第一眼：1976 維京一號的拍照任務　7</a:t>
+            </a:r>
+            <a:endParaRPr lang="en-US" sz="900" dirty="0"/>
+          </a:p>
+        </p:txBody>
+      </p:sp>
+      <p:sp>
+        <p:nvSpPr>
+          <p:cNvPr id="4" name="Text 1"/>
+          <p:cNvSpPr/>
+          <p:nvPr/>
+        </p:nvSpPr>
+        <p:spPr>
+          <a:xfrm>
+            <a:off x="457200" y="320040"/>
+            <a:ext cx="11247120" cy="640080"/>
           </a:xfrm>
           <a:prstGeom prst="rect">
             <a:avLst/>
@@ -13116,119 +14179,63 @@
           <a:ln/>
         </p:spPr>
         <p:txBody>
-          <a:bodyPr wrap="square" lIns="0" tIns="0" rIns="0" bIns="0" rtlCol="0" anchor="t"/>
+          <a:bodyPr wrap="square" lIns="0" tIns="0" rIns="0" bIns="0" rtlCol="0" anchor="ctr"/>
           <a:lstStyle/>
           <a:p>
             <a:pPr marL="0" indent="0">
-              <a:lnSpc>
-                <a:spcPct val="120000"/>
-              </a:lnSpc>
               <a:buNone/>
             </a:pPr>
             <a:r>
-              <a:rPr lang="en-US" sz="3000" dirty="0" err="1" smtClean="0">
-                <a:solidFill>
-                  <a:srgbClr val="C9D6E8"/>
-                </a:solidFill>
-                <a:latin typeface="Microsoft JhengHei" pitchFamily="34" charset="0"/>
-                <a:ea typeface="Microsoft JhengHei" pitchFamily="34" charset="-122"/>
-                <a:cs typeface="Microsoft JhengHei" pitchFamily="34" charset="-120"/>
-              </a:rPr>
-              <a:t>全班</a:t>
-            </a:r>
-            <a:r>
-              <a:rPr lang="zh-TW" altLang="en-US" sz="3000" dirty="0" smtClean="0">
-                <a:solidFill>
-                  <a:srgbClr val="C9D6E8"/>
-                </a:solidFill>
-                <a:latin typeface="Microsoft JhengHei" pitchFamily="34" charset="0"/>
-                <a:ea typeface="Microsoft JhengHei" pitchFamily="34" charset="-122"/>
-                <a:cs typeface="Microsoft JhengHei" pitchFamily="34" charset="-120"/>
-              </a:rPr>
-              <a:t>練習一次</a:t>
-            </a:r>
-            <a:r>
-              <a:rPr lang="en-US" sz="3000" dirty="0" smtClean="0">
-                <a:solidFill>
-                  <a:srgbClr val="C9D6E8"/>
-                </a:solidFill>
-                <a:latin typeface="Microsoft JhengHei" pitchFamily="34" charset="0"/>
-                <a:ea typeface="Microsoft JhengHei" pitchFamily="34" charset="-122"/>
-                <a:cs typeface="Microsoft JhengHei" pitchFamily="34" charset="-120"/>
-              </a:rPr>
-              <a:t>：</a:t>
+              <a:rPr lang="en-US" sz="3000" b="1" dirty="0" err="1">
+                <a:solidFill>
+                  <a:srgbClr val="F2E3C8"/>
+                </a:solidFill>
+                <a:latin typeface="Microsoft JhengHei" pitchFamily="34" charset="0"/>
+                <a:ea typeface="Microsoft JhengHei" pitchFamily="34" charset="-122"/>
+                <a:cs typeface="Microsoft JhengHei" pitchFamily="34" charset="-120"/>
+              </a:rPr>
+              <a:t>這些規則，</a:t>
+            </a:r>
+            <a:r>
+              <a:rPr lang="en-US" sz="3000" b="1" dirty="0" err="1" smtClean="0">
+                <a:solidFill>
+                  <a:srgbClr val="F2E3C8"/>
+                </a:solidFill>
+                <a:latin typeface="Microsoft JhengHei" pitchFamily="34" charset="0"/>
+                <a:ea typeface="Microsoft JhengHei" pitchFamily="34" charset="-122"/>
+                <a:cs typeface="Microsoft JhengHei" pitchFamily="34" charset="-120"/>
+              </a:rPr>
+              <a:t>教室裡</a:t>
+            </a:r>
+            <a:r>
+              <a:rPr lang="zh-TW" altLang="en-US" sz="3000" b="1" dirty="0" smtClean="0">
+                <a:solidFill>
+                  <a:srgbClr val="F2E3C8"/>
+                </a:solidFill>
+                <a:latin typeface="Microsoft JhengHei" pitchFamily="34" charset="0"/>
+                <a:ea typeface="Microsoft JhengHei" pitchFamily="34" charset="-122"/>
+                <a:cs typeface="Microsoft JhengHei" pitchFamily="34" charset="-120"/>
+              </a:rPr>
+              <a:t>天天在用！</a:t>
             </a:r>
             <a:endParaRPr lang="en-US" sz="3000" dirty="0"/>
           </a:p>
-          <a:p>
-            <a:pPr marL="0" indent="0">
-              <a:lnSpc>
-                <a:spcPct val="120000"/>
-              </a:lnSpc>
-              <a:buNone/>
-            </a:pPr>
-            <a:r>
-              <a:rPr lang="en-US" sz="3000" dirty="0" smtClean="0">
-                <a:solidFill>
-                  <a:srgbClr val="C9D6E8"/>
-                </a:solidFill>
-                <a:latin typeface="Microsoft JhengHei" pitchFamily="34" charset="0"/>
-                <a:ea typeface="Microsoft JhengHei" pitchFamily="34" charset="-122"/>
-                <a:cs typeface="Microsoft JhengHei" pitchFamily="34" charset="-120"/>
-              </a:rPr>
-              <a:t>數</a:t>
-            </a:r>
-            <a:r>
-              <a:rPr lang="zh-TW" altLang="en-US" sz="3000" dirty="0" smtClean="0">
-                <a:solidFill>
-                  <a:srgbClr val="C9D6E8"/>
-                </a:solidFill>
-                <a:latin typeface="Microsoft JhengHei" pitchFamily="34" charset="0"/>
-                <a:ea typeface="Microsoft JhengHei" pitchFamily="34" charset="-122"/>
-                <a:cs typeface="Microsoft JhengHei" pitchFamily="34" charset="-120"/>
-              </a:rPr>
-              <a:t>節拍</a:t>
-            </a:r>
-            <a:r>
-              <a:rPr lang="en-US" sz="3000" dirty="0" smtClean="0">
-                <a:solidFill>
-                  <a:srgbClr val="C9D6E8"/>
-                </a:solidFill>
-                <a:latin typeface="Microsoft JhengHei" pitchFamily="34" charset="0"/>
-                <a:ea typeface="Microsoft JhengHei" pitchFamily="34" charset="-122"/>
-                <a:cs typeface="Microsoft JhengHei" pitchFamily="34" charset="-120"/>
-              </a:rPr>
-              <a:t>、</a:t>
-            </a:r>
-            <a:r>
-              <a:rPr lang="en-US" sz="3000" dirty="0">
-                <a:solidFill>
-                  <a:srgbClr val="C9D6E8"/>
-                </a:solidFill>
-                <a:latin typeface="Microsoft JhengHei" pitchFamily="34" charset="0"/>
-                <a:ea typeface="Microsoft JhengHei" pitchFamily="34" charset="-122"/>
-                <a:cs typeface="Microsoft JhengHei" pitchFamily="34" charset="-120"/>
-              </a:rPr>
-              <a:t>認閃爍</a:t>
-            </a:r>
-            <a:endParaRPr lang="en-US" sz="3000" dirty="0"/>
-          </a:p>
-        </p:txBody>
-      </p:sp>
-      <p:sp>
-        <p:nvSpPr>
-          <p:cNvPr id="10" name="Shape 7"/>
-          <p:cNvSpPr/>
-          <p:nvPr/>
-        </p:nvSpPr>
-        <p:spPr>
-          <a:xfrm>
-            <a:off x="4434840" y="1280160"/>
-            <a:ext cx="3611880" cy="2286000"/>
+        </p:txBody>
+      </p:sp>
+      <p:sp>
+        <p:nvSpPr>
+          <p:cNvPr id="5" name="Shape 2"/>
+          <p:cNvSpPr/>
+          <p:nvPr/>
+        </p:nvSpPr>
+        <p:spPr>
+          <a:xfrm>
+            <a:off x="249382" y="1920285"/>
+            <a:ext cx="2724912" cy="2651760"/>
           </a:xfrm>
           <a:prstGeom prst="roundRect">
             <a:avLst>
-              <a:gd name="adj" fmla="val 3200"/>
+              <a:gd name="adj" fmla="val 2759"/>
             </a:avLst>
           </a:prstGeom>
           <a:solidFill>
@@ -13244,73 +14251,14 @@
       </p:sp>
       <p:sp>
         <p:nvSpPr>
-          <p:cNvPr id="11" name="Shape 8"/>
-          <p:cNvSpPr/>
-          <p:nvPr/>
-        </p:nvSpPr>
-        <p:spPr>
-          <a:xfrm>
-            <a:off x="4709160" y="1554480"/>
-            <a:ext cx="548640" cy="548640"/>
-          </a:xfrm>
-          <a:prstGeom prst="ellipse">
-            <a:avLst/>
-          </a:prstGeom>
-          <a:solidFill>
-            <a:srgbClr val="FFB347"/>
-          </a:solidFill>
-          <a:ln/>
-        </p:spPr>
-      </p:sp>
-      <p:sp>
-        <p:nvSpPr>
-          <p:cNvPr id="12" name="Text 9"/>
-          <p:cNvSpPr/>
-          <p:nvPr/>
-        </p:nvSpPr>
-        <p:spPr>
-          <a:xfrm>
-            <a:off x="4709160" y="1554480"/>
-            <a:ext cx="548640" cy="548640"/>
-          </a:xfrm>
-          <a:prstGeom prst="rect">
-            <a:avLst/>
-          </a:prstGeom>
-          <a:noFill/>
-          <a:ln/>
-        </p:spPr>
-        <p:txBody>
-          <a:bodyPr wrap="square" lIns="0" tIns="0" rIns="0" bIns="0" rtlCol="0" anchor="ctr"/>
-          <a:lstStyle/>
-          <a:p>
-            <a:pPr marL="0" indent="0" algn="ctr">
-              <a:buNone/>
-            </a:pPr>
-            <a:r>
-              <a:rPr lang="en-US" sz="2000" b="1" dirty="0">
-                <a:solidFill>
-                  <a:srgbClr val="070B14"/>
-                </a:solidFill>
-                <a:latin typeface="Microsoft JhengHei" pitchFamily="34" charset="0"/>
-                <a:ea typeface="Microsoft JhengHei" pitchFamily="34" charset="-122"/>
-                <a:cs typeface="Microsoft JhengHei" pitchFamily="34" charset="-120"/>
-              </a:rPr>
-              <a:t>2</a:t>
-            </a:r>
-            <a:endParaRPr lang="en-US" sz="2000" dirty="0"/>
-          </a:p>
-        </p:txBody>
-      </p:sp>
-      <p:sp>
-        <p:nvSpPr>
-          <p:cNvPr id="13" name="Text 10"/>
-          <p:cNvSpPr/>
-          <p:nvPr/>
-        </p:nvSpPr>
-        <p:spPr>
-          <a:xfrm>
-            <a:off x="5440680" y="1600200"/>
-            <a:ext cx="2468880" cy="457200"/>
+          <p:cNvPr id="6" name="Text 3"/>
+          <p:cNvSpPr/>
+          <p:nvPr/>
+        </p:nvSpPr>
+        <p:spPr>
+          <a:xfrm>
+            <a:off x="477982" y="2148885"/>
+            <a:ext cx="2286000" cy="457200"/>
           </a:xfrm>
           <a:prstGeom prst="rect">
             <a:avLst/>
@@ -13326,30 +14274,30 @@
               <a:buNone/>
             </a:pPr>
             <a:r>
-              <a:rPr lang="en-US" sz="1800" b="1" dirty="0">
-                <a:solidFill>
-                  <a:srgbClr val="F2E3C8"/>
-                </a:solidFill>
-                <a:latin typeface="Microsoft JhengHei" pitchFamily="34" charset="0"/>
-                <a:ea typeface="Microsoft JhengHei" pitchFamily="34" charset="-122"/>
-                <a:cs typeface="Microsoft JhengHei" pitchFamily="34" charset="-120"/>
-              </a:rPr>
-              <a:t>播送整張 5×5</a:t>
-            </a:r>
-            <a:endParaRPr lang="en-US" sz="1800" dirty="0"/>
-          </a:p>
-        </p:txBody>
-      </p:sp>
-      <p:sp>
-        <p:nvSpPr>
-          <p:cNvPr id="14" name="Text 11"/>
-          <p:cNvSpPr/>
-          <p:nvPr/>
-        </p:nvSpPr>
-        <p:spPr>
-          <a:xfrm>
-            <a:off x="4572000" y="2221992"/>
-            <a:ext cx="3200400" cy="1097280"/>
+              <a:rPr lang="en-US" sz="2500" b="1" dirty="0">
+                <a:solidFill>
+                  <a:srgbClr val="FFB347"/>
+                </a:solidFill>
+                <a:latin typeface="Microsoft JhengHei" pitchFamily="34" charset="0"/>
+                <a:ea typeface="Microsoft JhengHei" pitchFamily="34" charset="-122"/>
+                <a:cs typeface="Microsoft JhengHei" pitchFamily="34" charset="-120"/>
+              </a:rPr>
+              <a:t>① 代號</a:t>
+            </a:r>
+            <a:endParaRPr lang="en-US" sz="2500" dirty="0"/>
+          </a:p>
+        </p:txBody>
+      </p:sp>
+      <p:sp>
+        <p:nvSpPr>
+          <p:cNvPr id="7" name="Text 4"/>
+          <p:cNvSpPr/>
+          <p:nvPr/>
+        </p:nvSpPr>
+        <p:spPr>
+          <a:xfrm>
+            <a:off x="477982" y="2697525"/>
+            <a:ext cx="2286000" cy="1737360"/>
           </a:xfrm>
           <a:prstGeom prst="rect">
             <a:avLst/>
@@ -13361,158 +14309,61 @@
           <a:bodyPr wrap="square" lIns="0" tIns="0" rIns="0" bIns="0" rtlCol="0" anchor="t"/>
           <a:lstStyle/>
           <a:p>
-            <a:pPr>
+            <a:pPr marL="0" indent="0">
               <a:lnSpc>
-                <a:spcPct val="120000"/>
+                <a:spcPct val="125000"/>
               </a:lnSpc>
+              <a:buNone/>
             </a:pPr>
             <a:r>
-              <a:rPr lang="en-US" sz="2500" dirty="0" err="1" smtClean="0">
-                <a:solidFill>
-                  <a:srgbClr val="C9D6E8"/>
-                </a:solidFill>
-                <a:latin typeface="Microsoft JhengHei" pitchFamily="34" charset="0"/>
-                <a:ea typeface="Microsoft JhengHei" pitchFamily="34" charset="-122"/>
-                <a:cs typeface="Microsoft JhengHei" pitchFamily="34" charset="-120"/>
-              </a:rPr>
-              <a:t>亮</a:t>
-            </a:r>
-            <a:r>
-              <a:rPr lang="en-US" sz="2500" dirty="0" err="1">
-                <a:solidFill>
-                  <a:srgbClr val="C9D6E8"/>
-                </a:solidFill>
-                <a:latin typeface="Microsoft JhengHei" pitchFamily="34" charset="0"/>
-                <a:ea typeface="Microsoft JhengHei" pitchFamily="34" charset="-122"/>
-                <a:cs typeface="Microsoft JhengHei" pitchFamily="34" charset="-120"/>
-              </a:rPr>
-              <a:t>／</a:t>
-            </a:r>
-            <a:r>
-              <a:rPr lang="en-US" sz="2500" dirty="0" err="1" smtClean="0">
-                <a:solidFill>
-                  <a:srgbClr val="C9D6E8"/>
-                </a:solidFill>
-                <a:latin typeface="Microsoft JhengHei" pitchFamily="34" charset="0"/>
-                <a:ea typeface="Microsoft JhengHei" pitchFamily="34" charset="-122"/>
-                <a:cs typeface="Microsoft JhengHei" pitchFamily="34" charset="-120"/>
-              </a:rPr>
-              <a:t>暗</a:t>
-            </a:r>
-            <a:r>
-              <a:rPr lang="zh-TW" altLang="en-US" sz="2500" dirty="0" smtClean="0">
-                <a:solidFill>
-                  <a:srgbClr val="C9D6E8"/>
-                </a:solidFill>
-                <a:latin typeface="Microsoft JhengHei" pitchFamily="34" charset="0"/>
-                <a:ea typeface="Microsoft JhengHei" pitchFamily="34" charset="-122"/>
-                <a:cs typeface="Microsoft JhengHei" pitchFamily="34" charset="-120"/>
-              </a:rPr>
-              <a:t>都是</a:t>
-            </a:r>
-            <a:r>
-              <a:rPr lang="en-US" altLang="zh-TW" sz="2500" dirty="0" err="1" smtClean="0">
-                <a:solidFill>
-                  <a:srgbClr val="C9D6E8"/>
-                </a:solidFill>
-                <a:latin typeface="Microsoft JhengHei" pitchFamily="34" charset="0"/>
-                <a:ea typeface="Microsoft JhengHei" pitchFamily="34" charset="-122"/>
-                <a:cs typeface="Microsoft JhengHei" pitchFamily="34" charset="-120"/>
-              </a:rPr>
-              <a:t>每拍</a:t>
-            </a:r>
-            <a:r>
-              <a:rPr lang="en-US" altLang="zh-TW" sz="2500" dirty="0" smtClean="0">
-                <a:solidFill>
-                  <a:srgbClr val="C9D6E8"/>
-                </a:solidFill>
-                <a:latin typeface="Microsoft JhengHei" pitchFamily="34" charset="0"/>
-                <a:ea typeface="Microsoft JhengHei" pitchFamily="34" charset="-122"/>
-                <a:cs typeface="Microsoft JhengHei" pitchFamily="34" charset="-120"/>
-              </a:rPr>
-              <a:t> </a:t>
-            </a:r>
-            <a:r>
-              <a:rPr lang="en-US" altLang="zh-TW" sz="2500" dirty="0">
-                <a:solidFill>
-                  <a:srgbClr val="C9D6E8"/>
-                </a:solidFill>
-                <a:latin typeface="Microsoft JhengHei" pitchFamily="34" charset="0"/>
-                <a:ea typeface="Microsoft JhengHei" pitchFamily="34" charset="-122"/>
-                <a:cs typeface="Microsoft JhengHei" pitchFamily="34" charset="-120"/>
-              </a:rPr>
-              <a:t>2 秒</a:t>
-            </a:r>
-            <a:endParaRPr lang="en-US" altLang="zh-TW" sz="2500" dirty="0"/>
-          </a:p>
-          <a:p>
-            <a:pPr>
+              <a:rPr lang="en-US" dirty="0">
+                <a:solidFill>
+                  <a:srgbClr val="F2E3C8"/>
+                </a:solidFill>
+                <a:latin typeface="Microsoft JhengHei" pitchFamily="34" charset="0"/>
+                <a:ea typeface="Microsoft JhengHei" pitchFamily="34" charset="-122"/>
+                <a:cs typeface="Microsoft JhengHei" pitchFamily="34" charset="-120"/>
+              </a:rPr>
+              <a:t>「老師拍兩下手</a:t>
+            </a:r>
+            <a:endParaRPr lang="en-US" dirty="0"/>
+          </a:p>
+          <a:p>
+            <a:pPr marL="0" indent="0">
               <a:lnSpc>
-                <a:spcPct val="120000"/>
+                <a:spcPct val="125000"/>
               </a:lnSpc>
+              <a:buNone/>
             </a:pPr>
             <a:r>
-              <a:rPr lang="zh-TW" altLang="en-US" sz="2500" dirty="0" smtClean="0">
-                <a:solidFill>
-                  <a:srgbClr val="C9D6E8"/>
-                </a:solidFill>
-                <a:latin typeface="Microsoft JhengHei" pitchFamily="34" charset="0"/>
-                <a:ea typeface="Microsoft JhengHei" pitchFamily="34" charset="-122"/>
-                <a:cs typeface="Microsoft JhengHei" pitchFamily="34" charset="-120"/>
-              </a:rPr>
-              <a:t>都會</a:t>
-            </a:r>
-            <a:r>
-              <a:rPr lang="en-US" altLang="zh-TW" sz="2500" dirty="0" err="1" smtClean="0">
-                <a:solidFill>
-                  <a:srgbClr val="C9D6E8"/>
-                </a:solidFill>
-                <a:latin typeface="Microsoft JhengHei" pitchFamily="34" charset="0"/>
-                <a:ea typeface="Microsoft JhengHei" pitchFamily="34" charset="-122"/>
-                <a:cs typeface="Microsoft JhengHei" pitchFamily="34" charset="-120"/>
-              </a:rPr>
-              <a:t>閃爍</a:t>
-            </a:r>
-            <a:r>
-              <a:rPr lang="en-US" altLang="zh-TW" sz="2500" dirty="0" smtClean="0">
-                <a:solidFill>
-                  <a:srgbClr val="C9D6E8"/>
-                </a:solidFill>
-                <a:latin typeface="Microsoft JhengHei" pitchFamily="34" charset="0"/>
-                <a:ea typeface="Microsoft JhengHei" pitchFamily="34" charset="-122"/>
-                <a:cs typeface="Microsoft JhengHei" pitchFamily="34" charset="-120"/>
-              </a:rPr>
-              <a:t> →</a:t>
-            </a:r>
-            <a:r>
-              <a:rPr lang="zh-TW" altLang="en-US" sz="2500" dirty="0" smtClean="0">
-                <a:solidFill>
-                  <a:srgbClr val="C9D6E8"/>
-                </a:solidFill>
-                <a:latin typeface="Microsoft JhengHei" pitchFamily="34" charset="0"/>
-                <a:ea typeface="Microsoft JhengHei" pitchFamily="34" charset="-122"/>
-                <a:cs typeface="Microsoft JhengHei" pitchFamily="34" charset="-120"/>
-              </a:rPr>
-              <a:t>每一列開頭與結束</a:t>
-            </a:r>
-            <a:endParaRPr lang="en-US" sz="2500" dirty="0"/>
-          </a:p>
-        </p:txBody>
-      </p:sp>
-      <p:sp>
-        <p:nvSpPr>
-          <p:cNvPr id="15" name="Shape 12"/>
-          <p:cNvSpPr/>
-          <p:nvPr/>
-        </p:nvSpPr>
-        <p:spPr>
-          <a:xfrm>
-            <a:off x="8412480" y="1280160"/>
-            <a:ext cx="3611880" cy="2286000"/>
+              <a:rPr lang="en-US" dirty="0">
+                <a:solidFill>
+                  <a:srgbClr val="F2E3C8"/>
+                </a:solidFill>
+                <a:latin typeface="Microsoft JhengHei" pitchFamily="34" charset="0"/>
+                <a:ea typeface="Microsoft JhengHei" pitchFamily="34" charset="-122"/>
+                <a:cs typeface="Microsoft JhengHei" pitchFamily="34" charset="-120"/>
+              </a:rPr>
+              <a:t>＝安靜」的共同暗號</a:t>
+            </a:r>
+            <a:endParaRPr lang="en-US" dirty="0"/>
+          </a:p>
+        </p:txBody>
+      </p:sp>
+      <p:sp>
+        <p:nvSpPr>
+          <p:cNvPr id="8" name="Shape 5"/>
+          <p:cNvSpPr/>
+          <p:nvPr/>
+        </p:nvSpPr>
+        <p:spPr>
+          <a:xfrm>
+            <a:off x="3212038" y="1920285"/>
+            <a:ext cx="2724912" cy="2651760"/>
           </a:xfrm>
           <a:prstGeom prst="roundRect">
             <a:avLst>
-              <a:gd name="adj" fmla="val 3200"/>
+              <a:gd name="adj" fmla="val 2759"/>
             </a:avLst>
           </a:prstGeom>
           <a:solidFill>
@@ -13528,73 +14379,14 @@
       </p:sp>
       <p:sp>
         <p:nvSpPr>
-          <p:cNvPr id="16" name="Shape 13"/>
-          <p:cNvSpPr/>
-          <p:nvPr/>
-        </p:nvSpPr>
-        <p:spPr>
-          <a:xfrm>
-            <a:off x="8686800" y="1554480"/>
-            <a:ext cx="548640" cy="548640"/>
-          </a:xfrm>
-          <a:prstGeom prst="ellipse">
-            <a:avLst/>
-          </a:prstGeom>
-          <a:solidFill>
-            <a:srgbClr val="FFB347"/>
-          </a:solidFill>
-          <a:ln/>
-        </p:spPr>
-      </p:sp>
-      <p:sp>
-        <p:nvSpPr>
-          <p:cNvPr id="17" name="Text 14"/>
-          <p:cNvSpPr/>
-          <p:nvPr/>
-        </p:nvSpPr>
-        <p:spPr>
-          <a:xfrm>
-            <a:off x="8686800" y="1554480"/>
-            <a:ext cx="548640" cy="548640"/>
-          </a:xfrm>
-          <a:prstGeom prst="rect">
-            <a:avLst/>
-          </a:prstGeom>
-          <a:noFill/>
-          <a:ln/>
-        </p:spPr>
-        <p:txBody>
-          <a:bodyPr wrap="square" lIns="0" tIns="0" rIns="0" bIns="0" rtlCol="0" anchor="ctr"/>
-          <a:lstStyle/>
-          <a:p>
-            <a:pPr marL="0" indent="0" algn="ctr">
-              <a:buNone/>
-            </a:pPr>
-            <a:r>
-              <a:rPr lang="en-US" sz="2000" b="1" dirty="0">
-                <a:solidFill>
-                  <a:srgbClr val="070B14"/>
-                </a:solidFill>
-                <a:latin typeface="Microsoft JhengHei" pitchFamily="34" charset="0"/>
-                <a:ea typeface="Microsoft JhengHei" pitchFamily="34" charset="-122"/>
-                <a:cs typeface="Microsoft JhengHei" pitchFamily="34" charset="-120"/>
-              </a:rPr>
-              <a:t>3</a:t>
-            </a:r>
-            <a:endParaRPr lang="en-US" sz="2000" dirty="0"/>
-          </a:p>
-        </p:txBody>
-      </p:sp>
-      <p:sp>
-        <p:nvSpPr>
-          <p:cNvPr id="18" name="Text 15"/>
-          <p:cNvSpPr/>
-          <p:nvPr/>
-        </p:nvSpPr>
-        <p:spPr>
-          <a:xfrm>
-            <a:off x="9418320" y="1600200"/>
-            <a:ext cx="2468880" cy="457200"/>
+          <p:cNvPr id="9" name="Text 6"/>
+          <p:cNvSpPr/>
+          <p:nvPr/>
+        </p:nvSpPr>
+        <p:spPr>
+          <a:xfrm>
+            <a:off x="3440638" y="2148885"/>
+            <a:ext cx="2286000" cy="457200"/>
           </a:xfrm>
           <a:prstGeom prst="rect">
             <a:avLst/>
@@ -13610,30 +14402,30 @@
               <a:buNone/>
             </a:pPr>
             <a:r>
-              <a:rPr lang="zh-TW" altLang="en-US" sz="1800" b="1" dirty="0" smtClean="0">
-                <a:solidFill>
-                  <a:srgbClr val="F2E3C8"/>
-                </a:solidFill>
-                <a:latin typeface="Microsoft JhengHei" pitchFamily="34" charset="0"/>
-                <a:ea typeface="Microsoft JhengHei" pitchFamily="34" charset="-122"/>
-                <a:cs typeface="Microsoft JhengHei" pitchFamily="34" charset="-120"/>
-              </a:rPr>
-              <a:t>圖片比對</a:t>
-            </a:r>
-            <a:endParaRPr lang="en-US" sz="1800" dirty="0"/>
-          </a:p>
-        </p:txBody>
-      </p:sp>
-      <p:sp>
-        <p:nvSpPr>
-          <p:cNvPr id="19" name="Text 16"/>
-          <p:cNvSpPr/>
-          <p:nvPr/>
-        </p:nvSpPr>
-        <p:spPr>
-          <a:xfrm>
-            <a:off x="8732520" y="2011911"/>
-            <a:ext cx="3017520" cy="1097280"/>
+              <a:rPr lang="en-US" sz="2500" b="1" dirty="0">
+                <a:solidFill>
+                  <a:srgbClr val="FFB347"/>
+                </a:solidFill>
+                <a:latin typeface="Microsoft JhengHei" pitchFamily="34" charset="0"/>
+                <a:ea typeface="Microsoft JhengHei" pitchFamily="34" charset="-122"/>
+                <a:cs typeface="Microsoft JhengHei" pitchFamily="34" charset="-120"/>
+              </a:rPr>
+              <a:t>② 順序</a:t>
+            </a:r>
+            <a:endParaRPr lang="en-US" sz="2500" dirty="0"/>
+          </a:p>
+        </p:txBody>
+      </p:sp>
+      <p:sp>
+        <p:nvSpPr>
+          <p:cNvPr id="10" name="Text 7"/>
+          <p:cNvSpPr/>
+          <p:nvPr/>
+        </p:nvSpPr>
+        <p:spPr>
+          <a:xfrm>
+            <a:off x="3440638" y="2697525"/>
+            <a:ext cx="2286000" cy="1737360"/>
           </a:xfrm>
           <a:prstGeom prst="rect">
             <a:avLst/>
@@ -13647,172 +14439,86 @@
           <a:p>
             <a:pPr marL="0" indent="0">
               <a:lnSpc>
-                <a:spcPct val="120000"/>
+                <a:spcPct val="125000"/>
               </a:lnSpc>
               <a:buNone/>
             </a:pPr>
-            <a:endParaRPr lang="en-US" sz="1400" dirty="0"/>
+            <a:r>
+              <a:rPr lang="en-US" dirty="0">
+                <a:solidFill>
+                  <a:srgbClr val="F2E3C8"/>
+                </a:solidFill>
+                <a:latin typeface="Microsoft JhengHei" pitchFamily="34" charset="0"/>
+                <a:ea typeface="Microsoft JhengHei" pitchFamily="34" charset="-122"/>
+                <a:cs typeface="Microsoft JhengHei" pitchFamily="34" charset="-120"/>
+              </a:rPr>
+              <a:t>按座號順序</a:t>
+            </a:r>
+            <a:endParaRPr lang="en-US" dirty="0"/>
           </a:p>
           <a:p>
             <a:pPr marL="0" indent="0">
               <a:lnSpc>
-                <a:spcPct val="120000"/>
+                <a:spcPct val="125000"/>
               </a:lnSpc>
               <a:buNone/>
             </a:pPr>
             <a:r>
-              <a:rPr lang="zh-TW" altLang="en-US" sz="3000" dirty="0" smtClean="0">
-                <a:solidFill>
-                  <a:srgbClr val="C9D6E8"/>
-                </a:solidFill>
-                <a:latin typeface="Microsoft JhengHei" pitchFamily="34" charset="0"/>
-                <a:ea typeface="Microsoft JhengHei" pitchFamily="34" charset="-122"/>
-                <a:cs typeface="Microsoft JhengHei" pitchFamily="34" charset="-120"/>
-              </a:rPr>
-              <a:t>看看你們的結果有沒有正確？</a:t>
-            </a:r>
-            <a:endParaRPr lang="en-US" sz="3000" dirty="0"/>
-          </a:p>
-        </p:txBody>
-      </p:sp>
-      <p:sp>
-        <p:nvSpPr>
-          <p:cNvPr id="20" name="Text 17"/>
-          <p:cNvSpPr/>
-          <p:nvPr/>
-        </p:nvSpPr>
-        <p:spPr>
-          <a:xfrm>
-            <a:off x="457200" y="3840480"/>
-            <a:ext cx="11247120" cy="457200"/>
-          </a:xfrm>
-          <a:prstGeom prst="rect">
-            <a:avLst/>
-          </a:prstGeom>
-          <a:noFill/>
-          <a:ln/>
-        </p:spPr>
-        <p:txBody>
-          <a:bodyPr wrap="square" lIns="0" tIns="0" rIns="0" bIns="0" rtlCol="0" anchor="ctr"/>
-          <a:lstStyle/>
-          <a:p>
-            <a:pPr marL="0" indent="0" algn="ctr">
+              <a:rPr lang="en-US" dirty="0">
+                <a:solidFill>
+                  <a:srgbClr val="F2E3C8"/>
+                </a:solidFill>
+                <a:latin typeface="Microsoft JhengHei" pitchFamily="34" charset="0"/>
+                <a:ea typeface="Microsoft JhengHei" pitchFamily="34" charset="-122"/>
+                <a:cs typeface="Microsoft JhengHei" pitchFamily="34" charset="-120"/>
+              </a:rPr>
+              <a:t>點名、收作業</a:t>
+            </a:r>
+          </a:p>
+          <a:p>
+            <a:pPr marL="0" indent="0">
+              <a:lnSpc>
+                <a:spcPct val="125000"/>
+              </a:lnSpc>
               <a:buNone/>
             </a:pPr>
             <a:r>
-              <a:rPr lang="zh-TW" altLang="en-US" sz="2500" b="1" dirty="0" smtClean="0">
-                <a:solidFill>
-                  <a:srgbClr val="5EC8F2"/>
-                </a:solidFill>
-                <a:latin typeface="Microsoft JhengHei" pitchFamily="34" charset="0"/>
-                <a:ea typeface="Microsoft JhengHei" pitchFamily="34" charset="-122"/>
-                <a:cs typeface="Microsoft JhengHei" pitchFamily="34" charset="-120"/>
-              </a:rPr>
-              <a:t>小組任務</a:t>
-            </a:r>
-            <a:r>
-              <a:rPr lang="en-US" sz="2500" b="1" dirty="0" smtClean="0">
-                <a:solidFill>
-                  <a:srgbClr val="5EC8F2"/>
-                </a:solidFill>
-                <a:latin typeface="Microsoft JhengHei" pitchFamily="34" charset="0"/>
-                <a:ea typeface="Microsoft JhengHei" pitchFamily="34" charset="-122"/>
-                <a:cs typeface="Microsoft JhengHei" pitchFamily="34" charset="-120"/>
-              </a:rPr>
-              <a:t>：</a:t>
-            </a:r>
-            <a:r>
-              <a:rPr lang="en-US" sz="2500" b="1" dirty="0">
-                <a:solidFill>
-                  <a:srgbClr val="5EC8F2"/>
-                </a:solidFill>
-                <a:latin typeface="Microsoft JhengHei" pitchFamily="34" charset="0"/>
-                <a:ea typeface="Microsoft JhengHei" pitchFamily="34" charset="-122"/>
-                <a:cs typeface="Microsoft JhengHei" pitchFamily="34" charset="-120"/>
-              </a:rPr>
-              <a:t>每一拍記下 0 或 1 → </a:t>
-            </a:r>
-            <a:r>
-              <a:rPr lang="en-US" sz="2500" b="1" dirty="0" err="1" smtClean="0">
-                <a:solidFill>
-                  <a:srgbClr val="5EC8F2"/>
-                </a:solidFill>
-                <a:latin typeface="Microsoft JhengHei" pitchFamily="34" charset="0"/>
-                <a:ea typeface="Microsoft JhengHei" pitchFamily="34" charset="-122"/>
-                <a:cs typeface="Microsoft JhengHei" pitchFamily="34" charset="-120"/>
-              </a:rPr>
-              <a:t>收完整列</a:t>
-            </a:r>
-            <a:r>
-              <a:rPr lang="zh-TW" altLang="en-US" sz="2500" b="1" dirty="0" smtClean="0">
-                <a:solidFill>
-                  <a:srgbClr val="5EC8F2"/>
-                </a:solidFill>
-                <a:latin typeface="Microsoft JhengHei" pitchFamily="34" charset="0"/>
-                <a:ea typeface="Microsoft JhengHei" pitchFamily="34" charset="-122"/>
-                <a:cs typeface="Microsoft JhengHei" pitchFamily="34" charset="-120"/>
-              </a:rPr>
-              <a:t>再</a:t>
-            </a:r>
-            <a:r>
-              <a:rPr lang="en-US" sz="2500" b="1" dirty="0" err="1" smtClean="0">
-                <a:solidFill>
-                  <a:srgbClr val="5EC8F2"/>
-                </a:solidFill>
-                <a:latin typeface="Microsoft JhengHei" pitchFamily="34" charset="0"/>
-                <a:ea typeface="Microsoft JhengHei" pitchFamily="34" charset="-122"/>
-                <a:cs typeface="Microsoft JhengHei" pitchFamily="34" charset="-120"/>
-              </a:rPr>
-              <a:t>塗格</a:t>
-            </a:r>
-            <a:r>
-              <a:rPr lang="zh-TW" altLang="en-US" sz="2500" b="1" dirty="0" smtClean="0">
-                <a:solidFill>
-                  <a:srgbClr val="5EC8F2"/>
-                </a:solidFill>
-                <a:latin typeface="Microsoft JhengHei" pitchFamily="34" charset="0"/>
-                <a:ea typeface="Microsoft JhengHei" pitchFamily="34" charset="-122"/>
-                <a:cs typeface="Microsoft JhengHei" pitchFamily="34" charset="-120"/>
-              </a:rPr>
-              <a:t>子</a:t>
-            </a:r>
-            <a:r>
-              <a:rPr lang="en-US" sz="2500" b="1" dirty="0" err="1" smtClean="0">
-                <a:solidFill>
-                  <a:srgbClr val="5EC8F2"/>
-                </a:solidFill>
-                <a:latin typeface="Microsoft JhengHei" pitchFamily="34" charset="0"/>
-                <a:ea typeface="Microsoft JhengHei" pitchFamily="34" charset="-122"/>
-                <a:cs typeface="Microsoft JhengHei" pitchFamily="34" charset="-120"/>
-              </a:rPr>
-              <a:t>還原</a:t>
-            </a:r>
-            <a:endParaRPr lang="en-US" sz="2500" dirty="0"/>
-          </a:p>
-        </p:txBody>
-      </p:sp>
-      <p:sp>
-        <p:nvSpPr>
-          <p:cNvPr id="21" name="Shape 18"/>
-          <p:cNvSpPr/>
-          <p:nvPr/>
-        </p:nvSpPr>
-        <p:spPr>
-          <a:xfrm>
-            <a:off x="457200" y="4526280"/>
-            <a:ext cx="11247120" cy="1234440"/>
+              <a:rPr lang="en-US" dirty="0">
+                <a:solidFill>
+                  <a:srgbClr val="F2E3C8"/>
+                </a:solidFill>
+                <a:latin typeface="Microsoft JhengHei" pitchFamily="34" charset="0"/>
+                <a:ea typeface="Microsoft JhengHei" pitchFamily="34" charset="-122"/>
+                <a:cs typeface="Microsoft JhengHei" pitchFamily="34" charset="-120"/>
+              </a:rPr>
+              <a:t>才知道輪到誰</a:t>
+            </a:r>
+            <a:endParaRPr lang="en-US" dirty="0"/>
+          </a:p>
+        </p:txBody>
+      </p:sp>
+      <p:sp>
+        <p:nvSpPr>
+          <p:cNvPr id="11" name="Shape 8"/>
+          <p:cNvSpPr/>
+          <p:nvPr/>
+        </p:nvSpPr>
+        <p:spPr>
+          <a:xfrm>
+            <a:off x="6174694" y="1920285"/>
+            <a:ext cx="2724912" cy="2651760"/>
           </a:xfrm>
           <a:prstGeom prst="roundRect">
             <a:avLst>
-              <a:gd name="adj" fmla="val 5926"/>
+              <a:gd name="adj" fmla="val 2759"/>
             </a:avLst>
           </a:prstGeom>
           <a:solidFill>
             <a:srgbClr val="0D1424"/>
           </a:solidFill>
-          <a:ln w="19050">
+          <a:ln w="12700">
             <a:solidFill>
-              <a:srgbClr val="FFB347"/>
+              <a:srgbClr val="1E3A5C"/>
             </a:solidFill>
             <a:prstDash val="solid"/>
           </a:ln>
@@ -13820,14 +14526,354 @@
       </p:sp>
       <p:sp>
         <p:nvSpPr>
-          <p:cNvPr id="22" name="Text 19"/>
-          <p:cNvSpPr/>
-          <p:nvPr/>
-        </p:nvSpPr>
-        <p:spPr>
-          <a:xfrm>
-            <a:off x="731520" y="4644044"/>
-            <a:ext cx="10607040" cy="868680"/>
+          <p:cNvPr id="12" name="Text 9"/>
+          <p:cNvSpPr/>
+          <p:nvPr/>
+        </p:nvSpPr>
+        <p:spPr>
+          <a:xfrm>
+            <a:off x="6403294" y="2148885"/>
+            <a:ext cx="2286000" cy="457200"/>
+          </a:xfrm>
+          <a:prstGeom prst="rect">
+            <a:avLst/>
+          </a:prstGeom>
+          <a:noFill/>
+          <a:ln/>
+        </p:spPr>
+        <p:txBody>
+          <a:bodyPr wrap="square" lIns="0" tIns="0" rIns="0" bIns="0" rtlCol="0" anchor="ctr"/>
+          <a:lstStyle/>
+          <a:p>
+            <a:pPr marL="0" indent="0">
+              <a:buNone/>
+            </a:pPr>
+            <a:r>
+              <a:rPr lang="en-US" sz="2500" b="1" dirty="0">
+                <a:solidFill>
+                  <a:srgbClr val="FFB347"/>
+                </a:solidFill>
+                <a:latin typeface="Microsoft JhengHei" pitchFamily="34" charset="0"/>
+                <a:ea typeface="Microsoft JhengHei" pitchFamily="34" charset="-122"/>
+                <a:cs typeface="Microsoft JhengHei" pitchFamily="34" charset="-120"/>
+              </a:rPr>
+              <a:t>③ </a:t>
+            </a:r>
+            <a:r>
+              <a:rPr lang="en-US" sz="2500" b="1" dirty="0" smtClean="0">
+                <a:solidFill>
+                  <a:srgbClr val="FFB347"/>
+                </a:solidFill>
+                <a:latin typeface="Microsoft JhengHei" pitchFamily="34" charset="0"/>
+                <a:ea typeface="Microsoft JhengHei" pitchFamily="34" charset="-122"/>
+                <a:cs typeface="Microsoft JhengHei" pitchFamily="34" charset="-120"/>
+              </a:rPr>
+              <a:t>節</a:t>
+            </a:r>
+            <a:r>
+              <a:rPr lang="zh-TW" altLang="en-US" sz="2500" b="1" dirty="0" smtClean="0">
+                <a:solidFill>
+                  <a:srgbClr val="FFB347"/>
+                </a:solidFill>
+                <a:latin typeface="Microsoft JhengHei" pitchFamily="34" charset="0"/>
+                <a:ea typeface="Microsoft JhengHei" pitchFamily="34" charset="-122"/>
+                <a:cs typeface="Microsoft JhengHei" pitchFamily="34" charset="-120"/>
+              </a:rPr>
+              <a:t>拍</a:t>
+            </a:r>
+            <a:endParaRPr lang="en-US" sz="2500" dirty="0"/>
+          </a:p>
+        </p:txBody>
+      </p:sp>
+      <p:sp>
+        <p:nvSpPr>
+          <p:cNvPr id="13" name="Text 10"/>
+          <p:cNvSpPr/>
+          <p:nvPr/>
+        </p:nvSpPr>
+        <p:spPr>
+          <a:xfrm>
+            <a:off x="6403294" y="2697525"/>
+            <a:ext cx="2286000" cy="1737360"/>
+          </a:xfrm>
+          <a:prstGeom prst="rect">
+            <a:avLst/>
+          </a:prstGeom>
+          <a:noFill/>
+          <a:ln/>
+        </p:spPr>
+        <p:txBody>
+          <a:bodyPr wrap="square" lIns="0" tIns="0" rIns="0" bIns="0" rtlCol="0" anchor="t"/>
+          <a:lstStyle/>
+          <a:p>
+            <a:pPr marL="0" indent="0">
+              <a:lnSpc>
+                <a:spcPct val="125000"/>
+              </a:lnSpc>
+              <a:buNone/>
+            </a:pPr>
+            <a:r>
+              <a:rPr lang="en-US" dirty="0">
+                <a:solidFill>
+                  <a:srgbClr val="F2E3C8"/>
+                </a:solidFill>
+                <a:latin typeface="Microsoft JhengHei" pitchFamily="34" charset="0"/>
+                <a:ea typeface="Microsoft JhengHei" pitchFamily="34" charset="-122"/>
+                <a:cs typeface="Microsoft JhengHei" pitchFamily="34" charset="-120"/>
+              </a:rPr>
+              <a:t>全班跟著口令</a:t>
+            </a:r>
+            <a:endParaRPr lang="en-US" dirty="0"/>
+          </a:p>
+          <a:p>
+            <a:pPr marL="0" indent="0">
+              <a:lnSpc>
+                <a:spcPct val="125000"/>
+              </a:lnSpc>
+              <a:buNone/>
+            </a:pPr>
+            <a:r>
+              <a:rPr lang="en-US" dirty="0">
+                <a:solidFill>
+                  <a:srgbClr val="F2E3C8"/>
+                </a:solidFill>
+                <a:latin typeface="Microsoft JhengHei" pitchFamily="34" charset="0"/>
+                <a:ea typeface="Microsoft JhengHei" pitchFamily="34" charset="-122"/>
+                <a:cs typeface="Microsoft JhengHei" pitchFamily="34" charset="-120"/>
+              </a:rPr>
+              <a:t>一起做操</a:t>
+            </a:r>
+            <a:endParaRPr lang="en-US" dirty="0"/>
+          </a:p>
+          <a:p>
+            <a:pPr marL="0" indent="0">
+              <a:lnSpc>
+                <a:spcPct val="125000"/>
+              </a:lnSpc>
+              <a:buNone/>
+            </a:pPr>
+            <a:r>
+              <a:rPr lang="en-US" dirty="0">
+                <a:solidFill>
+                  <a:srgbClr val="F2E3C8"/>
+                </a:solidFill>
+                <a:latin typeface="Microsoft JhengHei" pitchFamily="34" charset="0"/>
+                <a:ea typeface="Microsoft JhengHei" pitchFamily="34" charset="-122"/>
+                <a:cs typeface="Microsoft JhengHei" pitchFamily="34" charset="-120"/>
+              </a:rPr>
+              <a:t>拍子一致才整齊</a:t>
+            </a:r>
+            <a:endParaRPr lang="en-US" dirty="0"/>
+          </a:p>
+        </p:txBody>
+      </p:sp>
+      <p:sp>
+        <p:nvSpPr>
+          <p:cNvPr id="14" name="Shape 11"/>
+          <p:cNvSpPr/>
+          <p:nvPr/>
+        </p:nvSpPr>
+        <p:spPr>
+          <a:xfrm>
+            <a:off x="9137350" y="1920285"/>
+            <a:ext cx="2724912" cy="2651760"/>
+          </a:xfrm>
+          <a:prstGeom prst="roundRect">
+            <a:avLst>
+              <a:gd name="adj" fmla="val 2759"/>
+            </a:avLst>
+          </a:prstGeom>
+          <a:solidFill>
+            <a:srgbClr val="0D1424"/>
+          </a:solidFill>
+          <a:ln w="12700">
+            <a:solidFill>
+              <a:srgbClr val="1E3A5C"/>
+            </a:solidFill>
+            <a:prstDash val="solid"/>
+          </a:ln>
+        </p:spPr>
+      </p:sp>
+      <p:sp>
+        <p:nvSpPr>
+          <p:cNvPr id="15" name="Text 12"/>
+          <p:cNvSpPr/>
+          <p:nvPr/>
+        </p:nvSpPr>
+        <p:spPr>
+          <a:xfrm>
+            <a:off x="9365950" y="2148885"/>
+            <a:ext cx="2286000" cy="457200"/>
+          </a:xfrm>
+          <a:prstGeom prst="rect">
+            <a:avLst/>
+          </a:prstGeom>
+          <a:noFill/>
+          <a:ln/>
+        </p:spPr>
+        <p:txBody>
+          <a:bodyPr wrap="square" lIns="0" tIns="0" rIns="0" bIns="0" rtlCol="0" anchor="ctr"/>
+          <a:lstStyle/>
+          <a:p>
+            <a:pPr marL="0" indent="0">
+              <a:buNone/>
+            </a:pPr>
+            <a:r>
+              <a:rPr lang="en-US" sz="2200" b="1" dirty="0">
+                <a:solidFill>
+                  <a:srgbClr val="FFB347"/>
+                </a:solidFill>
+                <a:latin typeface="Microsoft JhengHei" pitchFamily="34" charset="0"/>
+                <a:ea typeface="Microsoft JhengHei" pitchFamily="34" charset="-122"/>
+                <a:cs typeface="Microsoft JhengHei" pitchFamily="34" charset="-120"/>
+              </a:rPr>
+              <a:t>④ </a:t>
+            </a:r>
+            <a:r>
+              <a:rPr lang="zh-TW" altLang="en-US" sz="2200" b="1" dirty="0" smtClean="0">
+                <a:solidFill>
+                  <a:srgbClr val="FFB347"/>
+                </a:solidFill>
+                <a:latin typeface="Microsoft JhengHei" pitchFamily="34" charset="0"/>
+                <a:ea typeface="Microsoft JhengHei" pitchFamily="34" charset="-122"/>
+                <a:cs typeface="Microsoft JhengHei" pitchFamily="34" charset="-120"/>
+              </a:rPr>
+              <a:t>開始的提示</a:t>
+            </a:r>
+            <a:endParaRPr lang="en-US" sz="2200" dirty="0"/>
+          </a:p>
+        </p:txBody>
+      </p:sp>
+      <p:sp>
+        <p:nvSpPr>
+          <p:cNvPr id="16" name="Text 13"/>
+          <p:cNvSpPr/>
+          <p:nvPr/>
+        </p:nvSpPr>
+        <p:spPr>
+          <a:xfrm>
+            <a:off x="9365950" y="2697525"/>
+            <a:ext cx="2286000" cy="1737360"/>
+          </a:xfrm>
+          <a:prstGeom prst="rect">
+            <a:avLst/>
+          </a:prstGeom>
+          <a:noFill/>
+          <a:ln/>
+        </p:spPr>
+        <p:txBody>
+          <a:bodyPr wrap="square" lIns="0" tIns="0" rIns="0" bIns="0" rtlCol="0" anchor="t"/>
+          <a:lstStyle/>
+          <a:p>
+            <a:pPr marL="0" indent="0">
+              <a:lnSpc>
+                <a:spcPct val="125000"/>
+              </a:lnSpc>
+              <a:buNone/>
+            </a:pPr>
+            <a:r>
+              <a:rPr lang="en-US" dirty="0">
+                <a:solidFill>
+                  <a:srgbClr val="F2E3C8"/>
+                </a:solidFill>
+                <a:latin typeface="Microsoft JhengHei" pitchFamily="34" charset="0"/>
+                <a:ea typeface="Microsoft JhengHei" pitchFamily="34" charset="-122"/>
+                <a:cs typeface="Microsoft JhengHei" pitchFamily="34" charset="-120"/>
+              </a:rPr>
+              <a:t>老師喊「開始」</a:t>
+            </a:r>
+            <a:endParaRPr lang="en-US" dirty="0"/>
+          </a:p>
+          <a:p>
+            <a:pPr marL="0" indent="0">
+              <a:lnSpc>
+                <a:spcPct val="125000"/>
+              </a:lnSpc>
+              <a:buNone/>
+            </a:pPr>
+            <a:r>
+              <a:rPr lang="en-US" dirty="0">
+                <a:solidFill>
+                  <a:srgbClr val="F2E3C8"/>
+                </a:solidFill>
+                <a:latin typeface="Microsoft JhengHei" pitchFamily="34" charset="0"/>
+                <a:ea typeface="Microsoft JhengHei" pitchFamily="34" charset="-122"/>
+                <a:cs typeface="Microsoft JhengHei" pitchFamily="34" charset="-120"/>
+              </a:rPr>
+              <a:t>大家才一起動筆</a:t>
+            </a:r>
+            <a:endParaRPr lang="en-US" dirty="0"/>
+          </a:p>
+          <a:p>
+            <a:pPr marL="0" indent="0">
+              <a:lnSpc>
+                <a:spcPct val="125000"/>
+              </a:lnSpc>
+              <a:buNone/>
+            </a:pPr>
+            <a:r>
+              <a:rPr lang="en-US" dirty="0" err="1" smtClean="0">
+                <a:solidFill>
+                  <a:srgbClr val="F2E3C8"/>
+                </a:solidFill>
+                <a:latin typeface="Microsoft JhengHei" pitchFamily="34" charset="0"/>
+                <a:ea typeface="Microsoft JhengHei" pitchFamily="34" charset="-122"/>
+                <a:cs typeface="Microsoft JhengHei" pitchFamily="34" charset="-120"/>
+              </a:rPr>
+              <a:t>沒聽到開始</a:t>
+            </a:r>
+            <a:r>
+              <a:rPr lang="en-US" dirty="0" err="1">
+                <a:solidFill>
+                  <a:srgbClr val="F2E3C8"/>
+                </a:solidFill>
+                <a:latin typeface="Microsoft JhengHei" pitchFamily="34" charset="0"/>
+                <a:ea typeface="Microsoft JhengHei" pitchFamily="34" charset="-122"/>
+                <a:cs typeface="Microsoft JhengHei" pitchFamily="34" charset="-120"/>
+              </a:rPr>
+              <a:t>＝整列慢半拍</a:t>
+            </a:r>
+            <a:endParaRPr lang="en-US" dirty="0"/>
+          </a:p>
+        </p:txBody>
+      </p:sp>
+      <p:sp>
+        <p:nvSpPr>
+          <p:cNvPr id="17" name="Shape 14"/>
+          <p:cNvSpPr/>
+          <p:nvPr/>
+        </p:nvSpPr>
+        <p:spPr>
+          <a:xfrm>
+            <a:off x="404830" y="4727909"/>
+            <a:ext cx="11247120" cy="1142815"/>
+          </a:xfrm>
+          <a:prstGeom prst="roundRect">
+            <a:avLst>
+              <a:gd name="adj" fmla="val 4103"/>
+            </a:avLst>
+          </a:prstGeom>
+          <a:solidFill>
+            <a:srgbClr val="0D1424"/>
+          </a:solidFill>
+          <a:ln w="12700">
+            <a:solidFill>
+              <a:srgbClr val="1E3A5C"/>
+            </a:solidFill>
+            <a:prstDash val="solid"/>
+          </a:ln>
+        </p:spPr>
+      </p:sp>
+      <p:sp>
+        <p:nvSpPr>
+          <p:cNvPr id="18" name="Text 15"/>
+          <p:cNvSpPr/>
+          <p:nvPr/>
+        </p:nvSpPr>
+        <p:spPr>
+          <a:xfrm>
+            <a:off x="633430" y="4846504"/>
+            <a:ext cx="10607040" cy="1097095"/>
           </a:xfrm>
           <a:prstGeom prst="rect">
             <a:avLst/>
@@ -13846,211 +14892,487 @@
               <a:buNone/>
             </a:pPr>
             <a:r>
-              <a:rPr lang="en-US" altLang="zh-TW" b="1" dirty="0" smtClean="0">
-                <a:solidFill>
-                  <a:srgbClr val="FFB347"/>
-                </a:solidFill>
-                <a:latin typeface="Microsoft JhengHei" pitchFamily="34" charset="0"/>
-                <a:ea typeface="Microsoft JhengHei" pitchFamily="34" charset="-122"/>
-                <a:cs typeface="Microsoft JhengHei" pitchFamily="34" charset="-120"/>
-              </a:rPr>
-              <a:t>※※</a:t>
-            </a:r>
-            <a:r>
               <a:rPr lang="zh-TW" altLang="en-US" b="1" dirty="0" smtClean="0">
                 <a:solidFill>
-                  <a:srgbClr val="FFB347"/>
-                </a:solidFill>
-                <a:latin typeface="Microsoft JhengHei" pitchFamily="34" charset="0"/>
-                <a:ea typeface="Microsoft JhengHei" pitchFamily="34" charset="-122"/>
-                <a:cs typeface="Microsoft JhengHei" pitchFamily="34" charset="-120"/>
-              </a:rPr>
-              <a:t>小提示</a:t>
+                  <a:srgbClr val="5EC8F2"/>
+                </a:solidFill>
+                <a:latin typeface="Microsoft JhengHei" pitchFamily="34" charset="0"/>
+                <a:ea typeface="Microsoft JhengHei" pitchFamily="34" charset="-122"/>
+                <a:cs typeface="Microsoft JhengHei" pitchFamily="34" charset="-120"/>
+              </a:rPr>
+              <a:t>想一想：</a:t>
+            </a:r>
+            <a:r>
+              <a:rPr lang="en-US" b="1" dirty="0" err="1" smtClean="0">
+                <a:solidFill>
+                  <a:srgbClr val="5EC8F2"/>
+                </a:solidFill>
+                <a:latin typeface="Microsoft JhengHei" pitchFamily="34" charset="0"/>
+                <a:ea typeface="Microsoft JhengHei" pitchFamily="34" charset="-122"/>
+                <a:cs typeface="Microsoft JhengHei" pitchFamily="34" charset="-120"/>
+              </a:rPr>
+              <a:t>下課的教室鬧哄哄</a:t>
             </a:r>
             <a:r>
               <a:rPr lang="en-US" b="1" dirty="0" smtClean="0">
                 <a:solidFill>
-                  <a:srgbClr val="FFB347"/>
-                </a:solidFill>
-                <a:latin typeface="Microsoft JhengHei" pitchFamily="34" charset="0"/>
-                <a:ea typeface="Microsoft JhengHei" pitchFamily="34" charset="-122"/>
-                <a:cs typeface="Microsoft JhengHei" pitchFamily="34" charset="-120"/>
-              </a:rPr>
-              <a:t>：</a:t>
-            </a:r>
-            <a:r>
-              <a:rPr lang="en-US" b="1" dirty="0">
-                <a:solidFill>
-                  <a:srgbClr val="FFB347"/>
-                </a:solidFill>
-                <a:latin typeface="Microsoft JhengHei" pitchFamily="34" charset="0"/>
-                <a:ea typeface="Microsoft JhengHei" pitchFamily="34" charset="-122"/>
-                <a:cs typeface="Microsoft JhengHei" pitchFamily="34" charset="-120"/>
-              </a:rPr>
-              <a:t>數亂了怎麼辦？
+                  <a:srgbClr val="5EC8F2"/>
+                </a:solidFill>
+                <a:latin typeface="Microsoft JhengHei" pitchFamily="34" charset="0"/>
+                <a:ea typeface="Microsoft JhengHei" pitchFamily="34" charset="-122"/>
+                <a:cs typeface="Microsoft JhengHei" pitchFamily="34" charset="-120"/>
+              </a:rPr>
+              <a:t>，</a:t>
+            </a:r>
+            <a:r>
+              <a:rPr lang="en-US" b="1" dirty="0" err="1" smtClean="0">
+                <a:solidFill>
+                  <a:srgbClr val="5EC8F2"/>
+                </a:solidFill>
+                <a:latin typeface="Microsoft JhengHei" pitchFamily="34" charset="0"/>
+                <a:ea typeface="Microsoft JhengHei" pitchFamily="34" charset="-122"/>
+                <a:cs typeface="Microsoft JhengHei" pitchFamily="34" charset="-120"/>
+              </a:rPr>
+              <a:t>跟同學講話會發生什麼事</a:t>
+            </a:r>
+            <a:r>
+              <a:rPr lang="en-US" b="1" dirty="0" smtClean="0">
+                <a:solidFill>
+                  <a:srgbClr val="5EC8F2"/>
+                </a:solidFill>
+                <a:latin typeface="Microsoft JhengHei" pitchFamily="34" charset="0"/>
+                <a:ea typeface="Microsoft JhengHei" pitchFamily="34" charset="-122"/>
+                <a:cs typeface="Microsoft JhengHei" pitchFamily="34" charset="-120"/>
+              </a:rPr>
+              <a:t>？</a:t>
+            </a:r>
+            <a:r>
+              <a:rPr lang="en-US" sz="1600" b="1" dirty="0" smtClean="0">
+                <a:solidFill>
+                  <a:srgbClr val="5EC8F2"/>
+                </a:solidFill>
+                <a:latin typeface="Microsoft JhengHei" pitchFamily="34" charset="0"/>
+                <a:ea typeface="Microsoft JhengHei" pitchFamily="34" charset="-122"/>
+                <a:cs typeface="Microsoft JhengHei" pitchFamily="34" charset="-120"/>
+              </a:rPr>
+              <a:t>
 </a:t>
             </a:r>
-            <a:endParaRPr lang="en-US" dirty="0"/>
+            <a:endParaRPr lang="en-US" sz="1600" dirty="0" smtClean="0"/>
           </a:p>
           <a:p>
             <a:pPr marL="0" indent="0">
+              <a:spcAft>
+                <a:spcPts val="500"/>
+              </a:spcAft>
               <a:buNone/>
             </a:pPr>
             <a:r>
-              <a:rPr lang="en-US" dirty="0" err="1">
-                <a:solidFill>
-                  <a:srgbClr val="F2E3C8"/>
-                </a:solidFill>
-                <a:latin typeface="Microsoft JhengHei" pitchFamily="34" charset="0"/>
-                <a:ea typeface="Microsoft JhengHei" pitchFamily="34" charset="-122"/>
-                <a:cs typeface="Microsoft JhengHei" pitchFamily="34" charset="-120"/>
-              </a:rPr>
-              <a:t>放棄這一列就好！等下一次</a:t>
+              <a:rPr lang="en-US" dirty="0" err="1" smtClean="0">
+                <a:solidFill>
+                  <a:srgbClr val="C9D6E8"/>
+                </a:solidFill>
+                <a:latin typeface="Microsoft JhengHei" pitchFamily="34" charset="0"/>
+                <a:ea typeface="Microsoft JhengHei" pitchFamily="34" charset="-122"/>
+                <a:cs typeface="Microsoft JhengHei" pitchFamily="34" charset="-120"/>
+              </a:rPr>
+              <a:t>要更大聲、還常要重講一次——這就是通訊裡的「雜訊」，也是規則必須先講好的原因</a:t>
             </a:r>
             <a:r>
               <a:rPr lang="en-US" dirty="0" smtClean="0">
                 <a:solidFill>
-                  <a:srgbClr val="F2E3C8"/>
-                </a:solidFill>
-                <a:latin typeface="Microsoft JhengHei" pitchFamily="34" charset="0"/>
-                <a:ea typeface="Microsoft JhengHei" pitchFamily="34" charset="-122"/>
-                <a:cs typeface="Microsoft JhengHei" pitchFamily="34" charset="-120"/>
-              </a:rPr>
-              <a:t>「</a:t>
-            </a:r>
-            <a:r>
-              <a:rPr lang="zh-TW" altLang="en-US" dirty="0" smtClean="0">
-                <a:solidFill>
-                  <a:srgbClr val="F2E3C8"/>
-                </a:solidFill>
-                <a:latin typeface="Microsoft JhengHei" pitchFamily="34" charset="0"/>
-                <a:ea typeface="Microsoft JhengHei" pitchFamily="34" charset="-122"/>
-                <a:cs typeface="Microsoft JhengHei" pitchFamily="34" charset="-120"/>
-              </a:rPr>
-              <a:t>開頭</a:t>
+                  <a:srgbClr val="C9D6E8"/>
+                </a:solidFill>
+                <a:latin typeface="Microsoft JhengHei" pitchFamily="34" charset="0"/>
+                <a:ea typeface="Microsoft JhengHei" pitchFamily="34" charset="-122"/>
+                <a:cs typeface="Microsoft JhengHei" pitchFamily="34" charset="-120"/>
+              </a:rPr>
+              <a:t>。</a:t>
             </a:r>
             <a:r>
               <a:rPr lang="en-US" dirty="0" err="1" smtClean="0">
                 <a:solidFill>
-                  <a:srgbClr val="F2E3C8"/>
-                </a:solidFill>
-                <a:latin typeface="Microsoft JhengHei" pitchFamily="34" charset="0"/>
-                <a:ea typeface="Microsoft JhengHei" pitchFamily="34" charset="-122"/>
-                <a:cs typeface="Microsoft JhengHei" pitchFamily="34" charset="-120"/>
-              </a:rPr>
-              <a:t>快速閃爍</a:t>
+                  <a:srgbClr val="C9D6E8"/>
+                </a:solidFill>
+                <a:latin typeface="Microsoft JhengHei" pitchFamily="34" charset="0"/>
+                <a:ea typeface="Microsoft JhengHei" pitchFamily="34" charset="-122"/>
+                <a:cs typeface="Microsoft JhengHei" pitchFamily="34" charset="-120"/>
+              </a:rPr>
+              <a:t/>
             </a:r>
             <a:r>
               <a:rPr lang="en-US" dirty="0" smtClean="0">
                 <a:solidFill>
-                  <a:srgbClr val="F2E3C8"/>
-                </a:solidFill>
-                <a:latin typeface="Microsoft JhengHei" pitchFamily="34" charset="0"/>
-                <a:ea typeface="Microsoft JhengHei" pitchFamily="34" charset="-122"/>
-                <a:cs typeface="Microsoft JhengHei" pitchFamily="34" charset="-120"/>
-              </a:rPr>
-              <a:t>」，</a:t>
-            </a:r>
-            <a:r>
-              <a:rPr lang="zh-TW" altLang="en-US" dirty="0" smtClean="0">
-                <a:solidFill>
-                  <a:srgbClr val="F2E3C8"/>
-                </a:solidFill>
-                <a:latin typeface="Microsoft JhengHei" pitchFamily="34" charset="0"/>
-                <a:ea typeface="Microsoft JhengHei" pitchFamily="34" charset="-122"/>
-                <a:cs typeface="Microsoft JhengHei" pitchFamily="34" charset="-120"/>
-              </a:rPr>
-              <a:t>再</a:t>
+                  <a:srgbClr val="C9D6E8"/>
+                </a:solidFill>
+                <a:latin typeface="Microsoft JhengHei" pitchFamily="34" charset="0"/>
+                <a:ea typeface="Microsoft JhengHei" pitchFamily="34" charset="-122"/>
+                <a:cs typeface="Microsoft JhengHei" pitchFamily="34" charset="-120"/>
+              </a:rPr>
+              <a:t/>
             </a:r>
             <a:r>
               <a:rPr lang="en-US" dirty="0" err="1" smtClean="0">
                 <a:solidFill>
-                  <a:srgbClr val="F2E3C8"/>
-                </a:solidFill>
-                <a:latin typeface="Microsoft JhengHei" pitchFamily="34" charset="0"/>
-                <a:ea typeface="Microsoft JhengHei" pitchFamily="34" charset="-122"/>
-                <a:cs typeface="Microsoft JhengHei" pitchFamily="34" charset="-120"/>
-              </a:rPr>
-              <a:t>從新的一列重新開始</a:t>
-            </a:r>
-            <a:r>
-              <a:rPr lang="zh-TW" altLang="en-US" dirty="0" smtClean="0">
-                <a:solidFill>
-                  <a:srgbClr val="F2E3C8"/>
-                </a:solidFill>
-                <a:latin typeface="Microsoft JhengHei" pitchFamily="34" charset="0"/>
-                <a:ea typeface="Microsoft JhengHei" pitchFamily="34" charset="-122"/>
-                <a:cs typeface="Microsoft JhengHei" pitchFamily="34" charset="-120"/>
-              </a:rPr>
-              <a:t>，這樣只有</a:t>
-            </a:r>
-            <a:r>
-              <a:rPr lang="en-US" dirty="0" err="1" smtClean="0">
-                <a:solidFill>
-                  <a:srgbClr val="F2E3C8"/>
-                </a:solidFill>
-                <a:latin typeface="Microsoft JhengHei" pitchFamily="34" charset="0"/>
-                <a:ea typeface="Microsoft JhengHei" pitchFamily="34" charset="-122"/>
-                <a:cs typeface="Microsoft JhengHei" pitchFamily="34" charset="-120"/>
-              </a:rPr>
-              <a:t>一列錯</a:t>
-            </a:r>
-            <a:r>
-              <a:rPr lang="en-US" dirty="0" err="1">
-                <a:solidFill>
-                  <a:srgbClr val="F2E3C8"/>
-                </a:solidFill>
-                <a:latin typeface="Microsoft JhengHei" pitchFamily="34" charset="0"/>
-                <a:ea typeface="Microsoft JhengHei" pitchFamily="34" charset="-122"/>
-                <a:cs typeface="Microsoft JhengHei" pitchFamily="34" charset="-120"/>
-              </a:rPr>
-              <a:t>，</a:t>
-            </a:r>
-            <a:r>
-              <a:rPr lang="en-US" dirty="0" err="1" smtClean="0">
-                <a:solidFill>
-                  <a:srgbClr val="F2E3C8"/>
-                </a:solidFill>
-                <a:latin typeface="Microsoft JhengHei" pitchFamily="34" charset="0"/>
-                <a:ea typeface="Microsoft JhengHei" pitchFamily="34" charset="-122"/>
-                <a:cs typeface="Microsoft JhengHei" pitchFamily="34" charset="-120"/>
-              </a:rPr>
-              <a:t>不會整張</a:t>
-            </a:r>
-            <a:r>
-              <a:rPr lang="zh-TW" altLang="en-US" dirty="0" smtClean="0">
-                <a:solidFill>
-                  <a:srgbClr val="F2E3C8"/>
-                </a:solidFill>
-                <a:latin typeface="Microsoft JhengHei" pitchFamily="34" charset="0"/>
-                <a:ea typeface="Microsoft JhengHei" pitchFamily="34" charset="-122"/>
-                <a:cs typeface="Microsoft JhengHei" pitchFamily="34" charset="-120"/>
-              </a:rPr>
-              <a:t>都</a:t>
+                  <a:srgbClr val="C9D6E8"/>
+                </a:solidFill>
+                <a:latin typeface="Microsoft JhengHei" pitchFamily="34" charset="0"/>
+                <a:ea typeface="Microsoft JhengHei" pitchFamily="34" charset="-122"/>
+                <a:cs typeface="Microsoft JhengHei" pitchFamily="34" charset="-120"/>
+              </a:rPr>
+              <a:t/>
             </a:r>
             <a:r>
               <a:rPr lang="en-US" dirty="0" smtClean="0">
                 <a:solidFill>
-                  <a:srgbClr val="F2E3C8"/>
-                </a:solidFill>
-                <a:latin typeface="Microsoft JhengHei" pitchFamily="34" charset="0"/>
-                <a:ea typeface="Microsoft JhengHei" pitchFamily="34" charset="-122"/>
-                <a:cs typeface="Microsoft JhengHei" pitchFamily="34" charset="-120"/>
-              </a:rPr>
-              <a:t>毀</a:t>
-            </a:r>
-            <a:r>
-              <a:rPr lang="en-US" dirty="0">
-                <a:solidFill>
-                  <a:srgbClr val="F2E3C8"/>
-                </a:solidFill>
-                <a:latin typeface="Microsoft JhengHei" pitchFamily="34" charset="0"/>
-                <a:ea typeface="Microsoft JhengHei" pitchFamily="34" charset="-122"/>
-                <a:cs typeface="Microsoft JhengHei" pitchFamily="34" charset="-120"/>
-              </a:rPr>
-              <a:t>。</a:t>
+                  <a:srgbClr val="C9D6E8"/>
+                </a:solidFill>
+                <a:latin typeface="Microsoft JhengHei" pitchFamily="34" charset="0"/>
+                <a:ea typeface="Microsoft JhengHei" pitchFamily="34" charset="-122"/>
+                <a:cs typeface="Microsoft JhengHei" pitchFamily="34" charset="-120"/>
+              </a:rPr>
+              <a:t/>
             </a:r>
             <a:endParaRPr lang="en-US" dirty="0"/>
+          </a:p>
+        </p:txBody>
+      </p:sp>
+      <p:sp>
+        <p:nvSpPr>
+          <p:cNvPr id="3" name="矩形 2"/>
+          <p:cNvSpPr/>
+          <p:nvPr/>
+        </p:nvSpPr>
+        <p:spPr>
+          <a:xfrm>
+            <a:off x="5726638" y="6062192"/>
+            <a:ext cx="5434215" cy="646331"/>
+          </a:xfrm>
+          <a:prstGeom prst="rect">
+            <a:avLst/>
+          </a:prstGeom>
+        </p:spPr>
+        <p:txBody>
+          <a:bodyPr wrap="square">
+            <a:spAutoFit/>
+          </a:bodyPr>
+          <a:lstStyle/>
+          <a:p>
+            <a:r>
+              <a:rPr lang="zh-TW" altLang="en-US" b="1" dirty="0" smtClean="0">
+                <a:solidFill>
+                  <a:schemeClr val="accent2"/>
+                </a:solidFill>
+                <a:latin typeface="Microsoft JhengHei" pitchFamily="34" charset="0"/>
+                <a:ea typeface="Microsoft JhengHei" pitchFamily="34" charset="-122"/>
+                <a:cs typeface="Microsoft JhengHei" pitchFamily="34" charset="-120"/>
+              </a:rPr>
+              <a:t>知識點</a:t>
+            </a:r>
+            <a:endParaRPr lang="en-US" altLang="zh-TW" b="1" dirty="0" smtClean="0">
+              <a:solidFill>
+                <a:schemeClr val="accent2"/>
+              </a:solidFill>
+              <a:latin typeface="Microsoft JhengHei" pitchFamily="34" charset="0"/>
+              <a:ea typeface="Microsoft JhengHei" pitchFamily="34" charset="-122"/>
+              <a:cs typeface="Microsoft JhengHei" pitchFamily="34" charset="-120"/>
+            </a:endParaRPr>
+          </a:p>
+          <a:p>
+            <a:r>
+              <a:rPr lang="en-US" altLang="zh-TW" b="1" dirty="0" err="1" smtClean="0">
+                <a:solidFill>
+                  <a:srgbClr val="F2E3C8"/>
+                </a:solidFill>
+                <a:latin typeface="Microsoft JhengHei" pitchFamily="34" charset="0"/>
+                <a:ea typeface="Microsoft JhengHei" pitchFamily="34" charset="-122"/>
+                <a:cs typeface="Microsoft JhengHei" pitchFamily="34" charset="-120"/>
+              </a:rPr>
+              <a:t>班級的默契，就是生活裡的通訊協定。</a:t>
+            </a:r>
+            <a:r>
+              <a:rPr lang="zh-TW" altLang="en-US" b="1" smtClean="0">
+                <a:solidFill>
+                  <a:srgbClr val="F2E3C8"/>
+                </a:solidFill>
+                <a:latin typeface="Microsoft JhengHei" pitchFamily="34" charset="0"/>
+                <a:ea typeface="Microsoft JhengHei" pitchFamily="34" charset="-122"/>
+                <a:cs typeface="Microsoft JhengHei" pitchFamily="34" charset="-120"/>
+              </a:rPr>
+              <a:t/>
+            </a:r>
+            <a:r>
+              <a:rPr lang="en-US" altLang="zh-TW" b="1" smtClean="0">
+                <a:solidFill>
+                  <a:srgbClr val="F2E3C8"/>
+                </a:solidFill>
+                <a:latin typeface="Microsoft JhengHei" pitchFamily="34" charset="0"/>
+                <a:ea typeface="Microsoft JhengHei" pitchFamily="34" charset="-122"/>
+                <a:cs typeface="Microsoft JhengHei" pitchFamily="34" charset="-120"/>
+              </a:rPr>
+              <a:t/>
+            </a:r>
+            <a:r>
+              <a:rPr lang="zh-TW" altLang="en-US" b="1" dirty="0" smtClean="0">
+                <a:solidFill>
+                  <a:srgbClr val="F2E3C8"/>
+                </a:solidFill>
+                <a:latin typeface="Microsoft JhengHei" pitchFamily="34" charset="0"/>
+                <a:ea typeface="Microsoft JhengHei" pitchFamily="34" charset="-122"/>
+                <a:cs typeface="Microsoft JhengHei" pitchFamily="34" charset="-120"/>
+              </a:rPr>
+              <a:t/>
+            </a:r>
+            <a:r>
+              <a:rPr lang="en-US" altLang="zh-TW" b="1" dirty="0" smtClean="0">
+                <a:solidFill>
+                  <a:srgbClr val="F2E3C8"/>
+                </a:solidFill>
+                <a:latin typeface="Microsoft JhengHei" pitchFamily="34" charset="0"/>
+                <a:ea typeface="Microsoft JhengHei" pitchFamily="34" charset="-122"/>
+                <a:cs typeface="Microsoft JhengHei" pitchFamily="34" charset="-120"/>
+              </a:rPr>
+              <a:t/>
+            </a:r>
+            <a:r>
+              <a:rPr lang="en-US" altLang="zh-TW" b="1" dirty="0" err="1">
+                <a:solidFill>
+                  <a:schemeClr val="accent2"/>
+                </a:solidFill>
+                <a:latin typeface="Microsoft JhengHei" pitchFamily="34" charset="0"/>
+                <a:ea typeface="Microsoft JhengHei" pitchFamily="34" charset="-122"/>
+                <a:cs typeface="Microsoft JhengHei" pitchFamily="34" charset="-120"/>
+              </a:rPr>
+              <a:t/>
+            </a:r>
+            <a:r>
+              <a:rPr lang="en-US" altLang="zh-TW" b="1" dirty="0" smtClean="0">
+                <a:solidFill>
+                  <a:srgbClr val="F2E3C8"/>
+                </a:solidFill>
+                <a:latin typeface="Microsoft JhengHei" pitchFamily="34" charset="0"/>
+                <a:ea typeface="Microsoft JhengHei" pitchFamily="34" charset="-122"/>
+                <a:cs typeface="Microsoft JhengHei" pitchFamily="34" charset="-120"/>
+              </a:rPr>
+              <a:t/>
+            </a:r>
+            <a:endParaRPr lang="en-US" altLang="zh-TW" dirty="0"/>
+          </a:p>
+        </p:txBody>
+      </p:sp>
+      <p:sp>
+        <p:nvSpPr>
+          <p:cNvPr id="20" name="Shape 14"/>
+          <p:cNvSpPr/>
+          <p:nvPr/>
+        </p:nvSpPr>
+        <p:spPr>
+          <a:xfrm>
+            <a:off x="281386" y="1006135"/>
+            <a:ext cx="11580876" cy="789106"/>
+          </a:xfrm>
+          <a:prstGeom prst="roundRect">
+            <a:avLst>
+              <a:gd name="adj" fmla="val 4103"/>
+            </a:avLst>
+          </a:prstGeom>
+          <a:solidFill>
+            <a:srgbClr val="0D1424"/>
+          </a:solidFill>
+          <a:ln w="12700">
+            <a:solidFill>
+              <a:srgbClr val="1E3A5C"/>
+            </a:solidFill>
+            <a:prstDash val="solid"/>
+          </a:ln>
+        </p:spPr>
+      </p:sp>
+      <p:sp>
+        <p:nvSpPr>
+          <p:cNvPr id="21" name="矩形 20"/>
+          <p:cNvSpPr/>
+          <p:nvPr/>
+        </p:nvSpPr>
+        <p:spPr>
+          <a:xfrm>
+            <a:off x="457200" y="1066766"/>
+            <a:ext cx="11028218" cy="646331"/>
+          </a:xfrm>
+          <a:prstGeom prst="rect">
+            <a:avLst/>
+          </a:prstGeom>
+        </p:spPr>
+        <p:txBody>
+          <a:bodyPr wrap="square">
+            <a:spAutoFit/>
+          </a:bodyPr>
+          <a:lstStyle/>
+          <a:p>
+            <a:r>
+              <a:rPr lang="zh-TW" altLang="en-US" b="1" dirty="0" smtClean="0">
+                <a:solidFill>
+                  <a:srgbClr val="FF5C47"/>
+                </a:solidFill>
+                <a:latin typeface="Microsoft JhengHei" pitchFamily="34" charset="0"/>
+                <a:ea typeface="Microsoft JhengHei" pitchFamily="34" charset="-122"/>
+                <a:cs typeface="Microsoft JhengHei" pitchFamily="34" charset="-120"/>
+              </a:rPr>
+              <a:t>通訊協定四要素 × 班級經驗</a:t>
+            </a:r>
+            <a:endParaRPr lang="en-US" altLang="zh-TW" b="1" dirty="0">
+              <a:solidFill>
+                <a:srgbClr val="FF5C47"/>
+              </a:solidFill>
+              <a:latin typeface="Microsoft JhengHei" pitchFamily="34" charset="0"/>
+              <a:ea typeface="Microsoft JhengHei" pitchFamily="34" charset="-122"/>
+              <a:cs typeface="Microsoft JhengHei" pitchFamily="34" charset="-120"/>
+            </a:endParaRPr>
+          </a:p>
+          <a:p>
+            <a:r>
+              <a:rPr lang="zh-TW" altLang="en-US" b="1" dirty="0" smtClean="0">
+                <a:solidFill>
+                  <a:srgbClr val="F2E3C8"/>
+                </a:solidFill>
+                <a:latin typeface="Microsoft JhengHei" pitchFamily="34" charset="0"/>
+                <a:ea typeface="Microsoft JhengHei" pitchFamily="34" charset="-122"/>
+                <a:cs typeface="Microsoft JhengHei" pitchFamily="34" charset="-120"/>
+              </a:rPr>
+              <a:t>訊號的規則其實不陌生——我們班上課、收作業，天天都在用同一套約定。</a:t>
+            </a:r>
+            <a:r>
+              <a:rPr lang="en-US" altLang="zh-TW" b="1" dirty="0" err="1" smtClean="0">
+                <a:solidFill>
+                  <a:srgbClr val="F2E3C8"/>
+                </a:solidFill>
+                <a:latin typeface="Microsoft JhengHei" pitchFamily="34" charset="0"/>
+                <a:ea typeface="Microsoft JhengHei" pitchFamily="34" charset="-122"/>
+                <a:cs typeface="Microsoft JhengHei" pitchFamily="34" charset="-120"/>
+              </a:rPr>
+              <a:t/>
+            </a:r>
+            <a:r>
+              <a:rPr lang="zh-TW" altLang="en-US" b="1" dirty="0" smtClean="0">
+                <a:solidFill>
+                  <a:srgbClr val="F2E3C8"/>
+                </a:solidFill>
+                <a:latin typeface="Microsoft JhengHei" pitchFamily="34" charset="0"/>
+                <a:ea typeface="Microsoft JhengHei" pitchFamily="34" charset="-122"/>
+                <a:cs typeface="Microsoft JhengHei" pitchFamily="34" charset="-120"/>
+              </a:rPr>
+              <a:t/>
+            </a:r>
+            <a:r>
+              <a:rPr lang="en-US" altLang="zh-TW" b="1" dirty="0" smtClean="0">
+                <a:solidFill>
+                  <a:srgbClr val="F2E3C8"/>
+                </a:solidFill>
+                <a:latin typeface="Microsoft JhengHei" pitchFamily="34" charset="0"/>
+                <a:ea typeface="Microsoft JhengHei" pitchFamily="34" charset="-122"/>
+                <a:cs typeface="Microsoft JhengHei" pitchFamily="34" charset="-120"/>
+              </a:rPr>
+              <a:t/>
+            </a:r>
+            <a:r>
+              <a:rPr lang="en-US" altLang="zh-TW" b="1" dirty="0">
+                <a:solidFill>
+                  <a:srgbClr val="F2E3C8"/>
+                </a:solidFill>
+                <a:latin typeface="Microsoft JhengHei" pitchFamily="34" charset="0"/>
+                <a:ea typeface="Microsoft JhengHei" pitchFamily="34" charset="-122"/>
+                <a:cs typeface="Microsoft JhengHei" pitchFamily="34" charset="-120"/>
+              </a:rPr>
+              <a:t/>
+            </a:r>
+            <a:r>
+              <a:rPr lang="en-US" altLang="zh-TW" b="1" dirty="0" err="1">
+                <a:solidFill>
+                  <a:srgbClr val="F2E3C8"/>
+                </a:solidFill>
+                <a:latin typeface="Microsoft JhengHei" pitchFamily="34" charset="0"/>
+                <a:ea typeface="Microsoft JhengHei" pitchFamily="34" charset="-122"/>
+                <a:cs typeface="Microsoft JhengHei" pitchFamily="34" charset="-120"/>
+              </a:rPr>
+              <a:t/>
+            </a:r>
+            <a:r>
+              <a:rPr lang="en-US" altLang="zh-TW" b="1" dirty="0" smtClean="0">
+                <a:solidFill>
+                  <a:srgbClr val="F2E3C8"/>
+                </a:solidFill>
+                <a:latin typeface="Microsoft JhengHei" pitchFamily="34" charset="0"/>
+                <a:ea typeface="Microsoft JhengHei" pitchFamily="34" charset="-122"/>
+                <a:cs typeface="Microsoft JhengHei" pitchFamily="34" charset="-120"/>
+              </a:rPr>
+              <a:t/>
+            </a:r>
+            <a:r>
+              <a:rPr lang="zh-TW" altLang="en-US" b="1" dirty="0" smtClean="0">
+                <a:solidFill>
+                  <a:srgbClr val="F2E3C8"/>
+                </a:solidFill>
+                <a:latin typeface="Microsoft JhengHei" pitchFamily="34" charset="0"/>
+                <a:ea typeface="Microsoft JhengHei" pitchFamily="34" charset="-122"/>
+                <a:cs typeface="Microsoft JhengHei" pitchFamily="34" charset="-120"/>
+              </a:rPr>
+              <a:t/>
+            </a:r>
+            <a:r>
+              <a:rPr lang="en-US" altLang="zh-TW" b="1" dirty="0" err="1" smtClean="0">
+                <a:solidFill>
+                  <a:srgbClr val="F2E3C8"/>
+                </a:solidFill>
+                <a:latin typeface="Microsoft JhengHei" pitchFamily="34" charset="0"/>
+                <a:ea typeface="Microsoft JhengHei" pitchFamily="34" charset="-122"/>
+                <a:cs typeface="Microsoft JhengHei" pitchFamily="34" charset="-120"/>
+              </a:rPr>
+              <a:t/>
+            </a:r>
+            <a:r>
+              <a:rPr lang="zh-TW" altLang="en-US" b="1" dirty="0" smtClean="0">
+                <a:solidFill>
+                  <a:srgbClr val="F2E3C8"/>
+                </a:solidFill>
+                <a:latin typeface="Microsoft JhengHei" pitchFamily="34" charset="0"/>
+                <a:ea typeface="Microsoft JhengHei" pitchFamily="34" charset="-122"/>
+                <a:cs typeface="Microsoft JhengHei" pitchFamily="34" charset="-120"/>
+              </a:rPr>
+              <a:t/>
+            </a:r>
+            <a:r>
+              <a:rPr lang="en-US" altLang="zh-TW" b="1" dirty="0" err="1" smtClean="0">
+                <a:solidFill>
+                  <a:srgbClr val="F2E3C8"/>
+                </a:solidFill>
+                <a:latin typeface="Microsoft JhengHei" pitchFamily="34" charset="0"/>
+                <a:ea typeface="Microsoft JhengHei" pitchFamily="34" charset="-122"/>
+                <a:cs typeface="Microsoft JhengHei" pitchFamily="34" charset="-120"/>
+              </a:rPr>
+              <a:t/>
+            </a:r>
+            <a:r>
+              <a:rPr lang="en-US" altLang="zh-TW" b="1" dirty="0" err="1">
+                <a:solidFill>
+                  <a:srgbClr val="F2E3C8"/>
+                </a:solidFill>
+                <a:latin typeface="Microsoft JhengHei" pitchFamily="34" charset="0"/>
+                <a:ea typeface="Microsoft JhengHei" pitchFamily="34" charset="-122"/>
+                <a:cs typeface="Microsoft JhengHei" pitchFamily="34" charset="-120"/>
+              </a:rPr>
+              <a:t/>
+            </a:r>
+            <a:r>
+              <a:rPr lang="en-US" altLang="zh-TW" b="1" dirty="0">
+                <a:solidFill>
+                  <a:srgbClr val="F2E3C8"/>
+                </a:solidFill>
+                <a:latin typeface="Microsoft JhengHei" pitchFamily="34" charset="0"/>
+                <a:ea typeface="Microsoft JhengHei" pitchFamily="34" charset="-122"/>
+                <a:cs typeface="Microsoft JhengHei" pitchFamily="34" charset="-120"/>
+              </a:rPr>
+              <a:t/>
+            </a:r>
+            <a:endParaRPr lang="zh-TW" altLang="en-US" dirty="0"/>
           </a:p>
         </p:txBody>
       </p:sp>

--- a/slides-2-send-to-earth.pptx
+++ b/slides-2-send-to-earth.pptx
@@ -5,25 +5,25 @@
     <p:sldMasterId id="2147483648" r:id="rId1"/>
   </p:sldMasterIdLst>
   <p:notesMasterIdLst>
-    <p:notesMasterId r:id="rId17"/>
+    <p:notesMasterId r:id="rId18"/>
   </p:notesMasterIdLst>
   <p:sldIdLst>
     <p:sldId id="256" r:id="rId2"/>
     <p:sldId id="257" r:id="rId3"/>
     <p:sldId id="258" r:id="rId4"/>
     <p:sldId id="259" r:id="rId5"/>
-    <p:sldId id="260" r:id="rId6"/>
+    <p:sldId id="273" r:id="rId6"/>
     <p:sldId id="269" r:id="rId7"/>
     <p:sldId id="270" r:id="rId8"/>
     <p:sldId id="261" r:id="rId9"/>
-    <p:sldId id="271" r:id="rId22"/>
-    <p:sldId id="262" r:id="rId10"/>
-    <p:sldId id="263" r:id="rId11"/>
-    <p:sldId id="264" r:id="rId12"/>
-    <p:sldId id="265" r:id="rId13"/>
-    <p:sldId id="267" r:id="rId14"/>
-    <p:sldId id="266" r:id="rId15"/>
-    <p:sldId id="268" r:id="rId16"/>
+    <p:sldId id="271" r:id="rId10"/>
+    <p:sldId id="262" r:id="rId11"/>
+    <p:sldId id="263" r:id="rId12"/>
+    <p:sldId id="264" r:id="rId13"/>
+    <p:sldId id="265" r:id="rId14"/>
+    <p:sldId id="267" r:id="rId15"/>
+    <p:sldId id="266" r:id="rId16"/>
+    <p:sldId id="268" r:id="rId17"/>
   </p:sldIdLst>
   <p:sldSz cx="12192000" cy="6858000"/>
   <p:notesSz cx="6858000" cy="12192000"/>
@@ -407,7 +407,7 @@
           <a:p>
             <a:fld id="{F7021451-1387-4CA6-816F-3879F97B5CBC}" type="slidenum">
               <a:rPr lang="en-US"/>
-              <a:t>10</a:t>
+              <a:t>11</a:t>
             </a:fld>
             <a:endParaRPr lang="en-US"/>
           </a:p>
@@ -494,7 +494,7 @@
           <a:p>
             <a:fld id="{F7021451-1387-4CA6-816F-3879F97B5CBC}" type="slidenum">
               <a:rPr lang="en-US"/>
-              <a:t>11</a:t>
+              <a:t>12</a:t>
             </a:fld>
             <a:endParaRPr lang="en-US"/>
           </a:p>
@@ -581,7 +581,7 @@
           <a:p>
             <a:fld id="{F7021451-1387-4CA6-816F-3879F97B5CBC}" type="slidenum">
               <a:rPr lang="en-US"/>
-              <a:t>12</a:t>
+              <a:t>13</a:t>
             </a:fld>
             <a:endParaRPr lang="en-US"/>
           </a:p>
@@ -668,7 +668,7 @@
           <a:p>
             <a:fld id="{F7021451-1387-4CA6-816F-3879F97B5CBC}" type="slidenum">
               <a:rPr lang="en-US"/>
-              <a:t>13</a:t>
+              <a:t>14</a:t>
             </a:fld>
             <a:endParaRPr lang="en-US"/>
           </a:p>
@@ -755,7 +755,7 @@
           <a:p>
             <a:fld id="{F7021451-1387-4CA6-816F-3879F97B5CBC}" type="slidenum">
               <a:rPr lang="en-US"/>
-              <a:t>14</a:t>
+              <a:t>15</a:t>
             </a:fld>
             <a:endParaRPr lang="en-US"/>
           </a:p>
@@ -842,7 +842,7 @@
           <a:p>
             <a:fld id="{F7021451-1387-4CA6-816F-3879F97B5CBC}" type="slidenum">
               <a:rPr lang="en-US"/>
-              <a:t>15</a:t>
+              <a:t>16</a:t>
             </a:fld>
             <a:endParaRPr lang="en-US"/>
           </a:p>
@@ -1166,10 +1166,7 @@
           <a:bodyPr/>
           <a:lstStyle/>
           <a:p>
-            <a:r>
-              <a:rPr lang="en-US" dirty="0"/>
-              <a:t>收斂兩步：①照片已是一格格亮暗，可以像燈號一樣發送；②三億多公里外看不到手電筒，科學家用的是傳更遠的「無線電」。讓無線電是學生推理出來的結論。</a:t>
-            </a:r>
+            <a:endParaRPr lang="en-US" dirty="0"/>
           </a:p>
         </p:txBody>
       </p:sp>
@@ -1199,7 +1196,7 @@
     </p:spTree>
     <p:extLst>
       <p:ext uri="{BB962C8B-B14F-4D97-AF65-F5344CB8AC3E}">
-        <p14:creationId xmlns:p14="http://schemas.microsoft.com/office/powerpoint/2010/main" val="1024086991"/>
+        <p14:creationId xmlns:p14="http://schemas.microsoft.com/office/powerpoint/2010/main" val="4222122311"/>
       </p:ext>
     </p:extLst>
   </p:cSld>
@@ -1538,7 +1535,7 @@
           <a:p>
             <a:fld id="{F7021451-1387-4CA6-816F-3879F97B5CBC}" type="slidenum">
               <a:rPr lang="en-US"/>
-              <a:t>9</a:t>
+              <a:t>10</a:t>
             </a:fld>
             <a:endParaRPr lang="en-US"/>
           </a:p>
@@ -9970,7 +9967,7 @@
 
 <file path=ppt/slides/slide5.xml><?xml version="1.0" encoding="utf-8"?>
 <p:sld xmlns:a="http://schemas.openxmlformats.org/drawingml/2006/main" xmlns:r="http://schemas.openxmlformats.org/officeDocument/2006/relationships" xmlns:p="http://schemas.openxmlformats.org/presentationml/2006/main">
-  <p:cSld name="Slide 5">
+  <p:cSld>
     <p:bg>
       <p:bgPr>
         <a:solidFill>
@@ -10001,8 +9998,8 @@
         </p:nvSpPr>
         <p:spPr>
           <a:xfrm>
-            <a:off x="457200" y="6473952"/>
-            <a:ext cx="7315200" cy="274320"/>
+            <a:off x="548640" y="274320"/>
+            <a:ext cx="11064240" cy="640080"/>
           </a:xfrm>
           <a:prstGeom prst="rect">
             <a:avLst/>
@@ -10014,34 +10011,34 @@
           <a:bodyPr wrap="square" lIns="0" tIns="0" rIns="0" bIns="0" rtlCol="0" anchor="ctr"/>
           <a:lstStyle/>
           <a:p>
-            <a:pPr marL="0" indent="0">
-              <a:buNone/>
-            </a:pPr>
-            <a:r>
-              <a:rPr lang="en-US" sz="900" dirty="0">
-                <a:solidFill>
-                  <a:srgbClr val="7A93AE"/>
-                </a:solidFill>
-                <a:latin typeface="Microsoft JhengHei" pitchFamily="34" charset="0"/>
-                <a:ea typeface="Microsoft JhengHei" pitchFamily="34" charset="-122"/>
-                <a:cs typeface="Microsoft JhengHei" pitchFamily="34" charset="-120"/>
-              </a:rPr>
-              <a:t>MISSION 02 · 火星第一眼：1976 維京一號的拍照任務　5</a:t>
-            </a:r>
-            <a:endParaRPr lang="en-US" sz="900" dirty="0"/>
-          </a:p>
-        </p:txBody>
-      </p:sp>
-      <p:sp>
-        <p:nvSpPr>
-          <p:cNvPr id="4" name="Text 1"/>
-          <p:cNvSpPr/>
-          <p:nvPr/>
-        </p:nvSpPr>
-        <p:spPr>
-          <a:xfrm>
-            <a:off x="457200" y="320040"/>
-            <a:ext cx="11247120" cy="640080"/>
+            <a:pPr marL="0" indent="0" algn="l">
+              <a:buNone/>
+            </a:pPr>
+            <a:r>
+              <a:rPr lang="en-US" sz="2500" b="1" dirty="0">
+                <a:solidFill>
+                  <a:srgbClr val="FFFFFF"/>
+                </a:solidFill>
+                <a:latin typeface="Microsoft JhengHei" pitchFamily="34" charset="0"/>
+                <a:ea typeface="Microsoft JhengHei" pitchFamily="34" charset="-122"/>
+                <a:cs typeface="Microsoft JhengHei" pitchFamily="34" charset="-120"/>
+              </a:rPr>
+              <a:t>照片，可以變成一格一格的「亮」和「暗」，用「光」來傳送訊息</a:t>
+            </a:r>
+            <a:endParaRPr lang="en-US" sz="2500" dirty="0"/>
+          </a:p>
+        </p:txBody>
+      </p:sp>
+      <p:sp>
+        <p:nvSpPr>
+          <p:cNvPr id="3" name="Text 1"/>
+          <p:cNvSpPr/>
+          <p:nvPr/>
+        </p:nvSpPr>
+        <p:spPr>
+          <a:xfrm>
+            <a:off x="685800" y="1207008"/>
+            <a:ext cx="4023360" cy="292608"/>
           </a:xfrm>
           <a:prstGeom prst="rect">
             <a:avLst/>
@@ -10057,52 +10054,41 @@
               <a:buNone/>
             </a:pPr>
             <a:r>
-              <a:rPr lang="en-US" sz="3000" b="1" dirty="0" err="1">
-                <a:solidFill>
-                  <a:srgbClr val="F2E3C8"/>
-                </a:solidFill>
-                <a:latin typeface="Microsoft JhengHei" pitchFamily="34" charset="0"/>
-                <a:ea typeface="Microsoft JhengHei" pitchFamily="34" charset="-122"/>
-                <a:cs typeface="Microsoft JhengHei" pitchFamily="34" charset="-120"/>
-              </a:rPr>
-              <a:t>照片，已經是一格一格的「亮」和「暗</a:t>
-            </a:r>
-            <a:r>
-              <a:rPr lang="en-US" sz="3000" b="1" dirty="0" smtClean="0">
-                <a:solidFill>
-                  <a:srgbClr val="F2E3C8"/>
-                </a:solidFill>
-                <a:latin typeface="Microsoft JhengHei" pitchFamily="34" charset="0"/>
-                <a:ea typeface="Microsoft JhengHei" pitchFamily="34" charset="-122"/>
-                <a:cs typeface="Microsoft JhengHei" pitchFamily="34" charset="-120"/>
-              </a:rPr>
-              <a:t>」</a:t>
-            </a:r>
-            <a:r>
-              <a:rPr lang="zh-TW" altLang="en-US" sz="3000" b="1" dirty="0" smtClean="0">
-                <a:solidFill>
-                  <a:srgbClr val="F2E3C8"/>
-                </a:solidFill>
-                <a:latin typeface="Microsoft JhengHei" pitchFamily="34" charset="0"/>
-                <a:ea typeface="Microsoft JhengHei" pitchFamily="34" charset="-122"/>
-                <a:cs typeface="Microsoft JhengHei" pitchFamily="34" charset="-120"/>
-              </a:rPr>
-              <a:t>，用「光」來傳送訊息</a:t>
-            </a:r>
-            <a:endParaRPr lang="en-US" sz="3000" dirty="0"/>
-          </a:p>
-        </p:txBody>
-      </p:sp>
-      <p:sp>
-        <p:nvSpPr>
-          <p:cNvPr id="5" name="Shape 2"/>
-          <p:cNvSpPr/>
-          <p:nvPr/>
-        </p:nvSpPr>
-        <p:spPr>
-          <a:xfrm>
-            <a:off x="822960" y="1554480"/>
-            <a:ext cx="566928" cy="566928"/>
+              <a:rPr lang="en-US" sz="1200" dirty="0">
+                <a:solidFill>
+                  <a:srgbClr val="7A93AE"/>
+                </a:solidFill>
+                <a:latin typeface="Microsoft JhengHei" pitchFamily="34" charset="0"/>
+                <a:ea typeface="Microsoft JhengHei" pitchFamily="34" charset="-122"/>
+                <a:cs typeface="Microsoft JhengHei" pitchFamily="34" charset="-120"/>
+              </a:rPr>
+              <a:t>讀取順序：</a:t>
+            </a:r>
+            <a:r>
+              <a:rPr lang="en-US" sz="1200" b="1" dirty="0">
+                <a:solidFill>
+                  <a:srgbClr val="FFB347"/>
+                </a:solidFill>
+                <a:latin typeface="Microsoft JhengHei" pitchFamily="34" charset="0"/>
+                <a:ea typeface="Microsoft JhengHei" pitchFamily="34" charset="-122"/>
+                <a:cs typeface="Microsoft JhengHei" pitchFamily="34" charset="-120"/>
+              </a:rPr>
+              <a:t>由左到右、由上到下（1 → 25）</a:t>
+            </a:r>
+            <a:endParaRPr lang="en-US" sz="1200" dirty="0"/>
+          </a:p>
+        </p:txBody>
+      </p:sp>
+      <p:sp>
+        <p:nvSpPr>
+          <p:cNvPr id="4" name="Shape 2"/>
+          <p:cNvSpPr/>
+          <p:nvPr/>
+        </p:nvSpPr>
+        <p:spPr>
+          <a:xfrm>
+            <a:off x="685800" y="1600200"/>
+            <a:ext cx="530352" cy="530352"/>
           </a:xfrm>
           <a:prstGeom prst="rect">
             <a:avLst/>
@@ -10110,7 +10096,7 @@
           <a:solidFill>
             <a:srgbClr val="0D1424"/>
           </a:solidFill>
-          <a:ln w="9525">
+          <a:ln w="15875">
             <a:solidFill>
               <a:srgbClr val="1E3A5C"/>
             </a:solidFill>
@@ -10120,14 +10106,53 @@
       </p:sp>
       <p:sp>
         <p:nvSpPr>
-          <p:cNvPr id="6" name="Shape 3"/>
-          <p:cNvSpPr/>
-          <p:nvPr/>
-        </p:nvSpPr>
-        <p:spPr>
-          <a:xfrm>
-            <a:off x="1389888" y="1554480"/>
-            <a:ext cx="566928" cy="566928"/>
+          <p:cNvPr id="5" name="Text 3"/>
+          <p:cNvSpPr/>
+          <p:nvPr/>
+        </p:nvSpPr>
+        <p:spPr>
+          <a:xfrm>
+            <a:off x="704088" y="1609344"/>
+            <a:ext cx="256032" cy="182880"/>
+          </a:xfrm>
+          <a:prstGeom prst="rect">
+            <a:avLst/>
+          </a:prstGeom>
+          <a:noFill/>
+          <a:ln/>
+        </p:spPr>
+        <p:txBody>
+          <a:bodyPr wrap="square" lIns="0" tIns="0" rIns="0" bIns="0" rtlCol="0" anchor="ctr"/>
+          <a:lstStyle/>
+          <a:p>
+            <a:pPr marL="0" indent="0">
+              <a:buNone/>
+            </a:pPr>
+            <a:r>
+              <a:rPr lang="en-US" sz="800" dirty="0">
+                <a:solidFill>
+                  <a:srgbClr val="7A93AE"/>
+                </a:solidFill>
+                <a:latin typeface="Microsoft JhengHei" pitchFamily="34" charset="0"/>
+                <a:ea typeface="Microsoft JhengHei" pitchFamily="34" charset="-122"/>
+                <a:cs typeface="Microsoft JhengHei" pitchFamily="34" charset="-120"/>
+              </a:rPr>
+              <a:t>1</a:t>
+            </a:r>
+            <a:endParaRPr lang="en-US" sz="800" dirty="0"/>
+          </a:p>
+        </p:txBody>
+      </p:sp>
+      <p:sp>
+        <p:nvSpPr>
+          <p:cNvPr id="6" name="Shape 4"/>
+          <p:cNvSpPr/>
+          <p:nvPr/>
+        </p:nvSpPr>
+        <p:spPr>
+          <a:xfrm>
+            <a:off x="1216152" y="1600200"/>
+            <a:ext cx="530352" cy="530352"/>
           </a:xfrm>
           <a:prstGeom prst="rect">
             <a:avLst/>
@@ -10135,7 +10160,7 @@
           <a:solidFill>
             <a:srgbClr val="F2E3C8"/>
           </a:solidFill>
-          <a:ln w="9525">
+          <a:ln w="15875">
             <a:solidFill>
               <a:srgbClr val="1E3A5C"/>
             </a:solidFill>
@@ -10145,14 +10170,53 @@
       </p:sp>
       <p:sp>
         <p:nvSpPr>
-          <p:cNvPr id="7" name="Shape 4"/>
-          <p:cNvSpPr/>
-          <p:nvPr/>
-        </p:nvSpPr>
-        <p:spPr>
-          <a:xfrm>
-            <a:off x="1956816" y="1554480"/>
-            <a:ext cx="566928" cy="566928"/>
+          <p:cNvPr id="7" name="Text 5"/>
+          <p:cNvSpPr/>
+          <p:nvPr/>
+        </p:nvSpPr>
+        <p:spPr>
+          <a:xfrm>
+            <a:off x="1234440" y="1609344"/>
+            <a:ext cx="256032" cy="182880"/>
+          </a:xfrm>
+          <a:prstGeom prst="rect">
+            <a:avLst/>
+          </a:prstGeom>
+          <a:noFill/>
+          <a:ln/>
+        </p:spPr>
+        <p:txBody>
+          <a:bodyPr wrap="square" lIns="0" tIns="0" rIns="0" bIns="0" rtlCol="0" anchor="ctr"/>
+          <a:lstStyle/>
+          <a:p>
+            <a:pPr marL="0" indent="0">
+              <a:buNone/>
+            </a:pPr>
+            <a:r>
+              <a:rPr lang="en-US" sz="800" dirty="0">
+                <a:solidFill>
+                  <a:srgbClr val="8A7A55"/>
+                </a:solidFill>
+                <a:latin typeface="Microsoft JhengHei" pitchFamily="34" charset="0"/>
+                <a:ea typeface="Microsoft JhengHei" pitchFamily="34" charset="-122"/>
+                <a:cs typeface="Microsoft JhengHei" pitchFamily="34" charset="-120"/>
+              </a:rPr>
+              <a:t>2</a:t>
+            </a:r>
+            <a:endParaRPr lang="en-US" sz="800" dirty="0"/>
+          </a:p>
+        </p:txBody>
+      </p:sp>
+      <p:sp>
+        <p:nvSpPr>
+          <p:cNvPr id="8" name="Shape 6"/>
+          <p:cNvSpPr/>
+          <p:nvPr/>
+        </p:nvSpPr>
+        <p:spPr>
+          <a:xfrm>
+            <a:off x="1746504" y="1600200"/>
+            <a:ext cx="530352" cy="530352"/>
           </a:xfrm>
           <a:prstGeom prst="rect">
             <a:avLst/>
@@ -10160,7 +10224,7 @@
           <a:solidFill>
             <a:srgbClr val="F2E3C8"/>
           </a:solidFill>
-          <a:ln w="9525">
+          <a:ln w="15875">
             <a:solidFill>
               <a:srgbClr val="1E3A5C"/>
             </a:solidFill>
@@ -10170,14 +10234,53 @@
       </p:sp>
       <p:sp>
         <p:nvSpPr>
-          <p:cNvPr id="8" name="Shape 5"/>
-          <p:cNvSpPr/>
-          <p:nvPr/>
-        </p:nvSpPr>
-        <p:spPr>
-          <a:xfrm>
-            <a:off x="2523744" y="1554480"/>
-            <a:ext cx="566928" cy="566928"/>
+          <p:cNvPr id="9" name="Text 7"/>
+          <p:cNvSpPr/>
+          <p:nvPr/>
+        </p:nvSpPr>
+        <p:spPr>
+          <a:xfrm>
+            <a:off x="1764792" y="1609344"/>
+            <a:ext cx="256032" cy="182880"/>
+          </a:xfrm>
+          <a:prstGeom prst="rect">
+            <a:avLst/>
+          </a:prstGeom>
+          <a:noFill/>
+          <a:ln/>
+        </p:spPr>
+        <p:txBody>
+          <a:bodyPr wrap="square" lIns="0" tIns="0" rIns="0" bIns="0" rtlCol="0" anchor="ctr"/>
+          <a:lstStyle/>
+          <a:p>
+            <a:pPr marL="0" indent="0">
+              <a:buNone/>
+            </a:pPr>
+            <a:r>
+              <a:rPr lang="en-US" sz="800" dirty="0">
+                <a:solidFill>
+                  <a:srgbClr val="8A7A55"/>
+                </a:solidFill>
+                <a:latin typeface="Microsoft JhengHei" pitchFamily="34" charset="0"/>
+                <a:ea typeface="Microsoft JhengHei" pitchFamily="34" charset="-122"/>
+                <a:cs typeface="Microsoft JhengHei" pitchFamily="34" charset="-120"/>
+              </a:rPr>
+              <a:t>3</a:t>
+            </a:r>
+            <a:endParaRPr lang="en-US" sz="800" dirty="0"/>
+          </a:p>
+        </p:txBody>
+      </p:sp>
+      <p:sp>
+        <p:nvSpPr>
+          <p:cNvPr id="10" name="Shape 8"/>
+          <p:cNvSpPr/>
+          <p:nvPr/>
+        </p:nvSpPr>
+        <p:spPr>
+          <a:xfrm>
+            <a:off x="2276856" y="1600200"/>
+            <a:ext cx="530352" cy="530352"/>
           </a:xfrm>
           <a:prstGeom prst="rect">
             <a:avLst/>
@@ -10185,7 +10288,7 @@
           <a:solidFill>
             <a:srgbClr val="F2E3C8"/>
           </a:solidFill>
-          <a:ln w="9525">
+          <a:ln w="15875">
             <a:solidFill>
               <a:srgbClr val="1E3A5C"/>
             </a:solidFill>
@@ -10195,14 +10298,53 @@
       </p:sp>
       <p:sp>
         <p:nvSpPr>
-          <p:cNvPr id="9" name="Shape 6"/>
-          <p:cNvSpPr/>
-          <p:nvPr/>
-        </p:nvSpPr>
-        <p:spPr>
-          <a:xfrm>
-            <a:off x="3090672" y="1554480"/>
-            <a:ext cx="566928" cy="566928"/>
+          <p:cNvPr id="11" name="Text 9"/>
+          <p:cNvSpPr/>
+          <p:nvPr/>
+        </p:nvSpPr>
+        <p:spPr>
+          <a:xfrm>
+            <a:off x="2295144" y="1609344"/>
+            <a:ext cx="256032" cy="182880"/>
+          </a:xfrm>
+          <a:prstGeom prst="rect">
+            <a:avLst/>
+          </a:prstGeom>
+          <a:noFill/>
+          <a:ln/>
+        </p:spPr>
+        <p:txBody>
+          <a:bodyPr wrap="square" lIns="0" tIns="0" rIns="0" bIns="0" rtlCol="0" anchor="ctr"/>
+          <a:lstStyle/>
+          <a:p>
+            <a:pPr marL="0" indent="0">
+              <a:buNone/>
+            </a:pPr>
+            <a:r>
+              <a:rPr lang="en-US" sz="800" dirty="0">
+                <a:solidFill>
+                  <a:srgbClr val="8A7A55"/>
+                </a:solidFill>
+                <a:latin typeface="Microsoft JhengHei" pitchFamily="34" charset="0"/>
+                <a:ea typeface="Microsoft JhengHei" pitchFamily="34" charset="-122"/>
+                <a:cs typeface="Microsoft JhengHei" pitchFamily="34" charset="-120"/>
+              </a:rPr>
+              <a:t>4</a:t>
+            </a:r>
+            <a:endParaRPr lang="en-US" sz="800" dirty="0"/>
+          </a:p>
+        </p:txBody>
+      </p:sp>
+      <p:sp>
+        <p:nvSpPr>
+          <p:cNvPr id="12" name="Shape 10"/>
+          <p:cNvSpPr/>
+          <p:nvPr/>
+        </p:nvSpPr>
+        <p:spPr>
+          <a:xfrm>
+            <a:off x="2807208" y="1600200"/>
+            <a:ext cx="530352" cy="530352"/>
           </a:xfrm>
           <a:prstGeom prst="rect">
             <a:avLst/>
@@ -10210,7 +10352,7 @@
           <a:solidFill>
             <a:srgbClr val="0D1424"/>
           </a:solidFill>
-          <a:ln w="9525">
+          <a:ln w="15875">
             <a:solidFill>
               <a:srgbClr val="1E3A5C"/>
             </a:solidFill>
@@ -10220,14 +10362,53 @@
       </p:sp>
       <p:sp>
         <p:nvSpPr>
-          <p:cNvPr id="10" name="Shape 7"/>
-          <p:cNvSpPr/>
-          <p:nvPr/>
-        </p:nvSpPr>
-        <p:spPr>
-          <a:xfrm>
-            <a:off x="822960" y="2121408"/>
-            <a:ext cx="566928" cy="566928"/>
+          <p:cNvPr id="13" name="Text 11"/>
+          <p:cNvSpPr/>
+          <p:nvPr/>
+        </p:nvSpPr>
+        <p:spPr>
+          <a:xfrm>
+            <a:off x="2825496" y="1609344"/>
+            <a:ext cx="256032" cy="182880"/>
+          </a:xfrm>
+          <a:prstGeom prst="rect">
+            <a:avLst/>
+          </a:prstGeom>
+          <a:noFill/>
+          <a:ln/>
+        </p:spPr>
+        <p:txBody>
+          <a:bodyPr wrap="square" lIns="0" tIns="0" rIns="0" bIns="0" rtlCol="0" anchor="ctr"/>
+          <a:lstStyle/>
+          <a:p>
+            <a:pPr marL="0" indent="0">
+              <a:buNone/>
+            </a:pPr>
+            <a:r>
+              <a:rPr lang="en-US" sz="800" dirty="0">
+                <a:solidFill>
+                  <a:srgbClr val="7A93AE"/>
+                </a:solidFill>
+                <a:latin typeface="Microsoft JhengHei" pitchFamily="34" charset="0"/>
+                <a:ea typeface="Microsoft JhengHei" pitchFamily="34" charset="-122"/>
+                <a:cs typeface="Microsoft JhengHei" pitchFamily="34" charset="-120"/>
+              </a:rPr>
+              <a:t>5</a:t>
+            </a:r>
+            <a:endParaRPr lang="en-US" sz="800" dirty="0"/>
+          </a:p>
+        </p:txBody>
+      </p:sp>
+      <p:sp>
+        <p:nvSpPr>
+          <p:cNvPr id="14" name="Shape 12"/>
+          <p:cNvSpPr/>
+          <p:nvPr/>
+        </p:nvSpPr>
+        <p:spPr>
+          <a:xfrm>
+            <a:off x="685800" y="2130552"/>
+            <a:ext cx="530352" cy="530352"/>
           </a:xfrm>
           <a:prstGeom prst="rect">
             <a:avLst/>
@@ -10235,7 +10416,7 @@
           <a:solidFill>
             <a:srgbClr val="F2E3C8"/>
           </a:solidFill>
-          <a:ln w="9525">
+          <a:ln w="15875">
             <a:solidFill>
               <a:srgbClr val="1E3A5C"/>
             </a:solidFill>
@@ -10245,22 +10426,61 @@
       </p:sp>
       <p:sp>
         <p:nvSpPr>
-          <p:cNvPr id="11" name="Shape 8"/>
-          <p:cNvSpPr/>
-          <p:nvPr/>
-        </p:nvSpPr>
-        <p:spPr>
-          <a:xfrm>
-            <a:off x="1389888" y="2121408"/>
-            <a:ext cx="566928" cy="566928"/>
+          <p:cNvPr id="15" name="Text 13"/>
+          <p:cNvSpPr/>
+          <p:nvPr/>
+        </p:nvSpPr>
+        <p:spPr>
+          <a:xfrm>
+            <a:off x="704088" y="2139696"/>
+            <a:ext cx="256032" cy="182880"/>
+          </a:xfrm>
+          <a:prstGeom prst="rect">
+            <a:avLst/>
+          </a:prstGeom>
+          <a:noFill/>
+          <a:ln/>
+        </p:spPr>
+        <p:txBody>
+          <a:bodyPr wrap="square" lIns="0" tIns="0" rIns="0" bIns="0" rtlCol="0" anchor="ctr"/>
+          <a:lstStyle/>
+          <a:p>
+            <a:pPr marL="0" indent="0">
+              <a:buNone/>
+            </a:pPr>
+            <a:r>
+              <a:rPr lang="en-US" sz="800" dirty="0">
+                <a:solidFill>
+                  <a:srgbClr val="8A7A55"/>
+                </a:solidFill>
+                <a:latin typeface="Microsoft JhengHei" pitchFamily="34" charset="0"/>
+                <a:ea typeface="Microsoft JhengHei" pitchFamily="34" charset="-122"/>
+                <a:cs typeface="Microsoft JhengHei" pitchFamily="34" charset="-120"/>
+              </a:rPr>
+              <a:t>6</a:t>
+            </a:r>
+            <a:endParaRPr lang="en-US" sz="800" dirty="0"/>
+          </a:p>
+        </p:txBody>
+      </p:sp>
+      <p:sp>
+        <p:nvSpPr>
+          <p:cNvPr id="16" name="Shape 14"/>
+          <p:cNvSpPr/>
+          <p:nvPr/>
+        </p:nvSpPr>
+        <p:spPr>
+          <a:xfrm>
+            <a:off x="1216152" y="2130552"/>
+            <a:ext cx="530352" cy="530352"/>
           </a:xfrm>
           <a:prstGeom prst="rect">
             <a:avLst/>
           </a:prstGeom>
           <a:solidFill>
-            <a:srgbClr val="F2E3C8"/>
+            <a:srgbClr val="0D1424"/>
           </a:solidFill>
-          <a:ln w="9525">
+          <a:ln w="15875">
             <a:solidFill>
               <a:srgbClr val="1E3A5C"/>
             </a:solidFill>
@@ -10270,14 +10490,53 @@
       </p:sp>
       <p:sp>
         <p:nvSpPr>
-          <p:cNvPr id="12" name="Shape 9"/>
-          <p:cNvSpPr/>
-          <p:nvPr/>
-        </p:nvSpPr>
-        <p:spPr>
-          <a:xfrm>
-            <a:off x="1956816" y="2121408"/>
-            <a:ext cx="566928" cy="566928"/>
+          <p:cNvPr id="17" name="Text 15"/>
+          <p:cNvSpPr/>
+          <p:nvPr/>
+        </p:nvSpPr>
+        <p:spPr>
+          <a:xfrm>
+            <a:off x="1234440" y="2139696"/>
+            <a:ext cx="256032" cy="182880"/>
+          </a:xfrm>
+          <a:prstGeom prst="rect">
+            <a:avLst/>
+          </a:prstGeom>
+          <a:noFill/>
+          <a:ln/>
+        </p:spPr>
+        <p:txBody>
+          <a:bodyPr wrap="square" lIns="0" tIns="0" rIns="0" bIns="0" rtlCol="0" anchor="ctr"/>
+          <a:lstStyle/>
+          <a:p>
+            <a:pPr marL="0" indent="0">
+              <a:buNone/>
+            </a:pPr>
+            <a:r>
+              <a:rPr lang="en-US" sz="800" dirty="0">
+                <a:solidFill>
+                  <a:srgbClr val="7A93AE"/>
+                </a:solidFill>
+                <a:latin typeface="Microsoft JhengHei" pitchFamily="34" charset="0"/>
+                <a:ea typeface="Microsoft JhengHei" pitchFamily="34" charset="-122"/>
+                <a:cs typeface="Microsoft JhengHei" pitchFamily="34" charset="-120"/>
+              </a:rPr>
+              <a:t>7</a:t>
+            </a:r>
+            <a:endParaRPr lang="en-US" sz="800" dirty="0"/>
+          </a:p>
+        </p:txBody>
+      </p:sp>
+      <p:sp>
+        <p:nvSpPr>
+          <p:cNvPr id="18" name="Shape 16"/>
+          <p:cNvSpPr/>
+          <p:nvPr/>
+        </p:nvSpPr>
+        <p:spPr>
+          <a:xfrm>
+            <a:off x="1746504" y="2130552"/>
+            <a:ext cx="530352" cy="530352"/>
           </a:xfrm>
           <a:prstGeom prst="rect">
             <a:avLst/>
@@ -10285,7 +10544,7 @@
           <a:solidFill>
             <a:srgbClr val="0D1424"/>
           </a:solidFill>
-          <a:ln w="9525">
+          <a:ln w="15875">
             <a:solidFill>
               <a:srgbClr val="1E3A5C"/>
             </a:solidFill>
@@ -10295,22 +10554,61 @@
       </p:sp>
       <p:sp>
         <p:nvSpPr>
-          <p:cNvPr id="13" name="Shape 10"/>
-          <p:cNvSpPr/>
-          <p:nvPr/>
-        </p:nvSpPr>
-        <p:spPr>
-          <a:xfrm>
-            <a:off x="2523744" y="2121408"/>
-            <a:ext cx="566928" cy="566928"/>
+          <p:cNvPr id="19" name="Text 17"/>
+          <p:cNvSpPr/>
+          <p:nvPr/>
+        </p:nvSpPr>
+        <p:spPr>
+          <a:xfrm>
+            <a:off x="1764792" y="2139696"/>
+            <a:ext cx="256032" cy="182880"/>
+          </a:xfrm>
+          <a:prstGeom prst="rect">
+            <a:avLst/>
+          </a:prstGeom>
+          <a:noFill/>
+          <a:ln/>
+        </p:spPr>
+        <p:txBody>
+          <a:bodyPr wrap="square" lIns="0" tIns="0" rIns="0" bIns="0" rtlCol="0" anchor="ctr"/>
+          <a:lstStyle/>
+          <a:p>
+            <a:pPr marL="0" indent="0">
+              <a:buNone/>
+            </a:pPr>
+            <a:r>
+              <a:rPr lang="en-US" sz="800" dirty="0">
+                <a:solidFill>
+                  <a:srgbClr val="7A93AE"/>
+                </a:solidFill>
+                <a:latin typeface="Microsoft JhengHei" pitchFamily="34" charset="0"/>
+                <a:ea typeface="Microsoft JhengHei" pitchFamily="34" charset="-122"/>
+                <a:cs typeface="Microsoft JhengHei" pitchFamily="34" charset="-120"/>
+              </a:rPr>
+              <a:t>8</a:t>
+            </a:r>
+            <a:endParaRPr lang="en-US" sz="800" dirty="0"/>
+          </a:p>
+        </p:txBody>
+      </p:sp>
+      <p:sp>
+        <p:nvSpPr>
+          <p:cNvPr id="20" name="Shape 18"/>
+          <p:cNvSpPr/>
+          <p:nvPr/>
+        </p:nvSpPr>
+        <p:spPr>
+          <a:xfrm>
+            <a:off x="2276856" y="2130552"/>
+            <a:ext cx="530352" cy="530352"/>
           </a:xfrm>
           <a:prstGeom prst="rect">
             <a:avLst/>
           </a:prstGeom>
           <a:solidFill>
-            <a:srgbClr val="F2E3C8"/>
+            <a:srgbClr val="0D1424"/>
           </a:solidFill>
-          <a:ln w="9525">
+          <a:ln w="15875">
             <a:solidFill>
               <a:srgbClr val="1E3A5C"/>
             </a:solidFill>
@@ -10320,14 +10618,53 @@
       </p:sp>
       <p:sp>
         <p:nvSpPr>
-          <p:cNvPr id="14" name="Shape 11"/>
-          <p:cNvSpPr/>
-          <p:nvPr/>
-        </p:nvSpPr>
-        <p:spPr>
-          <a:xfrm>
-            <a:off x="3090672" y="2121408"/>
-            <a:ext cx="566928" cy="566928"/>
+          <p:cNvPr id="21" name="Text 19"/>
+          <p:cNvSpPr/>
+          <p:nvPr/>
+        </p:nvSpPr>
+        <p:spPr>
+          <a:xfrm>
+            <a:off x="2295144" y="2139696"/>
+            <a:ext cx="256032" cy="182880"/>
+          </a:xfrm>
+          <a:prstGeom prst="rect">
+            <a:avLst/>
+          </a:prstGeom>
+          <a:noFill/>
+          <a:ln/>
+        </p:spPr>
+        <p:txBody>
+          <a:bodyPr wrap="square" lIns="0" tIns="0" rIns="0" bIns="0" rtlCol="0" anchor="ctr"/>
+          <a:lstStyle/>
+          <a:p>
+            <a:pPr marL="0" indent="0">
+              <a:buNone/>
+            </a:pPr>
+            <a:r>
+              <a:rPr lang="en-US" sz="800" dirty="0">
+                <a:solidFill>
+                  <a:srgbClr val="7A93AE"/>
+                </a:solidFill>
+                <a:latin typeface="Microsoft JhengHei" pitchFamily="34" charset="0"/>
+                <a:ea typeface="Microsoft JhengHei" pitchFamily="34" charset="-122"/>
+                <a:cs typeface="Microsoft JhengHei" pitchFamily="34" charset="-120"/>
+              </a:rPr>
+              <a:t>9</a:t>
+            </a:r>
+            <a:endParaRPr lang="en-US" sz="800" dirty="0"/>
+          </a:p>
+        </p:txBody>
+      </p:sp>
+      <p:sp>
+        <p:nvSpPr>
+          <p:cNvPr id="22" name="Shape 20"/>
+          <p:cNvSpPr/>
+          <p:nvPr/>
+        </p:nvSpPr>
+        <p:spPr>
+          <a:xfrm>
+            <a:off x="2807208" y="2130552"/>
+            <a:ext cx="530352" cy="530352"/>
           </a:xfrm>
           <a:prstGeom prst="rect">
             <a:avLst/>
@@ -10335,7 +10672,7 @@
           <a:solidFill>
             <a:srgbClr val="F2E3C8"/>
           </a:solidFill>
-          <a:ln w="9525">
+          <a:ln w="15875">
             <a:solidFill>
               <a:srgbClr val="1E3A5C"/>
             </a:solidFill>
@@ -10345,14 +10682,53 @@
       </p:sp>
       <p:sp>
         <p:nvSpPr>
-          <p:cNvPr id="15" name="Shape 12"/>
-          <p:cNvSpPr/>
-          <p:nvPr/>
-        </p:nvSpPr>
-        <p:spPr>
-          <a:xfrm>
-            <a:off x="822960" y="2688336"/>
-            <a:ext cx="566928" cy="566928"/>
+          <p:cNvPr id="23" name="Text 21"/>
+          <p:cNvSpPr/>
+          <p:nvPr/>
+        </p:nvSpPr>
+        <p:spPr>
+          <a:xfrm>
+            <a:off x="2825496" y="2139696"/>
+            <a:ext cx="256032" cy="182880"/>
+          </a:xfrm>
+          <a:prstGeom prst="rect">
+            <a:avLst/>
+          </a:prstGeom>
+          <a:noFill/>
+          <a:ln/>
+        </p:spPr>
+        <p:txBody>
+          <a:bodyPr wrap="square" lIns="0" tIns="0" rIns="0" bIns="0" rtlCol="0" anchor="ctr"/>
+          <a:lstStyle/>
+          <a:p>
+            <a:pPr marL="0" indent="0">
+              <a:buNone/>
+            </a:pPr>
+            <a:r>
+              <a:rPr lang="en-US" sz="800" dirty="0">
+                <a:solidFill>
+                  <a:srgbClr val="8A7A55"/>
+                </a:solidFill>
+                <a:latin typeface="Microsoft JhengHei" pitchFamily="34" charset="0"/>
+                <a:ea typeface="Microsoft JhengHei" pitchFamily="34" charset="-122"/>
+                <a:cs typeface="Microsoft JhengHei" pitchFamily="34" charset="-120"/>
+              </a:rPr>
+              <a:t>10</a:t>
+            </a:r>
+            <a:endParaRPr lang="en-US" sz="800" dirty="0"/>
+          </a:p>
+        </p:txBody>
+      </p:sp>
+      <p:sp>
+        <p:nvSpPr>
+          <p:cNvPr id="24" name="Shape 22"/>
+          <p:cNvSpPr/>
+          <p:nvPr/>
+        </p:nvSpPr>
+        <p:spPr>
+          <a:xfrm>
+            <a:off x="685800" y="2660904"/>
+            <a:ext cx="530352" cy="530352"/>
           </a:xfrm>
           <a:prstGeom prst="rect">
             <a:avLst/>
@@ -10360,7 +10736,7 @@
           <a:solidFill>
             <a:srgbClr val="F2E3C8"/>
           </a:solidFill>
-          <a:ln w="9525">
+          <a:ln w="15875">
             <a:solidFill>
               <a:srgbClr val="1E3A5C"/>
             </a:solidFill>
@@ -10370,14 +10746,53 @@
       </p:sp>
       <p:sp>
         <p:nvSpPr>
-          <p:cNvPr id="16" name="Shape 13"/>
-          <p:cNvSpPr/>
-          <p:nvPr/>
-        </p:nvSpPr>
-        <p:spPr>
-          <a:xfrm>
-            <a:off x="1389888" y="2688336"/>
-            <a:ext cx="566928" cy="566928"/>
+          <p:cNvPr id="25" name="Text 23"/>
+          <p:cNvSpPr/>
+          <p:nvPr/>
+        </p:nvSpPr>
+        <p:spPr>
+          <a:xfrm>
+            <a:off x="704088" y="2670048"/>
+            <a:ext cx="256032" cy="182880"/>
+          </a:xfrm>
+          <a:prstGeom prst="rect">
+            <a:avLst/>
+          </a:prstGeom>
+          <a:noFill/>
+          <a:ln/>
+        </p:spPr>
+        <p:txBody>
+          <a:bodyPr wrap="square" lIns="0" tIns="0" rIns="0" bIns="0" rtlCol="0" anchor="ctr"/>
+          <a:lstStyle/>
+          <a:p>
+            <a:pPr marL="0" indent="0">
+              <a:buNone/>
+            </a:pPr>
+            <a:r>
+              <a:rPr lang="en-US" sz="800" dirty="0">
+                <a:solidFill>
+                  <a:srgbClr val="8A7A55"/>
+                </a:solidFill>
+                <a:latin typeface="Microsoft JhengHei" pitchFamily="34" charset="0"/>
+                <a:ea typeface="Microsoft JhengHei" pitchFamily="34" charset="-122"/>
+                <a:cs typeface="Microsoft JhengHei" pitchFamily="34" charset="-120"/>
+              </a:rPr>
+              <a:t>11</a:t>
+            </a:r>
+            <a:endParaRPr lang="en-US" sz="800" dirty="0"/>
+          </a:p>
+        </p:txBody>
+      </p:sp>
+      <p:sp>
+        <p:nvSpPr>
+          <p:cNvPr id="26" name="Shape 24"/>
+          <p:cNvSpPr/>
+          <p:nvPr/>
+        </p:nvSpPr>
+        <p:spPr>
+          <a:xfrm>
+            <a:off x="1216152" y="2660904"/>
+            <a:ext cx="530352" cy="530352"/>
           </a:xfrm>
           <a:prstGeom prst="rect">
             <a:avLst/>
@@ -10385,7 +10800,7 @@
           <a:solidFill>
             <a:srgbClr val="0D1424"/>
           </a:solidFill>
-          <a:ln w="9525">
+          <a:ln w="15875">
             <a:solidFill>
               <a:srgbClr val="1E3A5C"/>
             </a:solidFill>
@@ -10395,14 +10810,53 @@
       </p:sp>
       <p:sp>
         <p:nvSpPr>
-          <p:cNvPr id="17" name="Shape 14"/>
-          <p:cNvSpPr/>
-          <p:nvPr/>
-        </p:nvSpPr>
-        <p:spPr>
-          <a:xfrm>
-            <a:off x="1956816" y="2688336"/>
-            <a:ext cx="566928" cy="566928"/>
+          <p:cNvPr id="27" name="Text 25"/>
+          <p:cNvSpPr/>
+          <p:nvPr/>
+        </p:nvSpPr>
+        <p:spPr>
+          <a:xfrm>
+            <a:off x="1234440" y="2670048"/>
+            <a:ext cx="256032" cy="182880"/>
+          </a:xfrm>
+          <a:prstGeom prst="rect">
+            <a:avLst/>
+          </a:prstGeom>
+          <a:noFill/>
+          <a:ln/>
+        </p:spPr>
+        <p:txBody>
+          <a:bodyPr wrap="square" lIns="0" tIns="0" rIns="0" bIns="0" rtlCol="0" anchor="ctr"/>
+          <a:lstStyle/>
+          <a:p>
+            <a:pPr marL="0" indent="0">
+              <a:buNone/>
+            </a:pPr>
+            <a:r>
+              <a:rPr lang="en-US" sz="800" dirty="0">
+                <a:solidFill>
+                  <a:srgbClr val="7A93AE"/>
+                </a:solidFill>
+                <a:latin typeface="Microsoft JhengHei" pitchFamily="34" charset="0"/>
+                <a:ea typeface="Microsoft JhengHei" pitchFamily="34" charset="-122"/>
+                <a:cs typeface="Microsoft JhengHei" pitchFamily="34" charset="-120"/>
+              </a:rPr>
+              <a:t>12</a:t>
+            </a:r>
+            <a:endParaRPr lang="en-US" sz="800" dirty="0"/>
+          </a:p>
+        </p:txBody>
+      </p:sp>
+      <p:sp>
+        <p:nvSpPr>
+          <p:cNvPr id="28" name="Shape 26"/>
+          <p:cNvSpPr/>
+          <p:nvPr/>
+        </p:nvSpPr>
+        <p:spPr>
+          <a:xfrm>
+            <a:off x="1746504" y="2660904"/>
+            <a:ext cx="530352" cy="530352"/>
           </a:xfrm>
           <a:prstGeom prst="rect">
             <a:avLst/>
@@ -10410,7 +10864,7 @@
           <a:solidFill>
             <a:srgbClr val="0D1424"/>
           </a:solidFill>
-          <a:ln w="9525">
+          <a:ln w="15875">
             <a:solidFill>
               <a:srgbClr val="1E3A5C"/>
             </a:solidFill>
@@ -10420,14 +10874,53 @@
       </p:sp>
       <p:sp>
         <p:nvSpPr>
-          <p:cNvPr id="18" name="Shape 15"/>
-          <p:cNvSpPr/>
-          <p:nvPr/>
-        </p:nvSpPr>
-        <p:spPr>
-          <a:xfrm>
-            <a:off x="2523744" y="2688336"/>
-            <a:ext cx="566928" cy="566928"/>
+          <p:cNvPr id="29" name="Text 27"/>
+          <p:cNvSpPr/>
+          <p:nvPr/>
+        </p:nvSpPr>
+        <p:spPr>
+          <a:xfrm>
+            <a:off x="1764792" y="2670048"/>
+            <a:ext cx="256032" cy="182880"/>
+          </a:xfrm>
+          <a:prstGeom prst="rect">
+            <a:avLst/>
+          </a:prstGeom>
+          <a:noFill/>
+          <a:ln/>
+        </p:spPr>
+        <p:txBody>
+          <a:bodyPr wrap="square" lIns="0" tIns="0" rIns="0" bIns="0" rtlCol="0" anchor="ctr"/>
+          <a:lstStyle/>
+          <a:p>
+            <a:pPr marL="0" indent="0">
+              <a:buNone/>
+            </a:pPr>
+            <a:r>
+              <a:rPr lang="en-US" sz="800" dirty="0">
+                <a:solidFill>
+                  <a:srgbClr val="7A93AE"/>
+                </a:solidFill>
+                <a:latin typeface="Microsoft JhengHei" pitchFamily="34" charset="0"/>
+                <a:ea typeface="Microsoft JhengHei" pitchFamily="34" charset="-122"/>
+                <a:cs typeface="Microsoft JhengHei" pitchFamily="34" charset="-120"/>
+              </a:rPr>
+              <a:t>13</a:t>
+            </a:r>
+            <a:endParaRPr lang="en-US" sz="800" dirty="0"/>
+          </a:p>
+        </p:txBody>
+      </p:sp>
+      <p:sp>
+        <p:nvSpPr>
+          <p:cNvPr id="30" name="Shape 28"/>
+          <p:cNvSpPr/>
+          <p:nvPr/>
+        </p:nvSpPr>
+        <p:spPr>
+          <a:xfrm>
+            <a:off x="2276856" y="2660904"/>
+            <a:ext cx="530352" cy="530352"/>
           </a:xfrm>
           <a:prstGeom prst="rect">
             <a:avLst/>
@@ -10435,7 +10928,7 @@
           <a:solidFill>
             <a:srgbClr val="0D1424"/>
           </a:solidFill>
-          <a:ln w="9525">
+          <a:ln w="15875">
             <a:solidFill>
               <a:srgbClr val="1E3A5C"/>
             </a:solidFill>
@@ -10445,14 +10938,53 @@
       </p:sp>
       <p:sp>
         <p:nvSpPr>
-          <p:cNvPr id="19" name="Shape 16"/>
-          <p:cNvSpPr/>
-          <p:nvPr/>
-        </p:nvSpPr>
-        <p:spPr>
-          <a:xfrm>
-            <a:off x="3090672" y="2688336"/>
-            <a:ext cx="566928" cy="566928"/>
+          <p:cNvPr id="31" name="Text 29"/>
+          <p:cNvSpPr/>
+          <p:nvPr/>
+        </p:nvSpPr>
+        <p:spPr>
+          <a:xfrm>
+            <a:off x="2295144" y="2670048"/>
+            <a:ext cx="256032" cy="182880"/>
+          </a:xfrm>
+          <a:prstGeom prst="rect">
+            <a:avLst/>
+          </a:prstGeom>
+          <a:noFill/>
+          <a:ln/>
+        </p:spPr>
+        <p:txBody>
+          <a:bodyPr wrap="square" lIns="0" tIns="0" rIns="0" bIns="0" rtlCol="0" anchor="ctr"/>
+          <a:lstStyle/>
+          <a:p>
+            <a:pPr marL="0" indent="0">
+              <a:buNone/>
+            </a:pPr>
+            <a:r>
+              <a:rPr lang="en-US" sz="800" dirty="0">
+                <a:solidFill>
+                  <a:srgbClr val="7A93AE"/>
+                </a:solidFill>
+                <a:latin typeface="Microsoft JhengHei" pitchFamily="34" charset="0"/>
+                <a:ea typeface="Microsoft JhengHei" pitchFamily="34" charset="-122"/>
+                <a:cs typeface="Microsoft JhengHei" pitchFamily="34" charset="-120"/>
+              </a:rPr>
+              <a:t>14</a:t>
+            </a:r>
+            <a:endParaRPr lang="en-US" sz="800" dirty="0"/>
+          </a:p>
+        </p:txBody>
+      </p:sp>
+      <p:sp>
+        <p:nvSpPr>
+          <p:cNvPr id="32" name="Shape 30"/>
+          <p:cNvSpPr/>
+          <p:nvPr/>
+        </p:nvSpPr>
+        <p:spPr>
+          <a:xfrm>
+            <a:off x="2807208" y="2660904"/>
+            <a:ext cx="530352" cy="530352"/>
           </a:xfrm>
           <a:prstGeom prst="rect">
             <a:avLst/>
@@ -10460,7 +10992,7 @@
           <a:solidFill>
             <a:srgbClr val="F2E3C8"/>
           </a:solidFill>
-          <a:ln w="9525">
+          <a:ln w="15875">
             <a:solidFill>
               <a:srgbClr val="1E3A5C"/>
             </a:solidFill>
@@ -10470,14 +11002,53 @@
       </p:sp>
       <p:sp>
         <p:nvSpPr>
-          <p:cNvPr id="20" name="Shape 17"/>
-          <p:cNvSpPr/>
-          <p:nvPr/>
-        </p:nvSpPr>
-        <p:spPr>
-          <a:xfrm>
-            <a:off x="822960" y="3255264"/>
-            <a:ext cx="566928" cy="566928"/>
+          <p:cNvPr id="33" name="Text 31"/>
+          <p:cNvSpPr/>
+          <p:nvPr/>
+        </p:nvSpPr>
+        <p:spPr>
+          <a:xfrm>
+            <a:off x="2825496" y="2670048"/>
+            <a:ext cx="256032" cy="182880"/>
+          </a:xfrm>
+          <a:prstGeom prst="rect">
+            <a:avLst/>
+          </a:prstGeom>
+          <a:noFill/>
+          <a:ln/>
+        </p:spPr>
+        <p:txBody>
+          <a:bodyPr wrap="square" lIns="0" tIns="0" rIns="0" bIns="0" rtlCol="0" anchor="ctr"/>
+          <a:lstStyle/>
+          <a:p>
+            <a:pPr marL="0" indent="0">
+              <a:buNone/>
+            </a:pPr>
+            <a:r>
+              <a:rPr lang="en-US" sz="800" dirty="0">
+                <a:solidFill>
+                  <a:srgbClr val="8A7A55"/>
+                </a:solidFill>
+                <a:latin typeface="Microsoft JhengHei" pitchFamily="34" charset="0"/>
+                <a:ea typeface="Microsoft JhengHei" pitchFamily="34" charset="-122"/>
+                <a:cs typeface="Microsoft JhengHei" pitchFamily="34" charset="-120"/>
+              </a:rPr>
+              <a:t>15</a:t>
+            </a:r>
+            <a:endParaRPr lang="en-US" sz="800" dirty="0"/>
+          </a:p>
+        </p:txBody>
+      </p:sp>
+      <p:sp>
+        <p:nvSpPr>
+          <p:cNvPr id="34" name="Shape 32"/>
+          <p:cNvSpPr/>
+          <p:nvPr/>
+        </p:nvSpPr>
+        <p:spPr>
+          <a:xfrm>
+            <a:off x="685800" y="3191256"/>
+            <a:ext cx="530352" cy="530352"/>
           </a:xfrm>
           <a:prstGeom prst="rect">
             <a:avLst/>
@@ -10485,7 +11056,7 @@
           <a:solidFill>
             <a:srgbClr val="F2E3C8"/>
           </a:solidFill>
-          <a:ln w="9525">
+          <a:ln w="15875">
             <a:solidFill>
               <a:srgbClr val="1E3A5C"/>
             </a:solidFill>
@@ -10495,22 +11066,61 @@
       </p:sp>
       <p:sp>
         <p:nvSpPr>
-          <p:cNvPr id="21" name="Shape 18"/>
-          <p:cNvSpPr/>
-          <p:nvPr/>
-        </p:nvSpPr>
-        <p:spPr>
-          <a:xfrm>
-            <a:off x="1389888" y="3255264"/>
-            <a:ext cx="566928" cy="566928"/>
+          <p:cNvPr id="35" name="Text 33"/>
+          <p:cNvSpPr/>
+          <p:nvPr/>
+        </p:nvSpPr>
+        <p:spPr>
+          <a:xfrm>
+            <a:off x="704088" y="3200400"/>
+            <a:ext cx="256032" cy="182880"/>
+          </a:xfrm>
+          <a:prstGeom prst="rect">
+            <a:avLst/>
+          </a:prstGeom>
+          <a:noFill/>
+          <a:ln/>
+        </p:spPr>
+        <p:txBody>
+          <a:bodyPr wrap="square" lIns="0" tIns="0" rIns="0" bIns="0" rtlCol="0" anchor="ctr"/>
+          <a:lstStyle/>
+          <a:p>
+            <a:pPr marL="0" indent="0">
+              <a:buNone/>
+            </a:pPr>
+            <a:r>
+              <a:rPr lang="en-US" sz="800" dirty="0">
+                <a:solidFill>
+                  <a:srgbClr val="8A7A55"/>
+                </a:solidFill>
+                <a:latin typeface="Microsoft JhengHei" pitchFamily="34" charset="0"/>
+                <a:ea typeface="Microsoft JhengHei" pitchFamily="34" charset="-122"/>
+                <a:cs typeface="Microsoft JhengHei" pitchFamily="34" charset="-120"/>
+              </a:rPr>
+              <a:t>16</a:t>
+            </a:r>
+            <a:endParaRPr lang="en-US" sz="800" dirty="0"/>
+          </a:p>
+        </p:txBody>
+      </p:sp>
+      <p:sp>
+        <p:nvSpPr>
+          <p:cNvPr id="36" name="Shape 34"/>
+          <p:cNvSpPr/>
+          <p:nvPr/>
+        </p:nvSpPr>
+        <p:spPr>
+          <a:xfrm>
+            <a:off x="1216152" y="3191256"/>
+            <a:ext cx="530352" cy="530352"/>
           </a:xfrm>
           <a:prstGeom prst="rect">
             <a:avLst/>
           </a:prstGeom>
           <a:solidFill>
-            <a:srgbClr val="F2E3C8"/>
+            <a:srgbClr val="0D1424"/>
           </a:solidFill>
-          <a:ln w="9525">
+          <a:ln w="15875">
             <a:solidFill>
               <a:srgbClr val="1E3A5C"/>
             </a:solidFill>
@@ -10520,14 +11130,53 @@
       </p:sp>
       <p:sp>
         <p:nvSpPr>
-          <p:cNvPr id="22" name="Shape 19"/>
-          <p:cNvSpPr/>
-          <p:nvPr/>
-        </p:nvSpPr>
-        <p:spPr>
-          <a:xfrm>
-            <a:off x="1956816" y="3255264"/>
-            <a:ext cx="566928" cy="566928"/>
+          <p:cNvPr id="37" name="Text 35"/>
+          <p:cNvSpPr/>
+          <p:nvPr/>
+        </p:nvSpPr>
+        <p:spPr>
+          <a:xfrm>
+            <a:off x="1234440" y="3200400"/>
+            <a:ext cx="256032" cy="182880"/>
+          </a:xfrm>
+          <a:prstGeom prst="rect">
+            <a:avLst/>
+          </a:prstGeom>
+          <a:noFill/>
+          <a:ln/>
+        </p:spPr>
+        <p:txBody>
+          <a:bodyPr wrap="square" lIns="0" tIns="0" rIns="0" bIns="0" rtlCol="0" anchor="ctr"/>
+          <a:lstStyle/>
+          <a:p>
+            <a:pPr marL="0" indent="0">
+              <a:buNone/>
+            </a:pPr>
+            <a:r>
+              <a:rPr lang="en-US" sz="800" dirty="0">
+                <a:solidFill>
+                  <a:srgbClr val="7A93AE"/>
+                </a:solidFill>
+                <a:latin typeface="Microsoft JhengHei" pitchFamily="34" charset="0"/>
+                <a:ea typeface="Microsoft JhengHei" pitchFamily="34" charset="-122"/>
+                <a:cs typeface="Microsoft JhengHei" pitchFamily="34" charset="-120"/>
+              </a:rPr>
+              <a:t>17</a:t>
+            </a:r>
+            <a:endParaRPr lang="en-US" sz="800" dirty="0"/>
+          </a:p>
+        </p:txBody>
+      </p:sp>
+      <p:sp>
+        <p:nvSpPr>
+          <p:cNvPr id="38" name="Shape 36"/>
+          <p:cNvSpPr/>
+          <p:nvPr/>
+        </p:nvSpPr>
+        <p:spPr>
+          <a:xfrm>
+            <a:off x="1746504" y="3191256"/>
+            <a:ext cx="530352" cy="530352"/>
           </a:xfrm>
           <a:prstGeom prst="rect">
             <a:avLst/>
@@ -10535,7 +11184,7 @@
           <a:solidFill>
             <a:srgbClr val="0D1424"/>
           </a:solidFill>
-          <a:ln w="9525">
+          <a:ln w="15875">
             <a:solidFill>
               <a:srgbClr val="1E3A5C"/>
             </a:solidFill>
@@ -10545,22 +11194,61 @@
       </p:sp>
       <p:sp>
         <p:nvSpPr>
-          <p:cNvPr id="23" name="Shape 20"/>
-          <p:cNvSpPr/>
-          <p:nvPr/>
-        </p:nvSpPr>
-        <p:spPr>
-          <a:xfrm>
-            <a:off x="2523744" y="3255264"/>
-            <a:ext cx="566928" cy="566928"/>
+          <p:cNvPr id="39" name="Text 37"/>
+          <p:cNvSpPr/>
+          <p:nvPr/>
+        </p:nvSpPr>
+        <p:spPr>
+          <a:xfrm>
+            <a:off x="1764792" y="3200400"/>
+            <a:ext cx="256032" cy="182880"/>
+          </a:xfrm>
+          <a:prstGeom prst="rect">
+            <a:avLst/>
+          </a:prstGeom>
+          <a:noFill/>
+          <a:ln/>
+        </p:spPr>
+        <p:txBody>
+          <a:bodyPr wrap="square" lIns="0" tIns="0" rIns="0" bIns="0" rtlCol="0" anchor="ctr"/>
+          <a:lstStyle/>
+          <a:p>
+            <a:pPr marL="0" indent="0">
+              <a:buNone/>
+            </a:pPr>
+            <a:r>
+              <a:rPr lang="en-US" sz="800" dirty="0">
+                <a:solidFill>
+                  <a:srgbClr val="7A93AE"/>
+                </a:solidFill>
+                <a:latin typeface="Microsoft JhengHei" pitchFamily="34" charset="0"/>
+                <a:ea typeface="Microsoft JhengHei" pitchFamily="34" charset="-122"/>
+                <a:cs typeface="Microsoft JhengHei" pitchFamily="34" charset="-120"/>
+              </a:rPr>
+              <a:t>18</a:t>
+            </a:r>
+            <a:endParaRPr lang="en-US" sz="800" dirty="0"/>
+          </a:p>
+        </p:txBody>
+      </p:sp>
+      <p:sp>
+        <p:nvSpPr>
+          <p:cNvPr id="40" name="Shape 38"/>
+          <p:cNvSpPr/>
+          <p:nvPr/>
+        </p:nvSpPr>
+        <p:spPr>
+          <a:xfrm>
+            <a:off x="2276856" y="3191256"/>
+            <a:ext cx="530352" cy="530352"/>
           </a:xfrm>
           <a:prstGeom prst="rect">
             <a:avLst/>
           </a:prstGeom>
           <a:solidFill>
-            <a:srgbClr val="F2E3C8"/>
+            <a:srgbClr val="0D1424"/>
           </a:solidFill>
-          <a:ln w="9525">
+          <a:ln w="15875">
             <a:solidFill>
               <a:srgbClr val="1E3A5C"/>
             </a:solidFill>
@@ -10570,14 +11258,53 @@
       </p:sp>
       <p:sp>
         <p:nvSpPr>
-          <p:cNvPr id="24" name="Shape 21"/>
-          <p:cNvSpPr/>
-          <p:nvPr/>
-        </p:nvSpPr>
-        <p:spPr>
-          <a:xfrm>
-            <a:off x="3090672" y="3255264"/>
-            <a:ext cx="566928" cy="566928"/>
+          <p:cNvPr id="41" name="Text 39"/>
+          <p:cNvSpPr/>
+          <p:nvPr/>
+        </p:nvSpPr>
+        <p:spPr>
+          <a:xfrm>
+            <a:off x="2295144" y="3200400"/>
+            <a:ext cx="256032" cy="182880"/>
+          </a:xfrm>
+          <a:prstGeom prst="rect">
+            <a:avLst/>
+          </a:prstGeom>
+          <a:noFill/>
+          <a:ln/>
+        </p:spPr>
+        <p:txBody>
+          <a:bodyPr wrap="square" lIns="0" tIns="0" rIns="0" bIns="0" rtlCol="0" anchor="ctr"/>
+          <a:lstStyle/>
+          <a:p>
+            <a:pPr marL="0" indent="0">
+              <a:buNone/>
+            </a:pPr>
+            <a:r>
+              <a:rPr lang="en-US" sz="800" dirty="0">
+                <a:solidFill>
+                  <a:srgbClr val="7A93AE"/>
+                </a:solidFill>
+                <a:latin typeface="Microsoft JhengHei" pitchFamily="34" charset="0"/>
+                <a:ea typeface="Microsoft JhengHei" pitchFamily="34" charset="-122"/>
+                <a:cs typeface="Microsoft JhengHei" pitchFamily="34" charset="-120"/>
+              </a:rPr>
+              <a:t>19</a:t>
+            </a:r>
+            <a:endParaRPr lang="en-US" sz="800" dirty="0"/>
+          </a:p>
+        </p:txBody>
+      </p:sp>
+      <p:sp>
+        <p:nvSpPr>
+          <p:cNvPr id="42" name="Shape 40"/>
+          <p:cNvSpPr/>
+          <p:nvPr/>
+        </p:nvSpPr>
+        <p:spPr>
+          <a:xfrm>
+            <a:off x="2807208" y="3191256"/>
+            <a:ext cx="530352" cy="530352"/>
           </a:xfrm>
           <a:prstGeom prst="rect">
             <a:avLst/>
@@ -10585,7 +11312,7 @@
           <a:solidFill>
             <a:srgbClr val="F2E3C8"/>
           </a:solidFill>
-          <a:ln w="9525">
+          <a:ln w="15875">
             <a:solidFill>
               <a:srgbClr val="1E3A5C"/>
             </a:solidFill>
@@ -10595,14 +11322,53 @@
       </p:sp>
       <p:sp>
         <p:nvSpPr>
-          <p:cNvPr id="25" name="Shape 22"/>
-          <p:cNvSpPr/>
-          <p:nvPr/>
-        </p:nvSpPr>
-        <p:spPr>
-          <a:xfrm>
-            <a:off x="822960" y="3822192"/>
-            <a:ext cx="566928" cy="566928"/>
+          <p:cNvPr id="43" name="Text 41"/>
+          <p:cNvSpPr/>
+          <p:nvPr/>
+        </p:nvSpPr>
+        <p:spPr>
+          <a:xfrm>
+            <a:off x="2825496" y="3200400"/>
+            <a:ext cx="256032" cy="182880"/>
+          </a:xfrm>
+          <a:prstGeom prst="rect">
+            <a:avLst/>
+          </a:prstGeom>
+          <a:noFill/>
+          <a:ln/>
+        </p:spPr>
+        <p:txBody>
+          <a:bodyPr wrap="square" lIns="0" tIns="0" rIns="0" bIns="0" rtlCol="0" anchor="ctr"/>
+          <a:lstStyle/>
+          <a:p>
+            <a:pPr marL="0" indent="0">
+              <a:buNone/>
+            </a:pPr>
+            <a:r>
+              <a:rPr lang="en-US" sz="800" dirty="0">
+                <a:solidFill>
+                  <a:srgbClr val="8A7A55"/>
+                </a:solidFill>
+                <a:latin typeface="Microsoft JhengHei" pitchFamily="34" charset="0"/>
+                <a:ea typeface="Microsoft JhengHei" pitchFamily="34" charset="-122"/>
+                <a:cs typeface="Microsoft JhengHei" pitchFamily="34" charset="-120"/>
+              </a:rPr>
+              <a:t>20</a:t>
+            </a:r>
+            <a:endParaRPr lang="en-US" sz="800" dirty="0"/>
+          </a:p>
+        </p:txBody>
+      </p:sp>
+      <p:sp>
+        <p:nvSpPr>
+          <p:cNvPr id="44" name="Shape 42"/>
+          <p:cNvSpPr/>
+          <p:nvPr/>
+        </p:nvSpPr>
+        <p:spPr>
+          <a:xfrm>
+            <a:off x="685800" y="3721608"/>
+            <a:ext cx="530352" cy="530352"/>
           </a:xfrm>
           <a:prstGeom prst="rect">
             <a:avLst/>
@@ -10610,7 +11376,7 @@
           <a:solidFill>
             <a:srgbClr val="0D1424"/>
           </a:solidFill>
-          <a:ln w="9525">
+          <a:ln w="15875">
             <a:solidFill>
               <a:srgbClr val="1E3A5C"/>
             </a:solidFill>
@@ -10620,14 +11386,53 @@
       </p:sp>
       <p:sp>
         <p:nvSpPr>
-          <p:cNvPr id="26" name="Shape 23"/>
-          <p:cNvSpPr/>
-          <p:nvPr/>
-        </p:nvSpPr>
-        <p:spPr>
-          <a:xfrm>
-            <a:off x="1389888" y="3822192"/>
-            <a:ext cx="566928" cy="566928"/>
+          <p:cNvPr id="45" name="Text 43"/>
+          <p:cNvSpPr/>
+          <p:nvPr/>
+        </p:nvSpPr>
+        <p:spPr>
+          <a:xfrm>
+            <a:off x="704088" y="3730752"/>
+            <a:ext cx="256032" cy="182880"/>
+          </a:xfrm>
+          <a:prstGeom prst="rect">
+            <a:avLst/>
+          </a:prstGeom>
+          <a:noFill/>
+          <a:ln/>
+        </p:spPr>
+        <p:txBody>
+          <a:bodyPr wrap="square" lIns="0" tIns="0" rIns="0" bIns="0" rtlCol="0" anchor="ctr"/>
+          <a:lstStyle/>
+          <a:p>
+            <a:pPr marL="0" indent="0">
+              <a:buNone/>
+            </a:pPr>
+            <a:r>
+              <a:rPr lang="en-US" sz="800" dirty="0">
+                <a:solidFill>
+                  <a:srgbClr val="7A93AE"/>
+                </a:solidFill>
+                <a:latin typeface="Microsoft JhengHei" pitchFamily="34" charset="0"/>
+                <a:ea typeface="Microsoft JhengHei" pitchFamily="34" charset="-122"/>
+                <a:cs typeface="Microsoft JhengHei" pitchFamily="34" charset="-120"/>
+              </a:rPr>
+              <a:t>21</a:t>
+            </a:r>
+            <a:endParaRPr lang="en-US" sz="800" dirty="0"/>
+          </a:p>
+        </p:txBody>
+      </p:sp>
+      <p:sp>
+        <p:nvSpPr>
+          <p:cNvPr id="46" name="Shape 44"/>
+          <p:cNvSpPr/>
+          <p:nvPr/>
+        </p:nvSpPr>
+        <p:spPr>
+          <a:xfrm>
+            <a:off x="1216152" y="3721608"/>
+            <a:ext cx="530352" cy="530352"/>
           </a:xfrm>
           <a:prstGeom prst="rect">
             <a:avLst/>
@@ -10635,7 +11440,7 @@
           <a:solidFill>
             <a:srgbClr val="F2E3C8"/>
           </a:solidFill>
-          <a:ln w="9525">
+          <a:ln w="15875">
             <a:solidFill>
               <a:srgbClr val="1E3A5C"/>
             </a:solidFill>
@@ -10645,14 +11450,53 @@
       </p:sp>
       <p:sp>
         <p:nvSpPr>
-          <p:cNvPr id="27" name="Shape 24"/>
-          <p:cNvSpPr/>
-          <p:nvPr/>
-        </p:nvSpPr>
-        <p:spPr>
-          <a:xfrm>
-            <a:off x="1956816" y="3822192"/>
-            <a:ext cx="566928" cy="566928"/>
+          <p:cNvPr id="47" name="Text 45"/>
+          <p:cNvSpPr/>
+          <p:nvPr/>
+        </p:nvSpPr>
+        <p:spPr>
+          <a:xfrm>
+            <a:off x="1234440" y="3730752"/>
+            <a:ext cx="256032" cy="182880"/>
+          </a:xfrm>
+          <a:prstGeom prst="rect">
+            <a:avLst/>
+          </a:prstGeom>
+          <a:noFill/>
+          <a:ln/>
+        </p:spPr>
+        <p:txBody>
+          <a:bodyPr wrap="square" lIns="0" tIns="0" rIns="0" bIns="0" rtlCol="0" anchor="ctr"/>
+          <a:lstStyle/>
+          <a:p>
+            <a:pPr marL="0" indent="0">
+              <a:buNone/>
+            </a:pPr>
+            <a:r>
+              <a:rPr lang="en-US" sz="800" dirty="0">
+                <a:solidFill>
+                  <a:srgbClr val="8A7A55"/>
+                </a:solidFill>
+                <a:latin typeface="Microsoft JhengHei" pitchFamily="34" charset="0"/>
+                <a:ea typeface="Microsoft JhengHei" pitchFamily="34" charset="-122"/>
+                <a:cs typeface="Microsoft JhengHei" pitchFamily="34" charset="-120"/>
+              </a:rPr>
+              <a:t>22</a:t>
+            </a:r>
+            <a:endParaRPr lang="en-US" sz="800" dirty="0"/>
+          </a:p>
+        </p:txBody>
+      </p:sp>
+      <p:sp>
+        <p:nvSpPr>
+          <p:cNvPr id="48" name="Shape 46"/>
+          <p:cNvSpPr/>
+          <p:nvPr/>
+        </p:nvSpPr>
+        <p:spPr>
+          <a:xfrm>
+            <a:off x="1746504" y="3721608"/>
+            <a:ext cx="530352" cy="530352"/>
           </a:xfrm>
           <a:prstGeom prst="rect">
             <a:avLst/>
@@ -10660,7 +11504,7 @@
           <a:solidFill>
             <a:srgbClr val="F2E3C8"/>
           </a:solidFill>
-          <a:ln w="9525">
+          <a:ln w="15875">
             <a:solidFill>
               <a:srgbClr val="1E3A5C"/>
             </a:solidFill>
@@ -10670,14 +11514,53 @@
       </p:sp>
       <p:sp>
         <p:nvSpPr>
-          <p:cNvPr id="28" name="Shape 25"/>
-          <p:cNvSpPr/>
-          <p:nvPr/>
-        </p:nvSpPr>
-        <p:spPr>
-          <a:xfrm>
-            <a:off x="2523744" y="3822192"/>
-            <a:ext cx="566928" cy="566928"/>
+          <p:cNvPr id="49" name="Text 47"/>
+          <p:cNvSpPr/>
+          <p:nvPr/>
+        </p:nvSpPr>
+        <p:spPr>
+          <a:xfrm>
+            <a:off x="1764792" y="3730752"/>
+            <a:ext cx="256032" cy="182880"/>
+          </a:xfrm>
+          <a:prstGeom prst="rect">
+            <a:avLst/>
+          </a:prstGeom>
+          <a:noFill/>
+          <a:ln/>
+        </p:spPr>
+        <p:txBody>
+          <a:bodyPr wrap="square" lIns="0" tIns="0" rIns="0" bIns="0" rtlCol="0" anchor="ctr"/>
+          <a:lstStyle/>
+          <a:p>
+            <a:pPr marL="0" indent="0">
+              <a:buNone/>
+            </a:pPr>
+            <a:r>
+              <a:rPr lang="en-US" sz="800" dirty="0">
+                <a:solidFill>
+                  <a:srgbClr val="8A7A55"/>
+                </a:solidFill>
+                <a:latin typeface="Microsoft JhengHei" pitchFamily="34" charset="0"/>
+                <a:ea typeface="Microsoft JhengHei" pitchFamily="34" charset="-122"/>
+                <a:cs typeface="Microsoft JhengHei" pitchFamily="34" charset="-120"/>
+              </a:rPr>
+              <a:t>23</a:t>
+            </a:r>
+            <a:endParaRPr lang="en-US" sz="800" dirty="0"/>
+          </a:p>
+        </p:txBody>
+      </p:sp>
+      <p:sp>
+        <p:nvSpPr>
+          <p:cNvPr id="50" name="Shape 48"/>
+          <p:cNvSpPr/>
+          <p:nvPr/>
+        </p:nvSpPr>
+        <p:spPr>
+          <a:xfrm>
+            <a:off x="2276856" y="3721608"/>
+            <a:ext cx="530352" cy="530352"/>
           </a:xfrm>
           <a:prstGeom prst="rect">
             <a:avLst/>
@@ -10685,7 +11568,7 @@
           <a:solidFill>
             <a:srgbClr val="F2E3C8"/>
           </a:solidFill>
-          <a:ln w="9525">
+          <a:ln w="15875">
             <a:solidFill>
               <a:srgbClr val="1E3A5C"/>
             </a:solidFill>
@@ -10695,14 +11578,53 @@
       </p:sp>
       <p:sp>
         <p:nvSpPr>
-          <p:cNvPr id="29" name="Shape 26"/>
-          <p:cNvSpPr/>
-          <p:nvPr/>
-        </p:nvSpPr>
-        <p:spPr>
-          <a:xfrm>
-            <a:off x="3090672" y="3822192"/>
-            <a:ext cx="566928" cy="566928"/>
+          <p:cNvPr id="51" name="Text 49"/>
+          <p:cNvSpPr/>
+          <p:nvPr/>
+        </p:nvSpPr>
+        <p:spPr>
+          <a:xfrm>
+            <a:off x="2295144" y="3730752"/>
+            <a:ext cx="256032" cy="182880"/>
+          </a:xfrm>
+          <a:prstGeom prst="rect">
+            <a:avLst/>
+          </a:prstGeom>
+          <a:noFill/>
+          <a:ln/>
+        </p:spPr>
+        <p:txBody>
+          <a:bodyPr wrap="square" lIns="0" tIns="0" rIns="0" bIns="0" rtlCol="0" anchor="ctr"/>
+          <a:lstStyle/>
+          <a:p>
+            <a:pPr marL="0" indent="0">
+              <a:buNone/>
+            </a:pPr>
+            <a:r>
+              <a:rPr lang="en-US" sz="800" dirty="0">
+                <a:solidFill>
+                  <a:srgbClr val="8A7A55"/>
+                </a:solidFill>
+                <a:latin typeface="Microsoft JhengHei" pitchFamily="34" charset="0"/>
+                <a:ea typeface="Microsoft JhengHei" pitchFamily="34" charset="-122"/>
+                <a:cs typeface="Microsoft JhengHei" pitchFamily="34" charset="-120"/>
+              </a:rPr>
+              <a:t>24</a:t>
+            </a:r>
+            <a:endParaRPr lang="en-US" sz="800" dirty="0"/>
+          </a:p>
+        </p:txBody>
+      </p:sp>
+      <p:sp>
+        <p:nvSpPr>
+          <p:cNvPr id="52" name="Shape 50"/>
+          <p:cNvSpPr/>
+          <p:nvPr/>
+        </p:nvSpPr>
+        <p:spPr>
+          <a:xfrm>
+            <a:off x="2807208" y="3721608"/>
+            <a:ext cx="530352" cy="530352"/>
           </a:xfrm>
           <a:prstGeom prst="rect">
             <a:avLst/>
@@ -10710,7 +11632,7 @@
           <a:solidFill>
             <a:srgbClr val="0D1424"/>
           </a:solidFill>
-          <a:ln w="9525">
+          <a:ln w="15875">
             <a:solidFill>
               <a:srgbClr val="1E3A5C"/>
             </a:solidFill>
@@ -10720,14 +11642,14 @@
       </p:sp>
       <p:sp>
         <p:nvSpPr>
-          <p:cNvPr id="30" name="Text 27"/>
-          <p:cNvSpPr/>
-          <p:nvPr/>
-        </p:nvSpPr>
-        <p:spPr>
-          <a:xfrm>
-            <a:off x="640080" y="4572000"/>
-            <a:ext cx="3291840" cy="365760"/>
+          <p:cNvPr id="53" name="Text 51"/>
+          <p:cNvSpPr/>
+          <p:nvPr/>
+        </p:nvSpPr>
+        <p:spPr>
+          <a:xfrm>
+            <a:off x="2825496" y="3730752"/>
+            <a:ext cx="256032" cy="182880"/>
           </a:xfrm>
           <a:prstGeom prst="rect">
             <a:avLst/>
@@ -10739,11 +11661,11 @@
           <a:bodyPr wrap="square" lIns="0" tIns="0" rIns="0" bIns="0" rtlCol="0" anchor="ctr"/>
           <a:lstStyle/>
           <a:p>
-            <a:pPr marL="0" indent="0" algn="ctr">
-              <a:buNone/>
-            </a:pPr>
-            <a:r>
-              <a:rPr lang="en-US" sz="1300" dirty="0">
+            <a:pPr marL="0" indent="0">
+              <a:buNone/>
+            </a:pPr>
+            <a:r>
+              <a:rPr lang="en-US" sz="800" dirty="0">
                 <a:solidFill>
                   <a:srgbClr val="7A93AE"/>
                 </a:solidFill>
@@ -10751,22 +11673,51 @@
                 <a:ea typeface="Microsoft JhengHei" pitchFamily="34" charset="-122"/>
                 <a:cs typeface="Microsoft JhengHei" pitchFamily="34" charset="-120"/>
               </a:rPr>
-              <a:t>上一節的紀錄卡</a:t>
-            </a:r>
-            <a:endParaRPr lang="en-US" sz="1300" dirty="0"/>
-          </a:p>
-        </p:txBody>
-      </p:sp>
-      <p:sp>
-        <p:nvSpPr>
-          <p:cNvPr id="31" name="Text 28"/>
-          <p:cNvSpPr/>
-          <p:nvPr/>
-        </p:nvSpPr>
-        <p:spPr>
-          <a:xfrm>
-            <a:off x="3977640" y="2743200"/>
-            <a:ext cx="731520" cy="731520"/>
+              <a:t>25</a:t>
+            </a:r>
+            <a:endParaRPr lang="en-US" sz="800" dirty="0"/>
+          </a:p>
+        </p:txBody>
+      </p:sp>
+      <p:sp>
+        <p:nvSpPr>
+          <p:cNvPr id="54" name="Shape 52"/>
+          <p:cNvSpPr/>
+          <p:nvPr/>
+        </p:nvSpPr>
+        <p:spPr>
+          <a:xfrm>
+            <a:off x="644652" y="1559052"/>
+            <a:ext cx="2734056" cy="612648"/>
+          </a:xfrm>
+          <a:prstGeom prst="roundRect">
+            <a:avLst>
+              <a:gd name="adj" fmla="val 7463"/>
+            </a:avLst>
+          </a:prstGeom>
+          <a:solidFill>
+            <a:srgbClr val="070B14">
+              <a:alpha val="0"/>
+            </a:srgbClr>
+          </a:solidFill>
+          <a:ln w="25400">
+            <a:solidFill>
+              <a:srgbClr val="FFB347"/>
+            </a:solidFill>
+            <a:prstDash val="solid"/>
+          </a:ln>
+        </p:spPr>
+      </p:sp>
+      <p:sp>
+        <p:nvSpPr>
+          <p:cNvPr id="55" name="Text 53"/>
+          <p:cNvSpPr/>
+          <p:nvPr/>
+        </p:nvSpPr>
+        <p:spPr>
+          <a:xfrm>
+            <a:off x="3429000" y="1719072"/>
+            <a:ext cx="685800" cy="274320"/>
           </a:xfrm>
           <a:prstGeom prst="rect">
             <a:avLst/>
@@ -10778,39 +11729,81 @@
           <a:bodyPr wrap="square" lIns="0" tIns="0" rIns="0" bIns="0" rtlCol="0" anchor="ctr"/>
           <a:lstStyle/>
           <a:p>
+            <a:pPr marL="0" indent="0">
+              <a:buNone/>
+            </a:pPr>
+            <a:r>
+              <a:rPr lang="en-US" sz="1100" b="1" dirty="0">
+                <a:solidFill>
+                  <a:srgbClr val="FFB347"/>
+                </a:solidFill>
+                <a:latin typeface="Microsoft JhengHei" pitchFamily="34" charset="0"/>
+                <a:ea typeface="Microsoft JhengHei" pitchFamily="34" charset="-122"/>
+                <a:cs typeface="Microsoft JhengHei" pitchFamily="34" charset="-120"/>
+              </a:rPr>
+              <a:t>第 1 列</a:t>
+            </a:r>
+            <a:endParaRPr lang="en-US" sz="1100" dirty="0"/>
+          </a:p>
+        </p:txBody>
+      </p:sp>
+      <p:sp>
+        <p:nvSpPr>
+          <p:cNvPr id="56" name="Text 54"/>
+          <p:cNvSpPr/>
+          <p:nvPr/>
+        </p:nvSpPr>
+        <p:spPr>
+          <a:xfrm>
+            <a:off x="685800" y="4361688"/>
+            <a:ext cx="2651760" cy="274320"/>
+          </a:xfrm>
+          <a:prstGeom prst="rect">
+            <a:avLst/>
+          </a:prstGeom>
+          <a:noFill/>
+          <a:ln/>
+        </p:spPr>
+        <p:txBody>
+          <a:bodyPr wrap="square" lIns="0" tIns="0" rIns="0" bIns="0" rtlCol="0" anchor="ctr"/>
+          <a:lstStyle/>
+          <a:p>
             <a:pPr marL="0" indent="0" algn="ctr">
               <a:buNone/>
             </a:pPr>
             <a:r>
-              <a:rPr lang="en-US" sz="3200" dirty="0">
-                <a:solidFill>
-                  <a:srgbClr val="FFB347"/>
-                </a:solidFill>
-              </a:rPr>
-              <a:t>→</a:t>
-            </a:r>
-            <a:endParaRPr lang="en-US" sz="3200" dirty="0"/>
-          </a:p>
-        </p:txBody>
-      </p:sp>
-      <p:sp>
-        <p:nvSpPr>
-          <p:cNvPr id="32" name="Shape 29"/>
-          <p:cNvSpPr/>
-          <p:nvPr/>
-        </p:nvSpPr>
-        <p:spPr>
-          <a:xfrm>
-            <a:off x="4846320" y="2834640"/>
-            <a:ext cx="457200" cy="457200"/>
+              <a:rPr lang="en-US" sz="1200" dirty="0">
+                <a:solidFill>
+                  <a:srgbClr val="7A93AE"/>
+                </a:solidFill>
+                <a:latin typeface="Microsoft JhengHei" pitchFamily="34" charset="0"/>
+                <a:ea typeface="Microsoft JhengHei" pitchFamily="34" charset="-122"/>
+                <a:cs typeface="Microsoft JhengHei" pitchFamily="34" charset="-120"/>
+              </a:rPr>
+              <a:t>上一節的紀錄卡（5 × 5 ＝ 25 格）</a:t>
+            </a:r>
+            <a:endParaRPr lang="en-US" sz="1200" dirty="0"/>
+          </a:p>
+        </p:txBody>
+      </p:sp>
+      <p:sp>
+        <p:nvSpPr>
+          <p:cNvPr id="57" name="Shape 55"/>
+          <p:cNvSpPr/>
+          <p:nvPr/>
+        </p:nvSpPr>
+        <p:spPr>
+          <a:xfrm>
+            <a:off x="978408" y="4709160"/>
+            <a:ext cx="201168" cy="201168"/>
           </a:xfrm>
           <a:prstGeom prst="rect">
             <a:avLst/>
           </a:prstGeom>
           <a:solidFill>
-            <a:srgbClr val="0D1424"/>
+            <a:srgbClr val="F2E3C8"/>
           </a:solidFill>
-          <a:ln w="9525">
+          <a:ln w="12700">
             <a:solidFill>
               <a:srgbClr val="1E3A5C"/>
             </a:solidFill>
@@ -10820,164 +11813,14 @@
       </p:sp>
       <p:sp>
         <p:nvSpPr>
-          <p:cNvPr id="33" name="Shape 30"/>
-          <p:cNvSpPr/>
-          <p:nvPr/>
-        </p:nvSpPr>
-        <p:spPr>
-          <a:xfrm>
-            <a:off x="5330952" y="2834640"/>
-            <a:ext cx="457200" cy="457200"/>
-          </a:xfrm>
-          <a:prstGeom prst="rect">
-            <a:avLst/>
-          </a:prstGeom>
-          <a:solidFill>
-            <a:srgbClr val="FFB347"/>
-          </a:solidFill>
-          <a:ln w="9525">
-            <a:solidFill>
-              <a:srgbClr val="1E3A5C"/>
-            </a:solidFill>
-            <a:prstDash val="solid"/>
-          </a:ln>
-        </p:spPr>
-      </p:sp>
-      <p:sp>
-        <p:nvSpPr>
-          <p:cNvPr id="34" name="Shape 31"/>
-          <p:cNvSpPr/>
-          <p:nvPr/>
-        </p:nvSpPr>
-        <p:spPr>
-          <a:xfrm>
-            <a:off x="5815584" y="2834640"/>
-            <a:ext cx="457200" cy="457200"/>
-          </a:xfrm>
-          <a:prstGeom prst="rect">
-            <a:avLst/>
-          </a:prstGeom>
-          <a:solidFill>
-            <a:srgbClr val="FFB347"/>
-          </a:solidFill>
-          <a:ln w="9525">
-            <a:solidFill>
-              <a:srgbClr val="1E3A5C"/>
-            </a:solidFill>
-            <a:prstDash val="solid"/>
-          </a:ln>
-        </p:spPr>
-      </p:sp>
-      <p:sp>
-        <p:nvSpPr>
-          <p:cNvPr id="35" name="Shape 32"/>
-          <p:cNvSpPr/>
-          <p:nvPr/>
-        </p:nvSpPr>
-        <p:spPr>
-          <a:xfrm>
-            <a:off x="6300216" y="2834640"/>
-            <a:ext cx="457200" cy="457200"/>
-          </a:xfrm>
-          <a:prstGeom prst="rect">
-            <a:avLst/>
-          </a:prstGeom>
-          <a:solidFill>
-            <a:srgbClr val="FFB347"/>
-          </a:solidFill>
-          <a:ln w="9525">
-            <a:solidFill>
-              <a:srgbClr val="1E3A5C"/>
-            </a:solidFill>
-            <a:prstDash val="solid"/>
-          </a:ln>
-        </p:spPr>
-      </p:sp>
-      <p:sp>
-        <p:nvSpPr>
-          <p:cNvPr id="36" name="Shape 33"/>
-          <p:cNvSpPr/>
-          <p:nvPr/>
-        </p:nvSpPr>
-        <p:spPr>
-          <a:xfrm>
-            <a:off x="6784848" y="2834640"/>
-            <a:ext cx="457200" cy="457200"/>
-          </a:xfrm>
-          <a:prstGeom prst="rect">
-            <a:avLst/>
-          </a:prstGeom>
-          <a:solidFill>
-            <a:srgbClr val="0D1424"/>
-          </a:solidFill>
-          <a:ln w="9525">
-            <a:solidFill>
-              <a:srgbClr val="1E3A5C"/>
-            </a:solidFill>
-            <a:prstDash val="solid"/>
-          </a:ln>
-        </p:spPr>
-      </p:sp>
-      <p:sp>
-        <p:nvSpPr>
-          <p:cNvPr id="37" name="Shape 34"/>
-          <p:cNvSpPr/>
-          <p:nvPr/>
-        </p:nvSpPr>
-        <p:spPr>
-          <a:xfrm>
-            <a:off x="7269480" y="2834640"/>
-            <a:ext cx="457200" cy="457200"/>
-          </a:xfrm>
-          <a:prstGeom prst="rect">
-            <a:avLst/>
-          </a:prstGeom>
-          <a:solidFill>
-            <a:srgbClr val="FFB347"/>
-          </a:solidFill>
-          <a:ln w="9525">
-            <a:solidFill>
-              <a:srgbClr val="1E3A5C"/>
-            </a:solidFill>
-            <a:prstDash val="solid"/>
-          </a:ln>
-        </p:spPr>
-      </p:sp>
-      <p:sp>
-        <p:nvSpPr>
-          <p:cNvPr id="38" name="Shape 35"/>
-          <p:cNvSpPr/>
-          <p:nvPr/>
-        </p:nvSpPr>
-        <p:spPr>
-          <a:xfrm>
-            <a:off x="7754112" y="2834640"/>
-            <a:ext cx="457200" cy="457200"/>
-          </a:xfrm>
-          <a:prstGeom prst="rect">
-            <a:avLst/>
-          </a:prstGeom>
-          <a:solidFill>
-            <a:srgbClr val="0D1424"/>
-          </a:solidFill>
-          <a:ln w="9525">
-            <a:solidFill>
-              <a:srgbClr val="1E3A5C"/>
-            </a:solidFill>
-            <a:prstDash val="solid"/>
-          </a:ln>
-        </p:spPr>
-      </p:sp>
-      <p:sp>
-        <p:nvSpPr>
-          <p:cNvPr id="39" name="Text 36"/>
-          <p:cNvSpPr/>
-          <p:nvPr/>
-        </p:nvSpPr>
-        <p:spPr>
-          <a:xfrm>
-            <a:off x="4572000" y="3520440"/>
-            <a:ext cx="3931920" cy="365760"/>
+          <p:cNvPr id="58" name="Text 56"/>
+          <p:cNvSpPr/>
+          <p:nvPr/>
+        </p:nvSpPr>
+        <p:spPr>
+          <a:xfrm>
+            <a:off x="1234440" y="4672584"/>
+            <a:ext cx="1005840" cy="274320"/>
           </a:xfrm>
           <a:prstGeom prst="rect">
             <a:avLst/>
@@ -10989,138 +11832,37 @@
           <a:bodyPr wrap="square" lIns="0" tIns="0" rIns="0" bIns="0" rtlCol="0" anchor="ctr"/>
           <a:lstStyle/>
           <a:p>
-            <a:pPr marL="0" indent="0" algn="ctr">
-              <a:buNone/>
-            </a:pPr>
-            <a:r>
-              <a:rPr lang="en-US" sz="1300" dirty="0" err="1">
-                <a:solidFill>
-                  <a:srgbClr val="7A93AE"/>
-                </a:solidFill>
-                <a:latin typeface="Microsoft JhengHei" pitchFamily="34" charset="0"/>
-                <a:ea typeface="Microsoft JhengHei" pitchFamily="34" charset="-122"/>
-                <a:cs typeface="Microsoft JhengHei" pitchFamily="34" charset="-120"/>
-              </a:rPr>
-              <a:t>一格一格</a:t>
-            </a:r>
-            <a:r>
-              <a:rPr lang="en-US" sz="1300" dirty="0" smtClean="0">
-                <a:solidFill>
-                  <a:srgbClr val="7A93AE"/>
-                </a:solidFill>
-                <a:latin typeface="Microsoft JhengHei" pitchFamily="34" charset="0"/>
-                <a:ea typeface="Microsoft JhengHei" pitchFamily="34" charset="-122"/>
-                <a:cs typeface="Microsoft JhengHei" pitchFamily="34" charset="-120"/>
-              </a:rPr>
-              <a:t>、</a:t>
-            </a:r>
-            <a:r>
-              <a:rPr lang="zh-TW" altLang="en-US" sz="1300" dirty="0" smtClean="0">
-                <a:solidFill>
-                  <a:srgbClr val="7A93AE"/>
-                </a:solidFill>
-                <a:latin typeface="Microsoft JhengHei" pitchFamily="34" charset="0"/>
-                <a:ea typeface="Microsoft JhengHei" pitchFamily="34" charset="-122"/>
-                <a:cs typeface="Microsoft JhengHei" pitchFamily="34" charset="-120"/>
-              </a:rPr>
-              <a:t>把</a:t>
-            </a:r>
-            <a:r>
-              <a:rPr lang="en-US" sz="1300" dirty="0" smtClean="0">
-                <a:solidFill>
-                  <a:srgbClr val="7A93AE"/>
-                </a:solidFill>
-                <a:latin typeface="Microsoft JhengHei" pitchFamily="34" charset="0"/>
-                <a:ea typeface="Microsoft JhengHei" pitchFamily="34" charset="-122"/>
-                <a:cs typeface="Microsoft JhengHei" pitchFamily="34" charset="-120"/>
-              </a:rPr>
-              <a:t>亮</a:t>
-            </a:r>
-            <a:r>
-              <a:rPr lang="zh-TW" altLang="en-US" sz="1300" dirty="0" smtClean="0">
-                <a:solidFill>
-                  <a:srgbClr val="7A93AE"/>
-                </a:solidFill>
-                <a:latin typeface="Microsoft JhengHei" pitchFamily="34" charset="0"/>
-                <a:ea typeface="Microsoft JhengHei" pitchFamily="34" charset="-122"/>
-                <a:cs typeface="Microsoft JhengHei" pitchFamily="34" charset="-120"/>
-              </a:rPr>
-              <a:t>和</a:t>
-            </a:r>
-            <a:r>
-              <a:rPr lang="en-US" sz="1300" dirty="0" smtClean="0">
-                <a:solidFill>
-                  <a:srgbClr val="7A93AE"/>
-                </a:solidFill>
-                <a:latin typeface="Microsoft JhengHei" pitchFamily="34" charset="0"/>
-                <a:ea typeface="Microsoft JhengHei" pitchFamily="34" charset="-122"/>
-                <a:cs typeface="Microsoft JhengHei" pitchFamily="34" charset="-120"/>
-              </a:rPr>
-              <a:t>暗</a:t>
-            </a:r>
-            <a:r>
-              <a:rPr lang="zh-TW" altLang="en-US" sz="1300" dirty="0" smtClean="0">
-                <a:solidFill>
-                  <a:srgbClr val="7A93AE"/>
-                </a:solidFill>
-                <a:latin typeface="Microsoft JhengHei" pitchFamily="34" charset="0"/>
-                <a:ea typeface="Microsoft JhengHei" pitchFamily="34" charset="-122"/>
-                <a:cs typeface="Microsoft JhengHei" pitchFamily="34" charset="-120"/>
-              </a:rPr>
-              <a:t>的訊號</a:t>
-            </a:r>
-            <a:r>
-              <a:rPr lang="en-US" sz="1300" dirty="0" smtClean="0">
-                <a:solidFill>
-                  <a:srgbClr val="7A93AE"/>
-                </a:solidFill>
-                <a:latin typeface="Microsoft JhengHei" pitchFamily="34" charset="0"/>
-                <a:ea typeface="Microsoft JhengHei" pitchFamily="34" charset="-122"/>
-                <a:cs typeface="Microsoft JhengHei" pitchFamily="34" charset="-120"/>
-              </a:rPr>
-              <a:t>發</a:t>
-            </a:r>
-            <a:r>
-              <a:rPr lang="zh-TW" altLang="en-US" sz="1300" dirty="0" smtClean="0">
-                <a:solidFill>
-                  <a:srgbClr val="7A93AE"/>
-                </a:solidFill>
-                <a:latin typeface="Microsoft JhengHei" pitchFamily="34" charset="0"/>
-                <a:ea typeface="Microsoft JhengHei" pitchFamily="34" charset="-122"/>
-                <a:cs typeface="Microsoft JhengHei" pitchFamily="34" charset="-120"/>
-              </a:rPr>
-              <a:t>送</a:t>
-            </a:r>
-            <a:r>
-              <a:rPr lang="en-US" sz="1300" dirty="0" err="1" smtClean="0">
-                <a:solidFill>
-                  <a:srgbClr val="7A93AE"/>
-                </a:solidFill>
-                <a:latin typeface="Microsoft JhengHei" pitchFamily="34" charset="0"/>
-                <a:ea typeface="Microsoft JhengHei" pitchFamily="34" charset="-122"/>
-                <a:cs typeface="Microsoft JhengHei" pitchFamily="34" charset="-120"/>
-              </a:rPr>
-              <a:t>出去</a:t>
-            </a:r>
-            <a:endParaRPr lang="en-US" sz="1300" dirty="0"/>
-          </a:p>
-        </p:txBody>
-      </p:sp>
-      <p:sp>
-        <p:nvSpPr>
-          <p:cNvPr id="43" name="Shape 4"/>
-          <p:cNvSpPr/>
-          <p:nvPr/>
-        </p:nvSpPr>
-        <p:spPr>
-          <a:xfrm>
-            <a:off x="4411286" y="4736592"/>
-            <a:ext cx="7360501" cy="1371600"/>
-          </a:xfrm>
-          <a:prstGeom prst="roundRect">
-            <a:avLst>
-              <a:gd name="adj" fmla="val 5333"/>
-            </a:avLst>
+            <a:pPr marL="0" indent="0">
+              <a:buNone/>
+            </a:pPr>
+            <a:r>
+              <a:rPr lang="en-US" sz="1200" dirty="0">
+                <a:solidFill>
+                  <a:srgbClr val="C9D6E8"/>
+                </a:solidFill>
+                <a:latin typeface="Microsoft JhengHei" pitchFamily="34" charset="0"/>
+                <a:ea typeface="Microsoft JhengHei" pitchFamily="34" charset="-122"/>
+                <a:cs typeface="Microsoft JhengHei" pitchFamily="34" charset="-120"/>
+              </a:rPr>
+              <a:t>亮＝開燈</a:t>
+            </a:r>
+            <a:endParaRPr lang="en-US" sz="1200" dirty="0"/>
+          </a:p>
+        </p:txBody>
+      </p:sp>
+      <p:sp>
+        <p:nvSpPr>
+          <p:cNvPr id="59" name="Shape 57"/>
+          <p:cNvSpPr/>
+          <p:nvPr/>
+        </p:nvSpPr>
+        <p:spPr>
+          <a:xfrm>
+            <a:off x="2286000" y="4709160"/>
+            <a:ext cx="201168" cy="201168"/>
+          </a:xfrm>
+          <a:prstGeom prst="rect">
+            <a:avLst/>
           </a:prstGeom>
           <a:solidFill>
             <a:srgbClr val="0D1424"/>
@@ -11135,14 +11877,14 @@
       </p:sp>
       <p:sp>
         <p:nvSpPr>
-          <p:cNvPr id="44" name="Text 5"/>
-          <p:cNvSpPr/>
-          <p:nvPr/>
-        </p:nvSpPr>
-        <p:spPr>
-          <a:xfrm>
-            <a:off x="5303520" y="5338618"/>
-            <a:ext cx="6518564" cy="327706"/>
+          <p:cNvPr id="60" name="Text 58"/>
+          <p:cNvSpPr/>
+          <p:nvPr/>
+        </p:nvSpPr>
+        <p:spPr>
+          <a:xfrm>
+            <a:off x="2542032" y="4672584"/>
+            <a:ext cx="1005840" cy="274320"/>
           </a:xfrm>
           <a:prstGeom prst="rect">
             <a:avLst/>
@@ -11151,17 +11893,53 @@
           <a:ln/>
         </p:spPr>
         <p:txBody>
-          <a:bodyPr wrap="square" lIns="0" tIns="0" rIns="0" bIns="0" rtlCol="0" anchor="t"/>
+          <a:bodyPr wrap="square" lIns="0" tIns="0" rIns="0" bIns="0" rtlCol="0" anchor="ctr"/>
           <a:lstStyle/>
           <a:p>
             <a:pPr marL="0" indent="0">
-              <a:spcAft>
-                <a:spcPts val="600"/>
-              </a:spcAft>
-              <a:buNone/>
-            </a:pPr>
-            <a:r>
-              <a:rPr lang="zh-TW" altLang="en-US" sz="2000" b="1" dirty="0" smtClean="0">
+              <a:buNone/>
+            </a:pPr>
+            <a:r>
+              <a:rPr lang="en-US" sz="1200" dirty="0">
+                <a:solidFill>
+                  <a:srgbClr val="C9D6E8"/>
+                </a:solidFill>
+                <a:latin typeface="Microsoft JhengHei" pitchFamily="34" charset="0"/>
+                <a:ea typeface="Microsoft JhengHei" pitchFamily="34" charset="-122"/>
+                <a:cs typeface="Microsoft JhengHei" pitchFamily="34" charset="-120"/>
+              </a:rPr>
+              <a:t>暗＝關燈</a:t>
+            </a:r>
+            <a:endParaRPr lang="en-US" sz="1200" dirty="0"/>
+          </a:p>
+        </p:txBody>
+      </p:sp>
+      <p:sp>
+        <p:nvSpPr>
+          <p:cNvPr id="61" name="Text 59"/>
+          <p:cNvSpPr/>
+          <p:nvPr/>
+        </p:nvSpPr>
+        <p:spPr>
+          <a:xfrm>
+            <a:off x="3611880" y="2377440"/>
+            <a:ext cx="685800" cy="548640"/>
+          </a:xfrm>
+          <a:prstGeom prst="rect">
+            <a:avLst/>
+          </a:prstGeom>
+          <a:noFill/>
+          <a:ln/>
+        </p:spPr>
+        <p:txBody>
+          <a:bodyPr wrap="square" lIns="0" tIns="0" rIns="0" bIns="0" rtlCol="0" anchor="ctr"/>
+          <a:lstStyle/>
+          <a:p>
+            <a:pPr marL="0" indent="0" algn="ctr">
+              <a:buNone/>
+            </a:pPr>
+            <a:r>
+              <a:rPr lang="en-US" sz="3200" b="1" dirty="0">
                 <a:solidFill>
                   <a:srgbClr val="FFB347"/>
                 </a:solidFill>
@@ -11169,10 +11947,38 @@
                 <a:ea typeface="Microsoft JhengHei" pitchFamily="34" charset="-122"/>
                 <a:cs typeface="Microsoft JhengHei" pitchFamily="34" charset="-120"/>
               </a:rPr>
-              <a:t>這樣</a:t>
-            </a:r>
-            <a:r>
-              <a:rPr lang="zh-TW" altLang="en-US" sz="2000" dirty="0" smtClean="0">
+              <a:t>→</a:t>
+            </a:r>
+            <a:endParaRPr lang="en-US" sz="3200" dirty="0"/>
+          </a:p>
+        </p:txBody>
+      </p:sp>
+      <p:sp>
+        <p:nvSpPr>
+          <p:cNvPr id="62" name="Text 60"/>
+          <p:cNvSpPr/>
+          <p:nvPr/>
+        </p:nvSpPr>
+        <p:spPr>
+          <a:xfrm>
+            <a:off x="4434840" y="2057400"/>
+            <a:ext cx="6766560" cy="320040"/>
+          </a:xfrm>
+          <a:prstGeom prst="rect">
+            <a:avLst/>
+          </a:prstGeom>
+          <a:noFill/>
+          <a:ln/>
+        </p:spPr>
+        <p:txBody>
+          <a:bodyPr wrap="square" lIns="0" tIns="0" rIns="0" bIns="0" rtlCol="0" anchor="ctr"/>
+          <a:lstStyle/>
+          <a:p>
+            <a:pPr marL="0" indent="0">
+              <a:buNone/>
+            </a:pPr>
+            <a:r>
+              <a:rPr lang="en-US" sz="1500" b="1" dirty="0">
                 <a:solidFill>
                   <a:srgbClr val="C9D6E8"/>
                 </a:solidFill>
@@ -11180,24 +11986,1087 @@
                 <a:ea typeface="Microsoft JhengHei" pitchFamily="34" charset="-122"/>
                 <a:cs typeface="Microsoft JhengHei" pitchFamily="34" charset="-120"/>
               </a:rPr>
-              <a:t>不用照片、不用聲音，就能夠有效傳送訊息了</a:t>
-            </a:r>
-            <a:endParaRPr lang="en-US" dirty="0"/>
+              <a:t>把 25 格的亮、暗，排成一長串訊號</a:t>
+            </a:r>
+            <a:endParaRPr lang="en-US" sz="1500" dirty="0"/>
+          </a:p>
+        </p:txBody>
+      </p:sp>
+      <p:sp>
+        <p:nvSpPr>
+          <p:cNvPr id="63" name="Shape 61"/>
+          <p:cNvSpPr/>
+          <p:nvPr/>
+        </p:nvSpPr>
+        <p:spPr>
+          <a:xfrm>
+            <a:off x="4434840" y="2514600"/>
+            <a:ext cx="242316" cy="242316"/>
+          </a:xfrm>
+          <a:prstGeom prst="rect">
+            <a:avLst/>
+          </a:prstGeom>
+          <a:solidFill>
+            <a:srgbClr val="0D1424"/>
+          </a:solidFill>
+          <a:ln w="12700">
+            <a:solidFill>
+              <a:srgbClr val="1E3A5C"/>
+            </a:solidFill>
+            <a:prstDash val="solid"/>
+          </a:ln>
+        </p:spPr>
+      </p:sp>
+      <p:sp>
+        <p:nvSpPr>
+          <p:cNvPr id="64" name="Shape 62"/>
+          <p:cNvSpPr/>
+          <p:nvPr/>
+        </p:nvSpPr>
+        <p:spPr>
+          <a:xfrm>
+            <a:off x="4677156" y="2514600"/>
+            <a:ext cx="242316" cy="242316"/>
+          </a:xfrm>
+          <a:prstGeom prst="rect">
+            <a:avLst/>
+          </a:prstGeom>
+          <a:solidFill>
+            <a:srgbClr val="F2E3C8"/>
+          </a:solidFill>
+          <a:ln w="12700">
+            <a:solidFill>
+              <a:srgbClr val="1E3A5C"/>
+            </a:solidFill>
+            <a:prstDash val="solid"/>
+          </a:ln>
+        </p:spPr>
+      </p:sp>
+      <p:sp>
+        <p:nvSpPr>
+          <p:cNvPr id="65" name="Shape 63"/>
+          <p:cNvSpPr/>
+          <p:nvPr/>
+        </p:nvSpPr>
+        <p:spPr>
+          <a:xfrm>
+            <a:off x="4919472" y="2514600"/>
+            <a:ext cx="242316" cy="242316"/>
+          </a:xfrm>
+          <a:prstGeom prst="rect">
+            <a:avLst/>
+          </a:prstGeom>
+          <a:solidFill>
+            <a:srgbClr val="F2E3C8"/>
+          </a:solidFill>
+          <a:ln w="12700">
+            <a:solidFill>
+              <a:srgbClr val="1E3A5C"/>
+            </a:solidFill>
+            <a:prstDash val="solid"/>
+          </a:ln>
+        </p:spPr>
+      </p:sp>
+      <p:sp>
+        <p:nvSpPr>
+          <p:cNvPr id="66" name="Shape 64"/>
+          <p:cNvSpPr/>
+          <p:nvPr/>
+        </p:nvSpPr>
+        <p:spPr>
+          <a:xfrm>
+            <a:off x="5161788" y="2514600"/>
+            <a:ext cx="242316" cy="242316"/>
+          </a:xfrm>
+          <a:prstGeom prst="rect">
+            <a:avLst/>
+          </a:prstGeom>
+          <a:solidFill>
+            <a:srgbClr val="F2E3C8"/>
+          </a:solidFill>
+          <a:ln w="12700">
+            <a:solidFill>
+              <a:srgbClr val="1E3A5C"/>
+            </a:solidFill>
+            <a:prstDash val="solid"/>
+          </a:ln>
+        </p:spPr>
+      </p:sp>
+      <p:sp>
+        <p:nvSpPr>
+          <p:cNvPr id="67" name="Shape 65"/>
+          <p:cNvSpPr/>
+          <p:nvPr/>
+        </p:nvSpPr>
+        <p:spPr>
+          <a:xfrm>
+            <a:off x="5404104" y="2514600"/>
+            <a:ext cx="242316" cy="242316"/>
+          </a:xfrm>
+          <a:prstGeom prst="rect">
+            <a:avLst/>
+          </a:prstGeom>
+          <a:solidFill>
+            <a:srgbClr val="0D1424"/>
+          </a:solidFill>
+          <a:ln w="12700">
+            <a:solidFill>
+              <a:srgbClr val="1E3A5C"/>
+            </a:solidFill>
+            <a:prstDash val="solid"/>
+          </a:ln>
+        </p:spPr>
+      </p:sp>
+      <p:sp>
+        <p:nvSpPr>
+          <p:cNvPr id="68" name="Shape 66"/>
+          <p:cNvSpPr/>
+          <p:nvPr/>
+        </p:nvSpPr>
+        <p:spPr>
+          <a:xfrm>
+            <a:off x="5728716" y="2514600"/>
+            <a:ext cx="242316" cy="242316"/>
+          </a:xfrm>
+          <a:prstGeom prst="rect">
+            <a:avLst/>
+          </a:prstGeom>
+          <a:solidFill>
+            <a:srgbClr val="F2E3C8"/>
+          </a:solidFill>
+          <a:ln w="12700">
+            <a:solidFill>
+              <a:srgbClr val="1E3A5C"/>
+            </a:solidFill>
+            <a:prstDash val="solid"/>
+          </a:ln>
+        </p:spPr>
+      </p:sp>
+      <p:sp>
+        <p:nvSpPr>
+          <p:cNvPr id="69" name="Shape 67"/>
+          <p:cNvSpPr/>
+          <p:nvPr/>
+        </p:nvSpPr>
+        <p:spPr>
+          <a:xfrm>
+            <a:off x="5971032" y="2514600"/>
+            <a:ext cx="242316" cy="242316"/>
+          </a:xfrm>
+          <a:prstGeom prst="rect">
+            <a:avLst/>
+          </a:prstGeom>
+          <a:solidFill>
+            <a:srgbClr val="0D1424"/>
+          </a:solidFill>
+          <a:ln w="12700">
+            <a:solidFill>
+              <a:srgbClr val="1E3A5C"/>
+            </a:solidFill>
+            <a:prstDash val="solid"/>
+          </a:ln>
+        </p:spPr>
+      </p:sp>
+      <p:sp>
+        <p:nvSpPr>
+          <p:cNvPr id="70" name="Shape 68"/>
+          <p:cNvSpPr/>
+          <p:nvPr/>
+        </p:nvSpPr>
+        <p:spPr>
+          <a:xfrm>
+            <a:off x="6213348" y="2514600"/>
+            <a:ext cx="242316" cy="242316"/>
+          </a:xfrm>
+          <a:prstGeom prst="rect">
+            <a:avLst/>
+          </a:prstGeom>
+          <a:solidFill>
+            <a:srgbClr val="0D1424"/>
+          </a:solidFill>
+          <a:ln w="12700">
+            <a:solidFill>
+              <a:srgbClr val="1E3A5C"/>
+            </a:solidFill>
+            <a:prstDash val="solid"/>
+          </a:ln>
+        </p:spPr>
+      </p:sp>
+      <p:sp>
+        <p:nvSpPr>
+          <p:cNvPr id="71" name="Shape 69"/>
+          <p:cNvSpPr/>
+          <p:nvPr/>
+        </p:nvSpPr>
+        <p:spPr>
+          <a:xfrm>
+            <a:off x="6455664" y="2514600"/>
+            <a:ext cx="242316" cy="242316"/>
+          </a:xfrm>
+          <a:prstGeom prst="rect">
+            <a:avLst/>
+          </a:prstGeom>
+          <a:solidFill>
+            <a:srgbClr val="0D1424"/>
+          </a:solidFill>
+          <a:ln w="12700">
+            <a:solidFill>
+              <a:srgbClr val="1E3A5C"/>
+            </a:solidFill>
+            <a:prstDash val="solid"/>
+          </a:ln>
+        </p:spPr>
+      </p:sp>
+      <p:sp>
+        <p:nvSpPr>
+          <p:cNvPr id="72" name="Shape 70"/>
+          <p:cNvSpPr/>
+          <p:nvPr/>
+        </p:nvSpPr>
+        <p:spPr>
+          <a:xfrm>
+            <a:off x="6697980" y="2514600"/>
+            <a:ext cx="242316" cy="242316"/>
+          </a:xfrm>
+          <a:prstGeom prst="rect">
+            <a:avLst/>
+          </a:prstGeom>
+          <a:solidFill>
+            <a:srgbClr val="F2E3C8"/>
+          </a:solidFill>
+          <a:ln w="12700">
+            <a:solidFill>
+              <a:srgbClr val="1E3A5C"/>
+            </a:solidFill>
+            <a:prstDash val="solid"/>
+          </a:ln>
+        </p:spPr>
+      </p:sp>
+      <p:sp>
+        <p:nvSpPr>
+          <p:cNvPr id="73" name="Shape 71"/>
+          <p:cNvSpPr/>
+          <p:nvPr/>
+        </p:nvSpPr>
+        <p:spPr>
+          <a:xfrm>
+            <a:off x="7022592" y="2514600"/>
+            <a:ext cx="242316" cy="242316"/>
+          </a:xfrm>
+          <a:prstGeom prst="rect">
+            <a:avLst/>
+          </a:prstGeom>
+          <a:solidFill>
+            <a:srgbClr val="F2E3C8"/>
+          </a:solidFill>
+          <a:ln w="12700">
+            <a:solidFill>
+              <a:srgbClr val="1E3A5C"/>
+            </a:solidFill>
+            <a:prstDash val="solid"/>
+          </a:ln>
+        </p:spPr>
+      </p:sp>
+      <p:sp>
+        <p:nvSpPr>
+          <p:cNvPr id="74" name="Shape 72"/>
+          <p:cNvSpPr/>
+          <p:nvPr/>
+        </p:nvSpPr>
+        <p:spPr>
+          <a:xfrm>
+            <a:off x="7264908" y="2514600"/>
+            <a:ext cx="242316" cy="242316"/>
+          </a:xfrm>
+          <a:prstGeom prst="rect">
+            <a:avLst/>
+          </a:prstGeom>
+          <a:solidFill>
+            <a:srgbClr val="0D1424"/>
+          </a:solidFill>
+          <a:ln w="12700">
+            <a:solidFill>
+              <a:srgbClr val="1E3A5C"/>
+            </a:solidFill>
+            <a:prstDash val="solid"/>
+          </a:ln>
+        </p:spPr>
+      </p:sp>
+      <p:sp>
+        <p:nvSpPr>
+          <p:cNvPr id="75" name="Shape 73"/>
+          <p:cNvSpPr/>
+          <p:nvPr/>
+        </p:nvSpPr>
+        <p:spPr>
+          <a:xfrm>
+            <a:off x="7507224" y="2514600"/>
+            <a:ext cx="242316" cy="242316"/>
+          </a:xfrm>
+          <a:prstGeom prst="rect">
+            <a:avLst/>
+          </a:prstGeom>
+          <a:solidFill>
+            <a:srgbClr val="0D1424"/>
+          </a:solidFill>
+          <a:ln w="12700">
+            <a:solidFill>
+              <a:srgbClr val="1E3A5C"/>
+            </a:solidFill>
+            <a:prstDash val="solid"/>
+          </a:ln>
+        </p:spPr>
+      </p:sp>
+      <p:sp>
+        <p:nvSpPr>
+          <p:cNvPr id="76" name="Shape 74"/>
+          <p:cNvSpPr/>
+          <p:nvPr/>
+        </p:nvSpPr>
+        <p:spPr>
+          <a:xfrm>
+            <a:off x="7749540" y="2514600"/>
+            <a:ext cx="242316" cy="242316"/>
+          </a:xfrm>
+          <a:prstGeom prst="rect">
+            <a:avLst/>
+          </a:prstGeom>
+          <a:solidFill>
+            <a:srgbClr val="0D1424"/>
+          </a:solidFill>
+          <a:ln w="12700">
+            <a:solidFill>
+              <a:srgbClr val="1E3A5C"/>
+            </a:solidFill>
+            <a:prstDash val="solid"/>
+          </a:ln>
+        </p:spPr>
+      </p:sp>
+      <p:sp>
+        <p:nvSpPr>
+          <p:cNvPr id="77" name="Shape 75"/>
+          <p:cNvSpPr/>
+          <p:nvPr/>
+        </p:nvSpPr>
+        <p:spPr>
+          <a:xfrm>
+            <a:off x="7991856" y="2514600"/>
+            <a:ext cx="242316" cy="242316"/>
+          </a:xfrm>
+          <a:prstGeom prst="rect">
+            <a:avLst/>
+          </a:prstGeom>
+          <a:solidFill>
+            <a:srgbClr val="F2E3C8"/>
+          </a:solidFill>
+          <a:ln w="12700">
+            <a:solidFill>
+              <a:srgbClr val="1E3A5C"/>
+            </a:solidFill>
+            <a:prstDash val="solid"/>
+          </a:ln>
+        </p:spPr>
+      </p:sp>
+      <p:sp>
+        <p:nvSpPr>
+          <p:cNvPr id="78" name="Shape 76"/>
+          <p:cNvSpPr/>
+          <p:nvPr/>
+        </p:nvSpPr>
+        <p:spPr>
+          <a:xfrm>
+            <a:off x="8316468" y="2514600"/>
+            <a:ext cx="242316" cy="242316"/>
+          </a:xfrm>
+          <a:prstGeom prst="rect">
+            <a:avLst/>
+          </a:prstGeom>
+          <a:solidFill>
+            <a:srgbClr val="F2E3C8"/>
+          </a:solidFill>
+          <a:ln w="12700">
+            <a:solidFill>
+              <a:srgbClr val="1E3A5C"/>
+            </a:solidFill>
+            <a:prstDash val="solid"/>
+          </a:ln>
+        </p:spPr>
+      </p:sp>
+      <p:sp>
+        <p:nvSpPr>
+          <p:cNvPr id="79" name="Shape 77"/>
+          <p:cNvSpPr/>
+          <p:nvPr/>
+        </p:nvSpPr>
+        <p:spPr>
+          <a:xfrm>
+            <a:off x="8558784" y="2514600"/>
+            <a:ext cx="242316" cy="242316"/>
+          </a:xfrm>
+          <a:prstGeom prst="rect">
+            <a:avLst/>
+          </a:prstGeom>
+          <a:solidFill>
+            <a:srgbClr val="0D1424"/>
+          </a:solidFill>
+          <a:ln w="12700">
+            <a:solidFill>
+              <a:srgbClr val="1E3A5C"/>
+            </a:solidFill>
+            <a:prstDash val="solid"/>
+          </a:ln>
+        </p:spPr>
+      </p:sp>
+      <p:sp>
+        <p:nvSpPr>
+          <p:cNvPr id="80" name="Shape 78"/>
+          <p:cNvSpPr/>
+          <p:nvPr/>
+        </p:nvSpPr>
+        <p:spPr>
+          <a:xfrm>
+            <a:off x="8801100" y="2514600"/>
+            <a:ext cx="242316" cy="242316"/>
+          </a:xfrm>
+          <a:prstGeom prst="rect">
+            <a:avLst/>
+          </a:prstGeom>
+          <a:solidFill>
+            <a:srgbClr val="0D1424"/>
+          </a:solidFill>
+          <a:ln w="12700">
+            <a:solidFill>
+              <a:srgbClr val="1E3A5C"/>
+            </a:solidFill>
+            <a:prstDash val="solid"/>
+          </a:ln>
+        </p:spPr>
+      </p:sp>
+      <p:sp>
+        <p:nvSpPr>
+          <p:cNvPr id="81" name="Shape 79"/>
+          <p:cNvSpPr/>
+          <p:nvPr/>
+        </p:nvSpPr>
+        <p:spPr>
+          <a:xfrm>
+            <a:off x="9043416" y="2514600"/>
+            <a:ext cx="242316" cy="242316"/>
+          </a:xfrm>
+          <a:prstGeom prst="rect">
+            <a:avLst/>
+          </a:prstGeom>
+          <a:solidFill>
+            <a:srgbClr val="0D1424"/>
+          </a:solidFill>
+          <a:ln w="12700">
+            <a:solidFill>
+              <a:srgbClr val="1E3A5C"/>
+            </a:solidFill>
+            <a:prstDash val="solid"/>
+          </a:ln>
+        </p:spPr>
+      </p:sp>
+      <p:sp>
+        <p:nvSpPr>
+          <p:cNvPr id="82" name="Shape 80"/>
+          <p:cNvSpPr/>
+          <p:nvPr/>
+        </p:nvSpPr>
+        <p:spPr>
+          <a:xfrm>
+            <a:off x="9285732" y="2514600"/>
+            <a:ext cx="242316" cy="242316"/>
+          </a:xfrm>
+          <a:prstGeom prst="rect">
+            <a:avLst/>
+          </a:prstGeom>
+          <a:solidFill>
+            <a:srgbClr val="F2E3C8"/>
+          </a:solidFill>
+          <a:ln w="12700">
+            <a:solidFill>
+              <a:srgbClr val="1E3A5C"/>
+            </a:solidFill>
+            <a:prstDash val="solid"/>
+          </a:ln>
+        </p:spPr>
+      </p:sp>
+      <p:sp>
+        <p:nvSpPr>
+          <p:cNvPr id="83" name="Shape 81"/>
+          <p:cNvSpPr/>
+          <p:nvPr/>
+        </p:nvSpPr>
+        <p:spPr>
+          <a:xfrm>
+            <a:off x="9610344" y="2514600"/>
+            <a:ext cx="242316" cy="242316"/>
+          </a:xfrm>
+          <a:prstGeom prst="rect">
+            <a:avLst/>
+          </a:prstGeom>
+          <a:solidFill>
+            <a:srgbClr val="0D1424"/>
+          </a:solidFill>
+          <a:ln w="12700">
+            <a:solidFill>
+              <a:srgbClr val="1E3A5C"/>
+            </a:solidFill>
+            <a:prstDash val="solid"/>
+          </a:ln>
+        </p:spPr>
+      </p:sp>
+      <p:sp>
+        <p:nvSpPr>
+          <p:cNvPr id="84" name="Shape 82"/>
+          <p:cNvSpPr/>
+          <p:nvPr/>
+        </p:nvSpPr>
+        <p:spPr>
+          <a:xfrm>
+            <a:off x="9852660" y="2514600"/>
+            <a:ext cx="242316" cy="242316"/>
+          </a:xfrm>
+          <a:prstGeom prst="rect">
+            <a:avLst/>
+          </a:prstGeom>
+          <a:solidFill>
+            <a:srgbClr val="F2E3C8"/>
+          </a:solidFill>
+          <a:ln w="12700">
+            <a:solidFill>
+              <a:srgbClr val="1E3A5C"/>
+            </a:solidFill>
+            <a:prstDash val="solid"/>
+          </a:ln>
+        </p:spPr>
+      </p:sp>
+      <p:sp>
+        <p:nvSpPr>
+          <p:cNvPr id="85" name="Shape 83"/>
+          <p:cNvSpPr/>
+          <p:nvPr/>
+        </p:nvSpPr>
+        <p:spPr>
+          <a:xfrm>
+            <a:off x="10094976" y="2514600"/>
+            <a:ext cx="242316" cy="242316"/>
+          </a:xfrm>
+          <a:prstGeom prst="rect">
+            <a:avLst/>
+          </a:prstGeom>
+          <a:solidFill>
+            <a:srgbClr val="F2E3C8"/>
+          </a:solidFill>
+          <a:ln w="12700">
+            <a:solidFill>
+              <a:srgbClr val="1E3A5C"/>
+            </a:solidFill>
+            <a:prstDash val="solid"/>
+          </a:ln>
+        </p:spPr>
+      </p:sp>
+      <p:sp>
+        <p:nvSpPr>
+          <p:cNvPr id="86" name="Shape 84"/>
+          <p:cNvSpPr/>
+          <p:nvPr/>
+        </p:nvSpPr>
+        <p:spPr>
+          <a:xfrm>
+            <a:off x="10337292" y="2514600"/>
+            <a:ext cx="242316" cy="242316"/>
+          </a:xfrm>
+          <a:prstGeom prst="rect">
+            <a:avLst/>
+          </a:prstGeom>
+          <a:solidFill>
+            <a:srgbClr val="F2E3C8"/>
+          </a:solidFill>
+          <a:ln w="12700">
+            <a:solidFill>
+              <a:srgbClr val="1E3A5C"/>
+            </a:solidFill>
+            <a:prstDash val="solid"/>
+          </a:ln>
+        </p:spPr>
+      </p:sp>
+      <p:sp>
+        <p:nvSpPr>
+          <p:cNvPr id="87" name="Shape 85"/>
+          <p:cNvSpPr/>
+          <p:nvPr/>
+        </p:nvSpPr>
+        <p:spPr>
+          <a:xfrm>
+            <a:off x="10579608" y="2514600"/>
+            <a:ext cx="242316" cy="242316"/>
+          </a:xfrm>
+          <a:prstGeom prst="rect">
+            <a:avLst/>
+          </a:prstGeom>
+          <a:solidFill>
+            <a:srgbClr val="0D1424"/>
+          </a:solidFill>
+          <a:ln w="12700">
+            <a:solidFill>
+              <a:srgbClr val="1E3A5C"/>
+            </a:solidFill>
+            <a:prstDash val="solid"/>
+          </a:ln>
+        </p:spPr>
+      </p:sp>
+      <p:sp>
+        <p:nvSpPr>
+          <p:cNvPr id="88" name="Text 86"/>
+          <p:cNvSpPr/>
+          <p:nvPr/>
+        </p:nvSpPr>
+        <p:spPr>
+          <a:xfrm>
+            <a:off x="4434840" y="2802636"/>
+            <a:ext cx="1211580" cy="237744"/>
+          </a:xfrm>
+          <a:prstGeom prst="rect">
+            <a:avLst/>
+          </a:prstGeom>
+          <a:noFill/>
+          <a:ln/>
+        </p:spPr>
+        <p:txBody>
+          <a:bodyPr wrap="square" lIns="0" tIns="0" rIns="0" bIns="0" rtlCol="0" anchor="ctr"/>
+          <a:lstStyle/>
+          <a:p>
+            <a:pPr marL="0" indent="0" algn="ctr">
+              <a:buNone/>
+            </a:pPr>
+            <a:r>
+              <a:rPr lang="en-US" sz="950" b="1" dirty="0">
+                <a:solidFill>
+                  <a:srgbClr val="FFB347"/>
+                </a:solidFill>
+                <a:latin typeface="Microsoft JhengHei" pitchFamily="34" charset="0"/>
+                <a:ea typeface="Microsoft JhengHei" pitchFamily="34" charset="-122"/>
+                <a:cs typeface="Microsoft JhengHei" pitchFamily="34" charset="-120"/>
+              </a:rPr>
+              <a:t>第 1 列</a:t>
+            </a:r>
+            <a:endParaRPr lang="en-US" sz="950" dirty="0"/>
+          </a:p>
+        </p:txBody>
+      </p:sp>
+      <p:sp>
+        <p:nvSpPr>
+          <p:cNvPr id="89" name="Text 87"/>
+          <p:cNvSpPr/>
+          <p:nvPr/>
+        </p:nvSpPr>
+        <p:spPr>
+          <a:xfrm>
+            <a:off x="5728716" y="2802636"/>
+            <a:ext cx="1211580" cy="237744"/>
+          </a:xfrm>
+          <a:prstGeom prst="rect">
+            <a:avLst/>
+          </a:prstGeom>
+          <a:noFill/>
+          <a:ln/>
+        </p:spPr>
+        <p:txBody>
+          <a:bodyPr wrap="square" lIns="0" tIns="0" rIns="0" bIns="0" rtlCol="0" anchor="ctr"/>
+          <a:lstStyle/>
+          <a:p>
+            <a:pPr marL="0" indent="0" algn="ctr">
+              <a:buNone/>
+            </a:pPr>
+            <a:r>
+              <a:rPr lang="en-US" sz="950" dirty="0">
+                <a:solidFill>
+                  <a:srgbClr val="7A93AE"/>
+                </a:solidFill>
+                <a:latin typeface="Microsoft JhengHei" pitchFamily="34" charset="0"/>
+                <a:ea typeface="Microsoft JhengHei" pitchFamily="34" charset="-122"/>
+                <a:cs typeface="Microsoft JhengHei" pitchFamily="34" charset="-120"/>
+              </a:rPr>
+              <a:t>第 2 列</a:t>
+            </a:r>
+            <a:endParaRPr lang="en-US" sz="950" dirty="0"/>
+          </a:p>
+        </p:txBody>
+      </p:sp>
+      <p:sp>
+        <p:nvSpPr>
+          <p:cNvPr id="90" name="Text 88"/>
+          <p:cNvSpPr/>
+          <p:nvPr/>
+        </p:nvSpPr>
+        <p:spPr>
+          <a:xfrm>
+            <a:off x="7022592" y="2802636"/>
+            <a:ext cx="1211580" cy="237744"/>
+          </a:xfrm>
+          <a:prstGeom prst="rect">
+            <a:avLst/>
+          </a:prstGeom>
+          <a:noFill/>
+          <a:ln/>
+        </p:spPr>
+        <p:txBody>
+          <a:bodyPr wrap="square" lIns="0" tIns="0" rIns="0" bIns="0" rtlCol="0" anchor="ctr"/>
+          <a:lstStyle/>
+          <a:p>
+            <a:pPr marL="0" indent="0" algn="ctr">
+              <a:buNone/>
+            </a:pPr>
+            <a:r>
+              <a:rPr lang="en-US" sz="950" dirty="0">
+                <a:solidFill>
+                  <a:srgbClr val="7A93AE"/>
+                </a:solidFill>
+                <a:latin typeface="Microsoft JhengHei" pitchFamily="34" charset="0"/>
+                <a:ea typeface="Microsoft JhengHei" pitchFamily="34" charset="-122"/>
+                <a:cs typeface="Microsoft JhengHei" pitchFamily="34" charset="-120"/>
+              </a:rPr>
+              <a:t>第 3 列</a:t>
+            </a:r>
+            <a:endParaRPr lang="en-US" sz="950" dirty="0"/>
+          </a:p>
+        </p:txBody>
+      </p:sp>
+      <p:sp>
+        <p:nvSpPr>
+          <p:cNvPr id="91" name="Text 89"/>
+          <p:cNvSpPr/>
+          <p:nvPr/>
+        </p:nvSpPr>
+        <p:spPr>
+          <a:xfrm>
+            <a:off x="8316468" y="2802636"/>
+            <a:ext cx="1211580" cy="237744"/>
+          </a:xfrm>
+          <a:prstGeom prst="rect">
+            <a:avLst/>
+          </a:prstGeom>
+          <a:noFill/>
+          <a:ln/>
+        </p:spPr>
+        <p:txBody>
+          <a:bodyPr wrap="square" lIns="0" tIns="0" rIns="0" bIns="0" rtlCol="0" anchor="ctr"/>
+          <a:lstStyle/>
+          <a:p>
+            <a:pPr marL="0" indent="0" algn="ctr">
+              <a:buNone/>
+            </a:pPr>
+            <a:r>
+              <a:rPr lang="en-US" sz="950" dirty="0">
+                <a:solidFill>
+                  <a:srgbClr val="7A93AE"/>
+                </a:solidFill>
+                <a:latin typeface="Microsoft JhengHei" pitchFamily="34" charset="0"/>
+                <a:ea typeface="Microsoft JhengHei" pitchFamily="34" charset="-122"/>
+                <a:cs typeface="Microsoft JhengHei" pitchFamily="34" charset="-120"/>
+              </a:rPr>
+              <a:t>第 4 列</a:t>
+            </a:r>
+            <a:endParaRPr lang="en-US" sz="950" dirty="0"/>
+          </a:p>
+        </p:txBody>
+      </p:sp>
+      <p:sp>
+        <p:nvSpPr>
+          <p:cNvPr id="92" name="Text 90"/>
+          <p:cNvSpPr/>
+          <p:nvPr/>
+        </p:nvSpPr>
+        <p:spPr>
+          <a:xfrm>
+            <a:off x="9610344" y="2802636"/>
+            <a:ext cx="1211580" cy="237744"/>
+          </a:xfrm>
+          <a:prstGeom prst="rect">
+            <a:avLst/>
+          </a:prstGeom>
+          <a:noFill/>
+          <a:ln/>
+        </p:spPr>
+        <p:txBody>
+          <a:bodyPr wrap="square" lIns="0" tIns="0" rIns="0" bIns="0" rtlCol="0" anchor="ctr"/>
+          <a:lstStyle/>
+          <a:p>
+            <a:pPr marL="0" indent="0" algn="ctr">
+              <a:buNone/>
+            </a:pPr>
+            <a:r>
+              <a:rPr lang="en-US" sz="950" dirty="0">
+                <a:solidFill>
+                  <a:srgbClr val="7A93AE"/>
+                </a:solidFill>
+                <a:latin typeface="Microsoft JhengHei" pitchFamily="34" charset="0"/>
+                <a:ea typeface="Microsoft JhengHei" pitchFamily="34" charset="-122"/>
+                <a:cs typeface="Microsoft JhengHei" pitchFamily="34" charset="-120"/>
+              </a:rPr>
+              <a:t>第 5 列</a:t>
+            </a:r>
+            <a:endParaRPr lang="en-US" sz="950" dirty="0"/>
+          </a:p>
+        </p:txBody>
+      </p:sp>
+      <p:sp>
+        <p:nvSpPr>
+          <p:cNvPr id="93" name="Shape 91"/>
+          <p:cNvSpPr/>
+          <p:nvPr/>
+        </p:nvSpPr>
+        <p:spPr>
+          <a:xfrm>
+            <a:off x="4398264" y="2478024"/>
+            <a:ext cx="1284732" cy="315468"/>
+          </a:xfrm>
+          <a:prstGeom prst="roundRect">
+            <a:avLst>
+              <a:gd name="adj" fmla="val 11594"/>
+            </a:avLst>
+          </a:prstGeom>
+          <a:solidFill>
+            <a:srgbClr val="070B14">
+              <a:alpha val="0"/>
+            </a:srgbClr>
+          </a:solidFill>
+          <a:ln w="25400">
+            <a:solidFill>
+              <a:srgbClr val="FFB347"/>
+            </a:solidFill>
+            <a:prstDash val="solid"/>
+          </a:ln>
+        </p:spPr>
+      </p:sp>
+      <p:sp>
+        <p:nvSpPr>
+          <p:cNvPr id="94" name="Shape 92"/>
+          <p:cNvSpPr/>
+          <p:nvPr/>
+        </p:nvSpPr>
+        <p:spPr>
+          <a:xfrm>
+            <a:off x="4434840" y="3140964"/>
+            <a:ext cx="6387084" cy="0"/>
+          </a:xfrm>
+          <a:prstGeom prst="line">
+            <a:avLst/>
+          </a:prstGeom>
+          <a:noFill/>
+          <a:ln w="22225">
+            <a:solidFill>
+              <a:srgbClr val="FFB347"/>
+            </a:solidFill>
+            <a:prstDash val="solid"/>
+            <a:tailEnd type="triangle"/>
+          </a:ln>
+        </p:spPr>
+      </p:sp>
+      <p:sp>
+        <p:nvSpPr>
+          <p:cNvPr id="95" name="Text 93"/>
+          <p:cNvSpPr/>
+          <p:nvPr/>
+        </p:nvSpPr>
+        <p:spPr>
+          <a:xfrm>
+            <a:off x="4434840" y="3214116"/>
+            <a:ext cx="6766560" cy="292608"/>
+          </a:xfrm>
+          <a:prstGeom prst="rect">
+            <a:avLst/>
+          </a:prstGeom>
+          <a:noFill/>
+          <a:ln/>
+        </p:spPr>
+        <p:txBody>
+          <a:bodyPr wrap="square" lIns="0" tIns="0" rIns="0" bIns="0" rtlCol="0" anchor="ctr"/>
+          <a:lstStyle/>
+          <a:p>
+            <a:pPr marL="0" indent="0">
+              <a:buNone/>
+            </a:pPr>
+            <a:r>
+              <a:rPr lang="en-US" sz="1200" dirty="0">
+                <a:solidFill>
+                  <a:srgbClr val="7A93AE"/>
+                </a:solidFill>
+                <a:latin typeface="Microsoft JhengHei" pitchFamily="34" charset="0"/>
+                <a:ea typeface="Microsoft JhengHei" pitchFamily="34" charset="-122"/>
+                <a:cs typeface="Microsoft JhengHei" pitchFamily="34" charset="-120"/>
+              </a:rPr>
+              <a:t>發送順序：第 1 格 → 第 25 格，一格一格用「光」發出去</a:t>
+            </a:r>
+            <a:endParaRPr lang="en-US" sz="1200" dirty="0"/>
+          </a:p>
+        </p:txBody>
+      </p:sp>
+      <p:sp>
+        <p:nvSpPr>
+          <p:cNvPr id="96" name="Shape 94"/>
+          <p:cNvSpPr/>
+          <p:nvPr/>
+        </p:nvSpPr>
+        <p:spPr>
+          <a:xfrm>
+            <a:off x="4434840" y="4434840"/>
+            <a:ext cx="6766560" cy="1417320"/>
+          </a:xfrm>
+          <a:prstGeom prst="roundRect">
+            <a:avLst>
+              <a:gd name="adj" fmla="val 5161"/>
+            </a:avLst>
+          </a:prstGeom>
+          <a:solidFill>
+            <a:srgbClr val="0D1424"/>
+          </a:solidFill>
+          <a:ln w="19050">
+            <a:solidFill>
+              <a:srgbClr val="1E3A5C"/>
+            </a:solidFill>
+            <a:prstDash val="solid"/>
+          </a:ln>
+        </p:spPr>
+      </p:sp>
+      <p:sp>
+        <p:nvSpPr>
+          <p:cNvPr id="97" name="Text 95"/>
+          <p:cNvSpPr/>
+          <p:nvPr/>
+        </p:nvSpPr>
+        <p:spPr>
+          <a:xfrm>
+            <a:off x="4709160" y="4572000"/>
+            <a:ext cx="6217920" cy="1143000"/>
+          </a:xfrm>
+          <a:prstGeom prst="rect">
+            <a:avLst/>
+          </a:prstGeom>
+          <a:noFill/>
+          <a:ln/>
+        </p:spPr>
+        <p:txBody>
+          <a:bodyPr wrap="square" lIns="0" tIns="0" rIns="0" bIns="0" rtlCol="0" anchor="ctr"/>
+          <a:lstStyle/>
+          <a:p>
+            <a:pPr marL="0" indent="0" algn="ctr">
+              <a:lnSpc>
+                <a:spcPct val="125000"/>
+              </a:lnSpc>
+              <a:buNone/>
+            </a:pPr>
+            <a:r>
+              <a:rPr lang="en-US" sz="1650" dirty="0">
+                <a:solidFill>
+                  <a:srgbClr val="C9D6E8"/>
+                </a:solidFill>
+                <a:latin typeface="Microsoft JhengHei" pitchFamily="34" charset="0"/>
+                <a:ea typeface="Microsoft JhengHei" pitchFamily="34" charset="-122"/>
+                <a:cs typeface="Microsoft JhengHei" pitchFamily="34" charset="-120"/>
+              </a:rPr>
+              <a:t>不用把底片送回地球，也不用用聲音描述——
+只要一連串「</a:t>
+            </a:r>
+            <a:r>
+              <a:rPr lang="en-US" sz="1650" b="1" dirty="0">
+                <a:solidFill>
+                  <a:srgbClr val="FFB347"/>
+                </a:solidFill>
+                <a:latin typeface="Microsoft JhengHei" pitchFamily="34" charset="0"/>
+                <a:ea typeface="Microsoft JhengHei" pitchFamily="34" charset="-122"/>
+                <a:cs typeface="Microsoft JhengHei" pitchFamily="34" charset="-120"/>
+              </a:rPr>
+              <a:t>亮</a:t>
+            </a:r>
+            <a:r>
+              <a:rPr lang="en-US" sz="1650" dirty="0">
+                <a:solidFill>
+                  <a:srgbClr val="C9D6E8"/>
+                </a:solidFill>
+                <a:latin typeface="Microsoft JhengHei" pitchFamily="34" charset="0"/>
+                <a:ea typeface="Microsoft JhengHei" pitchFamily="34" charset="-122"/>
+                <a:cs typeface="Microsoft JhengHei" pitchFamily="34" charset="-120"/>
+              </a:rPr>
+              <a:t>、</a:t>
+            </a:r>
+            <a:r>
+              <a:rPr lang="en-US" sz="1650" b="1" dirty="0">
+                <a:solidFill>
+                  <a:srgbClr val="FFB347"/>
+                </a:solidFill>
+                <a:latin typeface="Microsoft JhengHei" pitchFamily="34" charset="0"/>
+                <a:ea typeface="Microsoft JhengHei" pitchFamily="34" charset="-122"/>
+                <a:cs typeface="Microsoft JhengHei" pitchFamily="34" charset="-120"/>
+              </a:rPr>
+              <a:t>暗</a:t>
+            </a:r>
+            <a:r>
+              <a:rPr lang="en-US" sz="1650" dirty="0">
+                <a:solidFill>
+                  <a:srgbClr val="C9D6E8"/>
+                </a:solidFill>
+                <a:latin typeface="Microsoft JhengHei" pitchFamily="34" charset="0"/>
+                <a:ea typeface="Microsoft JhengHei" pitchFamily="34" charset="-122"/>
+                <a:cs typeface="Microsoft JhengHei" pitchFamily="34" charset="-120"/>
+              </a:rPr>
+              <a:t>」訊號，就能把整張照片傳回來！</a:t>
+            </a:r>
+            <a:endParaRPr lang="en-US" sz="1650" dirty="0"/>
+          </a:p>
+        </p:txBody>
+      </p:sp>
+      <p:sp>
+        <p:nvSpPr>
+          <p:cNvPr id="98" name="Text 96"/>
+          <p:cNvSpPr/>
+          <p:nvPr/>
+        </p:nvSpPr>
+        <p:spPr>
+          <a:xfrm>
+            <a:off x="548640" y="6446520"/>
+            <a:ext cx="7315200" cy="274320"/>
+          </a:xfrm>
+          <a:prstGeom prst="rect">
+            <a:avLst/>
+          </a:prstGeom>
+          <a:noFill/>
+          <a:ln/>
+        </p:spPr>
+        <p:txBody>
+          <a:bodyPr wrap="square" lIns="0" tIns="0" rIns="0" bIns="0" rtlCol="0" anchor="ctr"/>
+          <a:lstStyle/>
+          <a:p>
+            <a:pPr marL="0" indent="0">
+              <a:buNone/>
+            </a:pPr>
+            <a:r>
+              <a:rPr lang="en-US" sz="900" dirty="0">
+                <a:solidFill>
+                  <a:srgbClr val="7A93AE"/>
+                </a:solidFill>
+                <a:latin typeface="Microsoft JhengHei" pitchFamily="34" charset="0"/>
+                <a:ea typeface="Microsoft JhengHei" pitchFamily="34" charset="-122"/>
+                <a:cs typeface="Microsoft JhengHei" pitchFamily="34" charset="-120"/>
+              </a:rPr>
+              <a:t>MISSION 02 · 火星第一眼：1976 維京一號的拍照任務　5</a:t>
+            </a:r>
+            <a:endParaRPr lang="en-US" sz="900" dirty="0"/>
           </a:p>
         </p:txBody>
       </p:sp>
     </p:spTree>
+    <p:extLst>
+      <p:ext uri="{BB962C8B-B14F-4D97-AF65-F5344CB8AC3E}">
+        <p14:creationId xmlns:p14="http://schemas.microsoft.com/office/powerpoint/2010/main" val="2829362934"/>
+      </p:ext>
+    </p:extLst>
   </p:cSld>
   <p:clrMapOvr>
     <a:masterClrMapping/>
   </p:clrMapOvr>
-  <p:timing>
-    <p:tnLst>
-      <p:par>
-        <p:cTn id="1" dur="indefinite" restart="never" nodeType="tmRoot"/>
-      </p:par>
-    </p:tnLst>
-  </p:timing>
 </p:sld>
 </file>
 
@@ -11306,928 +13175,14 @@
       </p:sp>
       <p:sp>
         <p:nvSpPr>
-          <p:cNvPr id="5" name="Shape 2"/>
-          <p:cNvSpPr/>
-          <p:nvPr/>
-        </p:nvSpPr>
-        <p:spPr>
-          <a:xfrm>
-            <a:off x="822960" y="1554480"/>
-            <a:ext cx="566928" cy="566928"/>
-          </a:xfrm>
-          <a:prstGeom prst="rect">
-            <a:avLst/>
-          </a:prstGeom>
-          <a:solidFill>
-            <a:srgbClr val="0D1424"/>
-          </a:solidFill>
-          <a:ln w="9525">
-            <a:solidFill>
-              <a:srgbClr val="1E3A5C"/>
-            </a:solidFill>
-            <a:prstDash val="solid"/>
-          </a:ln>
-        </p:spPr>
-      </p:sp>
-      <p:sp>
-        <p:nvSpPr>
-          <p:cNvPr id="6" name="Shape 3"/>
-          <p:cNvSpPr/>
-          <p:nvPr/>
-        </p:nvSpPr>
-        <p:spPr>
-          <a:xfrm>
-            <a:off x="1389888" y="1554480"/>
-            <a:ext cx="566928" cy="566928"/>
-          </a:xfrm>
-          <a:prstGeom prst="rect">
-            <a:avLst/>
-          </a:prstGeom>
-          <a:solidFill>
-            <a:srgbClr val="F2E3C8"/>
-          </a:solidFill>
-          <a:ln w="9525">
-            <a:solidFill>
-              <a:srgbClr val="1E3A5C"/>
-            </a:solidFill>
-            <a:prstDash val="solid"/>
-          </a:ln>
-        </p:spPr>
-      </p:sp>
-      <p:sp>
-        <p:nvSpPr>
-          <p:cNvPr id="7" name="Shape 4"/>
-          <p:cNvSpPr/>
-          <p:nvPr/>
-        </p:nvSpPr>
-        <p:spPr>
-          <a:xfrm>
-            <a:off x="1956816" y="1554480"/>
-            <a:ext cx="566928" cy="566928"/>
-          </a:xfrm>
-          <a:prstGeom prst="rect">
-            <a:avLst/>
-          </a:prstGeom>
-          <a:solidFill>
-            <a:srgbClr val="F2E3C8"/>
-          </a:solidFill>
-          <a:ln w="9525">
-            <a:solidFill>
-              <a:srgbClr val="1E3A5C"/>
-            </a:solidFill>
-            <a:prstDash val="solid"/>
-          </a:ln>
-        </p:spPr>
-      </p:sp>
-      <p:sp>
-        <p:nvSpPr>
-          <p:cNvPr id="8" name="Shape 5"/>
-          <p:cNvSpPr/>
-          <p:nvPr/>
-        </p:nvSpPr>
-        <p:spPr>
-          <a:xfrm>
-            <a:off x="2523744" y="1554480"/>
-            <a:ext cx="566928" cy="566928"/>
-          </a:xfrm>
-          <a:prstGeom prst="rect">
-            <a:avLst/>
-          </a:prstGeom>
-          <a:solidFill>
-            <a:srgbClr val="F2E3C8"/>
-          </a:solidFill>
-          <a:ln w="9525">
-            <a:solidFill>
-              <a:srgbClr val="1E3A5C"/>
-            </a:solidFill>
-            <a:prstDash val="solid"/>
-          </a:ln>
-        </p:spPr>
-      </p:sp>
-      <p:sp>
-        <p:nvSpPr>
-          <p:cNvPr id="9" name="Shape 6"/>
-          <p:cNvSpPr/>
-          <p:nvPr/>
-        </p:nvSpPr>
-        <p:spPr>
-          <a:xfrm>
-            <a:off x="3090672" y="1554480"/>
-            <a:ext cx="566928" cy="566928"/>
-          </a:xfrm>
-          <a:prstGeom prst="rect">
-            <a:avLst/>
-          </a:prstGeom>
-          <a:solidFill>
-            <a:srgbClr val="0D1424"/>
-          </a:solidFill>
-          <a:ln w="9525">
-            <a:solidFill>
-              <a:srgbClr val="1E3A5C"/>
-            </a:solidFill>
-            <a:prstDash val="solid"/>
-          </a:ln>
-        </p:spPr>
-      </p:sp>
-      <p:sp>
-        <p:nvSpPr>
-          <p:cNvPr id="10" name="Shape 7"/>
-          <p:cNvSpPr/>
-          <p:nvPr/>
-        </p:nvSpPr>
-        <p:spPr>
-          <a:xfrm>
-            <a:off x="822960" y="2121408"/>
-            <a:ext cx="566928" cy="566928"/>
-          </a:xfrm>
-          <a:prstGeom prst="rect">
-            <a:avLst/>
-          </a:prstGeom>
-          <a:solidFill>
-            <a:srgbClr val="F2E3C8"/>
-          </a:solidFill>
-          <a:ln w="9525">
-            <a:solidFill>
-              <a:srgbClr val="1E3A5C"/>
-            </a:solidFill>
-            <a:prstDash val="solid"/>
-          </a:ln>
-        </p:spPr>
-      </p:sp>
-      <p:sp>
-        <p:nvSpPr>
-          <p:cNvPr id="11" name="Shape 8"/>
-          <p:cNvSpPr/>
-          <p:nvPr/>
-        </p:nvSpPr>
-        <p:spPr>
-          <a:xfrm>
-            <a:off x="1389888" y="2121408"/>
-            <a:ext cx="566928" cy="566928"/>
-          </a:xfrm>
-          <a:prstGeom prst="rect">
-            <a:avLst/>
-          </a:prstGeom>
-          <a:solidFill>
-            <a:srgbClr val="F2E3C8"/>
-          </a:solidFill>
-          <a:ln w="9525">
-            <a:solidFill>
-              <a:srgbClr val="1E3A5C"/>
-            </a:solidFill>
-            <a:prstDash val="solid"/>
-          </a:ln>
-        </p:spPr>
-      </p:sp>
-      <p:sp>
-        <p:nvSpPr>
-          <p:cNvPr id="12" name="Shape 9"/>
-          <p:cNvSpPr/>
-          <p:nvPr/>
-        </p:nvSpPr>
-        <p:spPr>
-          <a:xfrm>
-            <a:off x="1956816" y="2121408"/>
-            <a:ext cx="566928" cy="566928"/>
-          </a:xfrm>
-          <a:prstGeom prst="rect">
-            <a:avLst/>
-          </a:prstGeom>
-          <a:solidFill>
-            <a:srgbClr val="0D1424"/>
-          </a:solidFill>
-          <a:ln w="9525">
-            <a:solidFill>
-              <a:srgbClr val="1E3A5C"/>
-            </a:solidFill>
-            <a:prstDash val="solid"/>
-          </a:ln>
-        </p:spPr>
-      </p:sp>
-      <p:sp>
-        <p:nvSpPr>
-          <p:cNvPr id="13" name="Shape 10"/>
-          <p:cNvSpPr/>
-          <p:nvPr/>
-        </p:nvSpPr>
-        <p:spPr>
-          <a:xfrm>
-            <a:off x="2523744" y="2121408"/>
-            <a:ext cx="566928" cy="566928"/>
-          </a:xfrm>
-          <a:prstGeom prst="rect">
-            <a:avLst/>
-          </a:prstGeom>
-          <a:solidFill>
-            <a:srgbClr val="F2E3C8"/>
-          </a:solidFill>
-          <a:ln w="9525">
-            <a:solidFill>
-              <a:srgbClr val="1E3A5C"/>
-            </a:solidFill>
-            <a:prstDash val="solid"/>
-          </a:ln>
-        </p:spPr>
-      </p:sp>
-      <p:sp>
-        <p:nvSpPr>
-          <p:cNvPr id="14" name="Shape 11"/>
-          <p:cNvSpPr/>
-          <p:nvPr/>
-        </p:nvSpPr>
-        <p:spPr>
-          <a:xfrm>
-            <a:off x="3090672" y="2121408"/>
-            <a:ext cx="566928" cy="566928"/>
-          </a:xfrm>
-          <a:prstGeom prst="rect">
-            <a:avLst/>
-          </a:prstGeom>
-          <a:solidFill>
-            <a:srgbClr val="F2E3C8"/>
-          </a:solidFill>
-          <a:ln w="9525">
-            <a:solidFill>
-              <a:srgbClr val="1E3A5C"/>
-            </a:solidFill>
-            <a:prstDash val="solid"/>
-          </a:ln>
-        </p:spPr>
-      </p:sp>
-      <p:sp>
-        <p:nvSpPr>
-          <p:cNvPr id="15" name="Shape 12"/>
-          <p:cNvSpPr/>
-          <p:nvPr/>
-        </p:nvSpPr>
-        <p:spPr>
-          <a:xfrm>
-            <a:off x="822960" y="2688336"/>
-            <a:ext cx="566928" cy="566928"/>
-          </a:xfrm>
-          <a:prstGeom prst="rect">
-            <a:avLst/>
-          </a:prstGeom>
-          <a:solidFill>
-            <a:srgbClr val="F2E3C8"/>
-          </a:solidFill>
-          <a:ln w="9525">
-            <a:solidFill>
-              <a:srgbClr val="1E3A5C"/>
-            </a:solidFill>
-            <a:prstDash val="solid"/>
-          </a:ln>
-        </p:spPr>
-      </p:sp>
-      <p:sp>
-        <p:nvSpPr>
-          <p:cNvPr id="16" name="Shape 13"/>
-          <p:cNvSpPr/>
-          <p:nvPr/>
-        </p:nvSpPr>
-        <p:spPr>
-          <a:xfrm>
-            <a:off x="1389888" y="2688336"/>
-            <a:ext cx="566928" cy="566928"/>
-          </a:xfrm>
-          <a:prstGeom prst="rect">
-            <a:avLst/>
-          </a:prstGeom>
-          <a:solidFill>
-            <a:srgbClr val="0D1424"/>
-          </a:solidFill>
-          <a:ln w="9525">
-            <a:solidFill>
-              <a:srgbClr val="1E3A5C"/>
-            </a:solidFill>
-            <a:prstDash val="solid"/>
-          </a:ln>
-        </p:spPr>
-      </p:sp>
-      <p:sp>
-        <p:nvSpPr>
-          <p:cNvPr id="17" name="Shape 14"/>
-          <p:cNvSpPr/>
-          <p:nvPr/>
-        </p:nvSpPr>
-        <p:spPr>
-          <a:xfrm>
-            <a:off x="1956816" y="2688336"/>
-            <a:ext cx="566928" cy="566928"/>
-          </a:xfrm>
-          <a:prstGeom prst="rect">
-            <a:avLst/>
-          </a:prstGeom>
-          <a:solidFill>
-            <a:srgbClr val="0D1424"/>
-          </a:solidFill>
-          <a:ln w="9525">
-            <a:solidFill>
-              <a:srgbClr val="1E3A5C"/>
-            </a:solidFill>
-            <a:prstDash val="solid"/>
-          </a:ln>
-        </p:spPr>
-      </p:sp>
-      <p:sp>
-        <p:nvSpPr>
-          <p:cNvPr id="18" name="Shape 15"/>
-          <p:cNvSpPr/>
-          <p:nvPr/>
-        </p:nvSpPr>
-        <p:spPr>
-          <a:xfrm>
-            <a:off x="2523744" y="2688336"/>
-            <a:ext cx="566928" cy="566928"/>
-          </a:xfrm>
-          <a:prstGeom prst="rect">
-            <a:avLst/>
-          </a:prstGeom>
-          <a:solidFill>
-            <a:srgbClr val="0D1424"/>
-          </a:solidFill>
-          <a:ln w="9525">
-            <a:solidFill>
-              <a:srgbClr val="1E3A5C"/>
-            </a:solidFill>
-            <a:prstDash val="solid"/>
-          </a:ln>
-        </p:spPr>
-      </p:sp>
-      <p:sp>
-        <p:nvSpPr>
-          <p:cNvPr id="19" name="Shape 16"/>
-          <p:cNvSpPr/>
-          <p:nvPr/>
-        </p:nvSpPr>
-        <p:spPr>
-          <a:xfrm>
-            <a:off x="3090672" y="2688336"/>
-            <a:ext cx="566928" cy="566928"/>
-          </a:xfrm>
-          <a:prstGeom prst="rect">
-            <a:avLst/>
-          </a:prstGeom>
-          <a:solidFill>
-            <a:srgbClr val="F2E3C8"/>
-          </a:solidFill>
-          <a:ln w="9525">
-            <a:solidFill>
-              <a:srgbClr val="1E3A5C"/>
-            </a:solidFill>
-            <a:prstDash val="solid"/>
-          </a:ln>
-        </p:spPr>
-      </p:sp>
-      <p:sp>
-        <p:nvSpPr>
-          <p:cNvPr id="20" name="Shape 17"/>
-          <p:cNvSpPr/>
-          <p:nvPr/>
-        </p:nvSpPr>
-        <p:spPr>
-          <a:xfrm>
-            <a:off x="822960" y="3255264"/>
-            <a:ext cx="566928" cy="566928"/>
-          </a:xfrm>
-          <a:prstGeom prst="rect">
-            <a:avLst/>
-          </a:prstGeom>
-          <a:solidFill>
-            <a:srgbClr val="F2E3C8"/>
-          </a:solidFill>
-          <a:ln w="9525">
-            <a:solidFill>
-              <a:srgbClr val="1E3A5C"/>
-            </a:solidFill>
-            <a:prstDash val="solid"/>
-          </a:ln>
-        </p:spPr>
-      </p:sp>
-      <p:sp>
-        <p:nvSpPr>
-          <p:cNvPr id="21" name="Shape 18"/>
-          <p:cNvSpPr/>
-          <p:nvPr/>
-        </p:nvSpPr>
-        <p:spPr>
-          <a:xfrm>
-            <a:off x="1389888" y="3255264"/>
-            <a:ext cx="566928" cy="566928"/>
-          </a:xfrm>
-          <a:prstGeom prst="rect">
-            <a:avLst/>
-          </a:prstGeom>
-          <a:solidFill>
-            <a:srgbClr val="F2E3C8"/>
-          </a:solidFill>
-          <a:ln w="9525">
-            <a:solidFill>
-              <a:srgbClr val="1E3A5C"/>
-            </a:solidFill>
-            <a:prstDash val="solid"/>
-          </a:ln>
-        </p:spPr>
-      </p:sp>
-      <p:sp>
-        <p:nvSpPr>
-          <p:cNvPr id="22" name="Shape 19"/>
-          <p:cNvSpPr/>
-          <p:nvPr/>
-        </p:nvSpPr>
-        <p:spPr>
-          <a:xfrm>
-            <a:off x="1956816" y="3255264"/>
-            <a:ext cx="566928" cy="566928"/>
-          </a:xfrm>
-          <a:prstGeom prst="rect">
-            <a:avLst/>
-          </a:prstGeom>
-          <a:solidFill>
-            <a:srgbClr val="0D1424"/>
-          </a:solidFill>
-          <a:ln w="9525">
-            <a:solidFill>
-              <a:srgbClr val="1E3A5C"/>
-            </a:solidFill>
-            <a:prstDash val="solid"/>
-          </a:ln>
-        </p:spPr>
-      </p:sp>
-      <p:sp>
-        <p:nvSpPr>
-          <p:cNvPr id="23" name="Shape 20"/>
-          <p:cNvSpPr/>
-          <p:nvPr/>
-        </p:nvSpPr>
-        <p:spPr>
-          <a:xfrm>
-            <a:off x="2523744" y="3255264"/>
-            <a:ext cx="566928" cy="566928"/>
-          </a:xfrm>
-          <a:prstGeom prst="rect">
-            <a:avLst/>
-          </a:prstGeom>
-          <a:solidFill>
-            <a:srgbClr val="F2E3C8"/>
-          </a:solidFill>
-          <a:ln w="9525">
-            <a:solidFill>
-              <a:srgbClr val="1E3A5C"/>
-            </a:solidFill>
-            <a:prstDash val="solid"/>
-          </a:ln>
-        </p:spPr>
-      </p:sp>
-      <p:sp>
-        <p:nvSpPr>
-          <p:cNvPr id="24" name="Shape 21"/>
-          <p:cNvSpPr/>
-          <p:nvPr/>
-        </p:nvSpPr>
-        <p:spPr>
-          <a:xfrm>
-            <a:off x="3090672" y="3255264"/>
-            <a:ext cx="566928" cy="566928"/>
-          </a:xfrm>
-          <a:prstGeom prst="rect">
-            <a:avLst/>
-          </a:prstGeom>
-          <a:solidFill>
-            <a:srgbClr val="F2E3C8"/>
-          </a:solidFill>
-          <a:ln w="9525">
-            <a:solidFill>
-              <a:srgbClr val="1E3A5C"/>
-            </a:solidFill>
-            <a:prstDash val="solid"/>
-          </a:ln>
-        </p:spPr>
-      </p:sp>
-      <p:sp>
-        <p:nvSpPr>
-          <p:cNvPr id="25" name="Shape 22"/>
-          <p:cNvSpPr/>
-          <p:nvPr/>
-        </p:nvSpPr>
-        <p:spPr>
-          <a:xfrm>
-            <a:off x="822960" y="3822192"/>
-            <a:ext cx="566928" cy="566928"/>
-          </a:xfrm>
-          <a:prstGeom prst="rect">
-            <a:avLst/>
-          </a:prstGeom>
-          <a:solidFill>
-            <a:srgbClr val="0D1424"/>
-          </a:solidFill>
-          <a:ln w="9525">
-            <a:solidFill>
-              <a:srgbClr val="1E3A5C"/>
-            </a:solidFill>
-            <a:prstDash val="solid"/>
-          </a:ln>
-        </p:spPr>
-      </p:sp>
-      <p:sp>
-        <p:nvSpPr>
-          <p:cNvPr id="26" name="Shape 23"/>
-          <p:cNvSpPr/>
-          <p:nvPr/>
-        </p:nvSpPr>
-        <p:spPr>
-          <a:xfrm>
-            <a:off x="1389888" y="3822192"/>
-            <a:ext cx="566928" cy="566928"/>
-          </a:xfrm>
-          <a:prstGeom prst="rect">
-            <a:avLst/>
-          </a:prstGeom>
-          <a:solidFill>
-            <a:srgbClr val="F2E3C8"/>
-          </a:solidFill>
-          <a:ln w="9525">
-            <a:solidFill>
-              <a:srgbClr val="1E3A5C"/>
-            </a:solidFill>
-            <a:prstDash val="solid"/>
-          </a:ln>
-        </p:spPr>
-      </p:sp>
-      <p:sp>
-        <p:nvSpPr>
-          <p:cNvPr id="27" name="Shape 24"/>
-          <p:cNvSpPr/>
-          <p:nvPr/>
-        </p:nvSpPr>
-        <p:spPr>
-          <a:xfrm>
-            <a:off x="1956816" y="3822192"/>
-            <a:ext cx="566928" cy="566928"/>
-          </a:xfrm>
-          <a:prstGeom prst="rect">
-            <a:avLst/>
-          </a:prstGeom>
-          <a:solidFill>
-            <a:srgbClr val="F2E3C8"/>
-          </a:solidFill>
-          <a:ln w="9525">
-            <a:solidFill>
-              <a:srgbClr val="1E3A5C"/>
-            </a:solidFill>
-            <a:prstDash val="solid"/>
-          </a:ln>
-        </p:spPr>
-      </p:sp>
-      <p:sp>
-        <p:nvSpPr>
-          <p:cNvPr id="28" name="Shape 25"/>
-          <p:cNvSpPr/>
-          <p:nvPr/>
-        </p:nvSpPr>
-        <p:spPr>
-          <a:xfrm>
-            <a:off x="2523744" y="3822192"/>
-            <a:ext cx="566928" cy="566928"/>
-          </a:xfrm>
-          <a:prstGeom prst="rect">
-            <a:avLst/>
-          </a:prstGeom>
-          <a:solidFill>
-            <a:srgbClr val="F2E3C8"/>
-          </a:solidFill>
-          <a:ln w="9525">
-            <a:solidFill>
-              <a:srgbClr val="1E3A5C"/>
-            </a:solidFill>
-            <a:prstDash val="solid"/>
-          </a:ln>
-        </p:spPr>
-      </p:sp>
-      <p:sp>
-        <p:nvSpPr>
-          <p:cNvPr id="29" name="Shape 26"/>
-          <p:cNvSpPr/>
-          <p:nvPr/>
-        </p:nvSpPr>
-        <p:spPr>
-          <a:xfrm>
-            <a:off x="3090672" y="3822192"/>
-            <a:ext cx="566928" cy="566928"/>
-          </a:xfrm>
-          <a:prstGeom prst="rect">
-            <a:avLst/>
-          </a:prstGeom>
-          <a:solidFill>
-            <a:srgbClr val="0D1424"/>
-          </a:solidFill>
-          <a:ln w="9525">
-            <a:solidFill>
-              <a:srgbClr val="1E3A5C"/>
-            </a:solidFill>
-            <a:prstDash val="solid"/>
-          </a:ln>
-        </p:spPr>
-      </p:sp>
-      <p:sp>
-        <p:nvSpPr>
-          <p:cNvPr id="30" name="Text 27"/>
-          <p:cNvSpPr/>
-          <p:nvPr/>
-        </p:nvSpPr>
-        <p:spPr>
-          <a:xfrm>
-            <a:off x="640080" y="4572000"/>
-            <a:ext cx="3291840" cy="365760"/>
-          </a:xfrm>
-          <a:prstGeom prst="rect">
-            <a:avLst/>
-          </a:prstGeom>
-          <a:noFill/>
-          <a:ln/>
-        </p:spPr>
-        <p:txBody>
-          <a:bodyPr wrap="square" lIns="0" tIns="0" rIns="0" bIns="0" rtlCol="0" anchor="ctr"/>
-          <a:lstStyle/>
-          <a:p>
-            <a:pPr marL="0" indent="0" algn="ctr">
-              <a:buNone/>
-            </a:pPr>
-            <a:r>
-              <a:rPr lang="en-US" sz="1300" dirty="0">
-                <a:solidFill>
-                  <a:srgbClr val="7A93AE"/>
-                </a:solidFill>
-                <a:latin typeface="Microsoft JhengHei" pitchFamily="34" charset="0"/>
-                <a:ea typeface="Microsoft JhengHei" pitchFamily="34" charset="-122"/>
-                <a:cs typeface="Microsoft JhengHei" pitchFamily="34" charset="-120"/>
-              </a:rPr>
-              <a:t>上一節的紀錄卡</a:t>
-            </a:r>
-            <a:endParaRPr lang="en-US" sz="1300" dirty="0"/>
-          </a:p>
-        </p:txBody>
-      </p:sp>
-      <p:sp>
-        <p:nvSpPr>
-          <p:cNvPr id="31" name="Text 28"/>
-          <p:cNvSpPr/>
-          <p:nvPr/>
-        </p:nvSpPr>
-        <p:spPr>
-          <a:xfrm>
-            <a:off x="3977640" y="2743200"/>
-            <a:ext cx="731520" cy="731520"/>
-          </a:xfrm>
-          <a:prstGeom prst="rect">
-            <a:avLst/>
-          </a:prstGeom>
-          <a:noFill/>
-          <a:ln/>
-        </p:spPr>
-        <p:txBody>
-          <a:bodyPr wrap="square" lIns="0" tIns="0" rIns="0" bIns="0" rtlCol="0" anchor="ctr"/>
-          <a:lstStyle/>
-          <a:p>
-            <a:pPr marL="0" indent="0" algn="ctr">
-              <a:buNone/>
-            </a:pPr>
-            <a:r>
-              <a:rPr lang="en-US" sz="3200" dirty="0">
-                <a:solidFill>
-                  <a:srgbClr val="FFB347"/>
-                </a:solidFill>
-              </a:rPr>
-              <a:t>→</a:t>
-            </a:r>
-            <a:endParaRPr lang="en-US" sz="3200" dirty="0"/>
-          </a:p>
-        </p:txBody>
-      </p:sp>
-      <p:sp>
-        <p:nvSpPr>
-          <p:cNvPr id="32" name="Shape 29"/>
-          <p:cNvSpPr/>
-          <p:nvPr/>
-        </p:nvSpPr>
-        <p:spPr>
-          <a:xfrm>
-            <a:off x="4846320" y="2834640"/>
-            <a:ext cx="457200" cy="457200"/>
-          </a:xfrm>
-          <a:prstGeom prst="rect">
-            <a:avLst/>
-          </a:prstGeom>
-          <a:solidFill>
-            <a:srgbClr val="0D1424"/>
-          </a:solidFill>
-          <a:ln w="9525">
-            <a:solidFill>
-              <a:srgbClr val="1E3A5C"/>
-            </a:solidFill>
-            <a:prstDash val="solid"/>
-          </a:ln>
-        </p:spPr>
-      </p:sp>
-      <p:sp>
-        <p:nvSpPr>
-          <p:cNvPr id="33" name="Shape 30"/>
-          <p:cNvSpPr/>
-          <p:nvPr/>
-        </p:nvSpPr>
-        <p:spPr>
-          <a:xfrm>
-            <a:off x="5330952" y="2834640"/>
-            <a:ext cx="457200" cy="457200"/>
-          </a:xfrm>
-          <a:prstGeom prst="rect">
-            <a:avLst/>
-          </a:prstGeom>
-          <a:solidFill>
-            <a:srgbClr val="FFB347"/>
-          </a:solidFill>
-          <a:ln w="9525">
-            <a:solidFill>
-              <a:srgbClr val="1E3A5C"/>
-            </a:solidFill>
-            <a:prstDash val="solid"/>
-          </a:ln>
-        </p:spPr>
-      </p:sp>
-      <p:sp>
-        <p:nvSpPr>
-          <p:cNvPr id="34" name="Shape 31"/>
-          <p:cNvSpPr/>
-          <p:nvPr/>
-        </p:nvSpPr>
-        <p:spPr>
-          <a:xfrm>
-            <a:off x="5815584" y="2834640"/>
-            <a:ext cx="457200" cy="457200"/>
-          </a:xfrm>
-          <a:prstGeom prst="rect">
-            <a:avLst/>
-          </a:prstGeom>
-          <a:solidFill>
-            <a:srgbClr val="FFB347"/>
-          </a:solidFill>
-          <a:ln w="9525">
-            <a:solidFill>
-              <a:srgbClr val="1E3A5C"/>
-            </a:solidFill>
-            <a:prstDash val="solid"/>
-          </a:ln>
-        </p:spPr>
-      </p:sp>
-      <p:sp>
-        <p:nvSpPr>
-          <p:cNvPr id="35" name="Shape 32"/>
-          <p:cNvSpPr/>
-          <p:nvPr/>
-        </p:nvSpPr>
-        <p:spPr>
-          <a:xfrm>
-            <a:off x="6300216" y="2834640"/>
-            <a:ext cx="457200" cy="457200"/>
-          </a:xfrm>
-          <a:prstGeom prst="rect">
-            <a:avLst/>
-          </a:prstGeom>
-          <a:solidFill>
-            <a:srgbClr val="FFB347"/>
-          </a:solidFill>
-          <a:ln w="9525">
-            <a:solidFill>
-              <a:srgbClr val="1E3A5C"/>
-            </a:solidFill>
-            <a:prstDash val="solid"/>
-          </a:ln>
-        </p:spPr>
-      </p:sp>
-      <p:sp>
-        <p:nvSpPr>
-          <p:cNvPr id="36" name="Shape 33"/>
-          <p:cNvSpPr/>
-          <p:nvPr/>
-        </p:nvSpPr>
-        <p:spPr>
-          <a:xfrm>
-            <a:off x="6784848" y="2834640"/>
-            <a:ext cx="457200" cy="457200"/>
-          </a:xfrm>
-          <a:prstGeom prst="rect">
-            <a:avLst/>
-          </a:prstGeom>
-          <a:solidFill>
-            <a:srgbClr val="0D1424"/>
-          </a:solidFill>
-          <a:ln w="9525">
-            <a:solidFill>
-              <a:srgbClr val="1E3A5C"/>
-            </a:solidFill>
-            <a:prstDash val="solid"/>
-          </a:ln>
-        </p:spPr>
-      </p:sp>
-      <p:sp>
-        <p:nvSpPr>
-          <p:cNvPr id="37" name="Shape 34"/>
-          <p:cNvSpPr/>
-          <p:nvPr/>
-        </p:nvSpPr>
-        <p:spPr>
-          <a:xfrm>
-            <a:off x="7269480" y="2834640"/>
-            <a:ext cx="457200" cy="457200"/>
-          </a:xfrm>
-          <a:prstGeom prst="rect">
-            <a:avLst/>
-          </a:prstGeom>
-          <a:solidFill>
-            <a:srgbClr val="FFB347"/>
-          </a:solidFill>
-          <a:ln w="9525">
-            <a:solidFill>
-              <a:srgbClr val="1E3A5C"/>
-            </a:solidFill>
-            <a:prstDash val="solid"/>
-          </a:ln>
-        </p:spPr>
-      </p:sp>
-      <p:sp>
-        <p:nvSpPr>
-          <p:cNvPr id="38" name="Shape 35"/>
-          <p:cNvSpPr/>
-          <p:nvPr/>
-        </p:nvSpPr>
-        <p:spPr>
-          <a:xfrm>
-            <a:off x="7754112" y="2834640"/>
-            <a:ext cx="457200" cy="457200"/>
-          </a:xfrm>
-          <a:prstGeom prst="rect">
-            <a:avLst/>
-          </a:prstGeom>
-          <a:solidFill>
-            <a:srgbClr val="0D1424"/>
-          </a:solidFill>
-          <a:ln w="9525">
-            <a:solidFill>
-              <a:srgbClr val="1E3A5C"/>
-            </a:solidFill>
-            <a:prstDash val="solid"/>
-          </a:ln>
-        </p:spPr>
-      </p:sp>
-      <p:sp>
-        <p:nvSpPr>
-          <p:cNvPr id="39" name="Text 36"/>
-          <p:cNvSpPr/>
-          <p:nvPr/>
-        </p:nvSpPr>
-        <p:spPr>
-          <a:xfrm>
-            <a:off x="4572000" y="3520440"/>
-            <a:ext cx="3931920" cy="365760"/>
-          </a:xfrm>
-          <a:prstGeom prst="rect">
-            <a:avLst/>
-          </a:prstGeom>
-          <a:noFill/>
-          <a:ln/>
-        </p:spPr>
-        <p:txBody>
-          <a:bodyPr wrap="square" lIns="0" tIns="0" rIns="0" bIns="0" rtlCol="0" anchor="ctr"/>
-          <a:lstStyle/>
-          <a:p>
-            <a:pPr marL="0" indent="0" algn="ctr">
-              <a:buNone/>
-            </a:pPr>
-            <a:r>
-              <a:rPr lang="en-US" sz="1300" dirty="0">
-                <a:solidFill>
-                  <a:srgbClr val="7A93AE"/>
-                </a:solidFill>
-                <a:latin typeface="Microsoft JhengHei" pitchFamily="34" charset="0"/>
-                <a:ea typeface="Microsoft JhengHei" pitchFamily="34" charset="-122"/>
-                <a:cs typeface="Microsoft JhengHei" pitchFamily="34" charset="-120"/>
-              </a:rPr>
-              <a:t>一格一格、亮暗發出去</a:t>
-            </a:r>
-            <a:endParaRPr lang="en-US" sz="1300" dirty="0"/>
-          </a:p>
-        </p:txBody>
-      </p:sp>
-      <p:sp>
-        <p:nvSpPr>
           <p:cNvPr id="40" name="Shape 37"/>
           <p:cNvSpPr/>
           <p:nvPr/>
         </p:nvSpPr>
         <p:spPr>
           <a:xfrm>
-            <a:off x="8549640" y="982351"/>
-            <a:ext cx="3200400" cy="4356267"/>
+            <a:off x="670791" y="1267142"/>
+            <a:ext cx="11094258" cy="1880922"/>
           </a:xfrm>
           <a:prstGeom prst="roundRect">
             <a:avLst>
@@ -12253,8 +13208,8 @@
         </p:nvSpPr>
         <p:spPr>
           <a:xfrm>
-            <a:off x="8823960" y="1256672"/>
-            <a:ext cx="2697480" cy="3681088"/>
+            <a:off x="914400" y="1524528"/>
+            <a:ext cx="10607040" cy="1495764"/>
           </a:xfrm>
           <a:prstGeom prst="rect">
             <a:avLst/>
@@ -12270,7 +13225,7 @@
               <a:buNone/>
             </a:pPr>
             <a:r>
-              <a:rPr lang="en-US" sz="2000" dirty="0">
+              <a:rPr lang="en-US" sz="2000" dirty="0" err="1" smtClean="0">
                 <a:solidFill>
                   <a:srgbClr val="C9D6E8"/>
                 </a:solidFill>
@@ -12278,18 +13233,41 @@
                 <a:ea typeface="Microsoft JhengHei" pitchFamily="34" charset="-122"/>
                 <a:cs typeface="Microsoft JhengHei" pitchFamily="34" charset="-120"/>
               </a:rPr>
-              <a:t>可是——
-</a:t>
-            </a:r>
-            <a:endParaRPr lang="en-US" sz="2000" dirty="0"/>
-          </a:p>
-          <a:p>
-            <a:pPr marL="0" indent="0">
-              <a:spcAft>
-                <a:spcPts val="1000"/>
-              </a:spcAft>
-              <a:buNone/>
-            </a:pPr>
+              <a:t>可是</a:t>
+            </a:r>
+            <a:r>
+              <a:rPr lang="en-US" sz="2000" b="1" dirty="0" err="1" smtClean="0">
+                <a:solidFill>
+                  <a:srgbClr val="FF5C47"/>
+                </a:solidFill>
+                <a:latin typeface="Microsoft JhengHei" pitchFamily="34" charset="0"/>
+                <a:ea typeface="Microsoft JhengHei" pitchFamily="34" charset="-122"/>
+                <a:cs typeface="Microsoft JhengHei" pitchFamily="34" charset="-120"/>
+              </a:rPr>
+              <a:t>三億多公里外，看不到</a:t>
+            </a:r>
+            <a:r>
+              <a:rPr lang="zh-TW" altLang="en-US" sz="2000" b="1" dirty="0" smtClean="0">
+                <a:solidFill>
+                  <a:srgbClr val="FF5C47"/>
+                </a:solidFill>
+                <a:latin typeface="Microsoft JhengHei" pitchFamily="34" charset="0"/>
+                <a:ea typeface="Microsoft JhengHei" pitchFamily="34" charset="-122"/>
+                <a:cs typeface="Microsoft JhengHei" pitchFamily="34" charset="-120"/>
+              </a:rPr>
+              <a:t>維京一號上發出的光</a:t>
+            </a:r>
+            <a:r>
+              <a:rPr lang="en-US" sz="2000" b="1" dirty="0" smtClean="0">
+                <a:solidFill>
+                  <a:srgbClr val="FF5C47"/>
+                </a:solidFill>
+                <a:latin typeface="Microsoft JhengHei" pitchFamily="34" charset="0"/>
+                <a:ea typeface="Microsoft JhengHei" pitchFamily="34" charset="-122"/>
+                <a:cs typeface="Microsoft JhengHei" pitchFamily="34" charset="-120"/>
+              </a:rPr>
+              <a:t>！</a:t>
+            </a:r>
             <a:r>
               <a:rPr lang="en-US" sz="2000" b="1" dirty="0">
                 <a:solidFill>
@@ -12299,8 +13277,7 @@
                 <a:ea typeface="Microsoft JhengHei" pitchFamily="34" charset="-122"/>
                 <a:cs typeface="Microsoft JhengHei" pitchFamily="34" charset="-120"/>
               </a:rPr>
-              <a:t>三億多公里外，
-看不到手電筒！
+              <a:t>
 </a:t>
             </a:r>
             <a:endParaRPr lang="en-US" sz="2000" dirty="0"/>
@@ -12386,19 +13363,18 @@
                 <a:ea typeface="Microsoft JhengHei" pitchFamily="34" charset="-122"/>
                 <a:cs typeface="Microsoft JhengHei" pitchFamily="34" charset="-120"/>
               </a:rPr>
-              <a:t>的概念很接近，</a:t>
-            </a:r>
-            <a:r>
-              <a:rPr lang="en-US" sz="2000" dirty="0">
-                <a:solidFill>
-                  <a:srgbClr val="F2E3C8"/>
-                </a:solidFill>
-                <a:latin typeface="Microsoft JhengHei" pitchFamily="34" charset="0"/>
-                <a:ea typeface="Microsoft JhengHei" pitchFamily="34" charset="-122"/>
-                <a:cs typeface="Microsoft JhengHei" pitchFamily="34" charset="-120"/>
-              </a:rPr>
-              <a:t>
-</a:t>
+              <a:t>的概念很接近</a:t>
+            </a:r>
+            <a:r>
+              <a:rPr lang="zh-TW" altLang="en-US" sz="2000" dirty="0" smtClean="0">
+                <a:solidFill>
+                  <a:srgbClr val="F2E3C8"/>
+                </a:solidFill>
+                <a:latin typeface="Microsoft JhengHei" pitchFamily="34" charset="0"/>
+                <a:ea typeface="Microsoft JhengHei" pitchFamily="34" charset="-122"/>
+                <a:cs typeface="Microsoft JhengHei" pitchFamily="34" charset="-120"/>
+              </a:rPr>
+              <a:t>，它們</a:t>
             </a:r>
             <a:r>
               <a:rPr lang="zh-TW" altLang="en-US" sz="2000" dirty="0">
@@ -12409,7 +13385,7 @@
                 <a:ea typeface="Microsoft JhengHei" pitchFamily="34" charset="-122"/>
                 <a:cs typeface="Microsoft JhengHei" pitchFamily="34" charset="-120"/>
               </a:rPr>
-              <a:t>它們都是「電磁波」的</a:t>
+              <a:t>都是「電磁波」的</a:t>
             </a:r>
             <a:r>
               <a:rPr lang="zh-TW" altLang="en-US" sz="2000" dirty="0" smtClean="0">
@@ -12420,7 +13396,18 @@
                 <a:ea typeface="Microsoft JhengHei" pitchFamily="34" charset="-122"/>
                 <a:cs typeface="Microsoft JhengHei" pitchFamily="34" charset="-120"/>
               </a:rPr>
-              <a:t>一種，能夠</a:t>
+              <a:t>一種</a:t>
+            </a:r>
+            <a:r>
+              <a:rPr lang="zh-TW" altLang="en-US" sz="2000" dirty="0" smtClean="0">
+                <a:solidFill>
+                  <a:srgbClr val="F2E3C8"/>
+                </a:solidFill>
+                <a:latin typeface="Microsoft JhengHei" pitchFamily="34" charset="0"/>
+                <a:ea typeface="Microsoft JhengHei" pitchFamily="34" charset="-122"/>
+                <a:cs typeface="Microsoft JhengHei" pitchFamily="34" charset="-120"/>
+              </a:rPr>
+              <a:t>，都是能夠</a:t>
             </a:r>
             <a:r>
               <a:rPr lang="en-US" sz="2000" dirty="0" err="1" smtClean="0">
@@ -12431,7 +13418,29 @@
                 <a:ea typeface="Microsoft JhengHei" pitchFamily="34" charset="-122"/>
                 <a:cs typeface="Microsoft JhengHei" pitchFamily="34" charset="-120"/>
               </a:rPr>
-              <a:t>傳得更遠的訊號</a:t>
+              <a:t>傳得</a:t>
+            </a:r>
+            <a:r>
+              <a:rPr lang="zh-TW" altLang="en-US" sz="2000" dirty="0" smtClean="0">
+                <a:solidFill>
+                  <a:srgbClr val="F2E3C8"/>
+                </a:solidFill>
+                <a:latin typeface="Microsoft JhengHei" pitchFamily="34" charset="0"/>
+                <a:ea typeface="Microsoft JhengHei" pitchFamily="34" charset="-122"/>
+                <a:cs typeface="Microsoft JhengHei" pitchFamily="34" charset="-120"/>
+              </a:rPr>
+              <a:t>很快且很</a:t>
+            </a:r>
+            <a:r>
+              <a:rPr lang="en-US" sz="2000" dirty="0" err="1" smtClean="0">
+                <a:solidFill>
+                  <a:srgbClr val="F2E3C8"/>
+                </a:solidFill>
+                <a:latin typeface="Microsoft JhengHei" pitchFamily="34" charset="0"/>
+                <a:ea typeface="Microsoft JhengHei" pitchFamily="34" charset="-122"/>
+                <a:cs typeface="Microsoft JhengHei" pitchFamily="34" charset="-120"/>
+              </a:rPr>
+              <a:t>遠的訊號</a:t>
             </a:r>
             <a:r>
               <a:rPr lang="en-US" sz="2000" dirty="0" smtClean="0">
@@ -12456,8 +13465,8 @@
         </p:nvSpPr>
         <p:spPr>
           <a:xfrm>
-            <a:off x="457200" y="5623560"/>
-            <a:ext cx="11247120" cy="457200"/>
+            <a:off x="4114800" y="6261977"/>
+            <a:ext cx="7437120" cy="457200"/>
           </a:xfrm>
           <a:prstGeom prst="rect">
             <a:avLst/>
@@ -12506,7 +13515,7 @@
               <a:t>也</a:t>
             </a:r>
             <a:r>
-              <a:rPr lang="en-US" sz="1800" b="1" dirty="0" smtClean="0">
+              <a:rPr lang="en-US" sz="1800" b="1" dirty="0" err="1" smtClean="0">
                 <a:solidFill>
                   <a:srgbClr val="5EC8F2"/>
                 </a:solidFill>
@@ -12517,7 +13526,7 @@
               <a:t>只有兩種狀態</a:t>
             </a:r>
             <a:r>
-              <a:rPr lang="en-US" sz="1800" b="1" dirty="0">
+              <a:rPr lang="en-US" sz="1800" b="1" dirty="0" err="1">
                 <a:solidFill>
                   <a:srgbClr val="5EC8F2"/>
                 </a:solidFill>
@@ -12525,12 +13534,62 @@
                 <a:ea typeface="Microsoft JhengHei" pitchFamily="34" charset="-122"/>
                 <a:cs typeface="Microsoft JhengHei" pitchFamily="34" charset="-120"/>
               </a:rPr>
-              <a:t>：有訊號（1）／沒訊號（0）</a:t>
+              <a:t>：</a:t>
+            </a:r>
+            <a:r>
+              <a:rPr lang="en-US" sz="1800" b="1" dirty="0" err="1" smtClean="0">
+                <a:solidFill>
+                  <a:srgbClr val="5EC8F2"/>
+                </a:solidFill>
+                <a:latin typeface="Microsoft JhengHei" pitchFamily="34" charset="0"/>
+                <a:ea typeface="Microsoft JhengHei" pitchFamily="34" charset="-122"/>
+                <a:cs typeface="Microsoft JhengHei" pitchFamily="34" charset="-120"/>
+              </a:rPr>
+              <a:t>有訊號／沒訊號</a:t>
             </a:r>
             <a:endParaRPr lang="en-US" sz="1800" dirty="0"/>
           </a:p>
         </p:txBody>
       </p:sp>
+      <p:pic>
+        <p:nvPicPr>
+          <p:cNvPr id="3" name="圖片 2"/>
+          <p:cNvPicPr>
+            <a:picLocks noChangeAspect="1"/>
+          </p:cNvPicPr>
+          <p:nvPr/>
+        </p:nvPicPr>
+        <p:blipFill>
+          <a:blip r:embed="rId3">
+            <a:extLst>
+              <a:ext uri="{BEBA8EAE-BF5A-486C-A8C5-ECC9F3942E4B}">
+                <a14:imgProps xmlns:a14="http://schemas.microsoft.com/office/drawing/2010/main">
+                  <a14:imgLayer r:embed="rId4">
+                    <a14:imgEffect>
+                      <a14:backgroundRemoval t="0" b="100000" l="0" r="100000"/>
+                    </a14:imgEffect>
+                  </a14:imgLayer>
+                </a14:imgProps>
+              </a:ext>
+              <a:ext uri="{28A0092B-C50C-407E-A947-70E740481C1C}">
+                <a14:useLocalDpi xmlns:a14="http://schemas.microsoft.com/office/drawing/2010/main" val="0"/>
+              </a:ext>
+            </a:extLst>
+          </a:blip>
+          <a:stretch>
+            <a:fillRect/>
+          </a:stretch>
+        </p:blipFill>
+        <p:spPr>
+          <a:xfrm>
+            <a:off x="279333" y="2871743"/>
+            <a:ext cx="11602854" cy="3876529"/>
+          </a:xfrm>
+          <a:prstGeom prst="rect">
+            <a:avLst/>
+          </a:prstGeom>
+        </p:spPr>
+      </p:pic>
     </p:spTree>
     <p:extLst>
       <p:ext uri="{BB962C8B-B14F-4D97-AF65-F5344CB8AC3E}">
@@ -14989,50 +16048,6 @@
               </a:rPr>
               <a:t>。</a:t>
             </a:r>
-            <a:r>
-              <a:rPr lang="en-US" dirty="0" err="1" smtClean="0">
-                <a:solidFill>
-                  <a:srgbClr val="C9D6E8"/>
-                </a:solidFill>
-                <a:latin typeface="Microsoft JhengHei" pitchFamily="34" charset="0"/>
-                <a:ea typeface="Microsoft JhengHei" pitchFamily="34" charset="-122"/>
-                <a:cs typeface="Microsoft JhengHei" pitchFamily="34" charset="-120"/>
-              </a:rPr>
-              <a:t/>
-            </a:r>
-            <a:r>
-              <a:rPr lang="en-US" dirty="0" smtClean="0">
-                <a:solidFill>
-                  <a:srgbClr val="C9D6E8"/>
-                </a:solidFill>
-                <a:latin typeface="Microsoft JhengHei" pitchFamily="34" charset="0"/>
-                <a:ea typeface="Microsoft JhengHei" pitchFamily="34" charset="-122"/>
-                <a:cs typeface="Microsoft JhengHei" pitchFamily="34" charset="-120"/>
-              </a:rPr>
-              <a:t/>
-            </a:r>
-            <a:r>
-              <a:rPr lang="en-US" dirty="0" err="1" smtClean="0">
-                <a:solidFill>
-                  <a:srgbClr val="C9D6E8"/>
-                </a:solidFill>
-                <a:latin typeface="Microsoft JhengHei" pitchFamily="34" charset="0"/>
-                <a:ea typeface="Microsoft JhengHei" pitchFamily="34" charset="-122"/>
-                <a:cs typeface="Microsoft JhengHei" pitchFamily="34" charset="-120"/>
-              </a:rPr>
-              <a:t/>
-            </a:r>
-            <a:r>
-              <a:rPr lang="en-US" dirty="0" smtClean="0">
-                <a:solidFill>
-                  <a:srgbClr val="C9D6E8"/>
-                </a:solidFill>
-                <a:latin typeface="Microsoft JhengHei" pitchFamily="34" charset="0"/>
-                <a:ea typeface="Microsoft JhengHei" pitchFamily="34" charset="-122"/>
-                <a:cs typeface="Microsoft JhengHei" pitchFamily="34" charset="-120"/>
-              </a:rPr>
-              <a:t/>
-            </a:r>
             <a:endParaRPr lang="en-US" dirty="0"/>
           </a:p>
         </p:txBody>
@@ -15089,72 +16104,6 @@
                 <a:cs typeface="Microsoft JhengHei" pitchFamily="34" charset="-120"/>
               </a:rPr>
               <a:t>班級的默契，就是生活裡的通訊協定。</a:t>
-            </a:r>
-            <a:r>
-              <a:rPr lang="zh-TW" altLang="en-US" b="1" smtClean="0">
-                <a:solidFill>
-                  <a:srgbClr val="F2E3C8"/>
-                </a:solidFill>
-                <a:latin typeface="Microsoft JhengHei" pitchFamily="34" charset="0"/>
-                <a:ea typeface="Microsoft JhengHei" pitchFamily="34" charset="-122"/>
-                <a:cs typeface="Microsoft JhengHei" pitchFamily="34" charset="-120"/>
-              </a:rPr>
-              <a:t/>
-            </a:r>
-            <a:r>
-              <a:rPr lang="en-US" altLang="zh-TW" b="1" smtClean="0">
-                <a:solidFill>
-                  <a:srgbClr val="F2E3C8"/>
-                </a:solidFill>
-                <a:latin typeface="Microsoft JhengHei" pitchFamily="34" charset="0"/>
-                <a:ea typeface="Microsoft JhengHei" pitchFamily="34" charset="-122"/>
-                <a:cs typeface="Microsoft JhengHei" pitchFamily="34" charset="-120"/>
-              </a:rPr>
-              <a:t/>
-            </a:r>
-            <a:r>
-              <a:rPr lang="zh-TW" altLang="en-US" b="1" dirty="0" smtClean="0">
-                <a:solidFill>
-                  <a:srgbClr val="F2E3C8"/>
-                </a:solidFill>
-                <a:latin typeface="Microsoft JhengHei" pitchFamily="34" charset="0"/>
-                <a:ea typeface="Microsoft JhengHei" pitchFamily="34" charset="-122"/>
-                <a:cs typeface="Microsoft JhengHei" pitchFamily="34" charset="-120"/>
-              </a:rPr>
-              <a:t/>
-            </a:r>
-            <a:r>
-              <a:rPr lang="en-US" altLang="zh-TW" b="1" dirty="0" smtClean="0">
-                <a:solidFill>
-                  <a:srgbClr val="F2E3C8"/>
-                </a:solidFill>
-                <a:latin typeface="Microsoft JhengHei" pitchFamily="34" charset="0"/>
-                <a:ea typeface="Microsoft JhengHei" pitchFamily="34" charset="-122"/>
-                <a:cs typeface="Microsoft JhengHei" pitchFamily="34" charset="-120"/>
-              </a:rPr>
-              <a:t/>
-            </a:r>
-            <a:r>
-              <a:rPr lang="en-US" altLang="zh-TW" b="1" dirty="0" err="1">
-                <a:solidFill>
-                  <a:schemeClr val="accent2"/>
-                </a:solidFill>
-                <a:latin typeface="Microsoft JhengHei" pitchFamily="34" charset="0"/>
-                <a:ea typeface="Microsoft JhengHei" pitchFamily="34" charset="-122"/>
-                <a:cs typeface="Microsoft JhengHei" pitchFamily="34" charset="-120"/>
-              </a:rPr>
-              <a:t/>
-            </a:r>
-            <a:r>
-              <a:rPr lang="en-US" altLang="zh-TW" b="1" dirty="0" smtClean="0">
-                <a:solidFill>
-                  <a:srgbClr val="F2E3C8"/>
-                </a:solidFill>
-                <a:latin typeface="Microsoft JhengHei" pitchFamily="34" charset="0"/>
-                <a:ea typeface="Microsoft JhengHei" pitchFamily="34" charset="-122"/>
-                <a:cs typeface="Microsoft JhengHei" pitchFamily="34" charset="-120"/>
-              </a:rPr>
-              <a:t/>
             </a:r>
             <a:endParaRPr lang="en-US" altLang="zh-TW" dirty="0"/>
           </a:p>
@@ -15239,138 +16188,6 @@
                 <a:cs typeface="Microsoft JhengHei" pitchFamily="34" charset="-120"/>
               </a:rPr>
               <a:t>訊號的規則其實不陌生——我們班上課、收作業，天天都在用同一套約定。</a:t>
-            </a:r>
-            <a:r>
-              <a:rPr lang="en-US" altLang="zh-TW" b="1" dirty="0" err="1" smtClean="0">
-                <a:solidFill>
-                  <a:srgbClr val="F2E3C8"/>
-                </a:solidFill>
-                <a:latin typeface="Microsoft JhengHei" pitchFamily="34" charset="0"/>
-                <a:ea typeface="Microsoft JhengHei" pitchFamily="34" charset="-122"/>
-                <a:cs typeface="Microsoft JhengHei" pitchFamily="34" charset="-120"/>
-              </a:rPr>
-              <a:t/>
-            </a:r>
-            <a:r>
-              <a:rPr lang="zh-TW" altLang="en-US" b="1" dirty="0" smtClean="0">
-                <a:solidFill>
-                  <a:srgbClr val="F2E3C8"/>
-                </a:solidFill>
-                <a:latin typeface="Microsoft JhengHei" pitchFamily="34" charset="0"/>
-                <a:ea typeface="Microsoft JhengHei" pitchFamily="34" charset="-122"/>
-                <a:cs typeface="Microsoft JhengHei" pitchFamily="34" charset="-120"/>
-              </a:rPr>
-              <a:t/>
-            </a:r>
-            <a:r>
-              <a:rPr lang="en-US" altLang="zh-TW" b="1" dirty="0" smtClean="0">
-                <a:solidFill>
-                  <a:srgbClr val="F2E3C8"/>
-                </a:solidFill>
-                <a:latin typeface="Microsoft JhengHei" pitchFamily="34" charset="0"/>
-                <a:ea typeface="Microsoft JhengHei" pitchFamily="34" charset="-122"/>
-                <a:cs typeface="Microsoft JhengHei" pitchFamily="34" charset="-120"/>
-              </a:rPr>
-              <a:t/>
-            </a:r>
-            <a:r>
-              <a:rPr lang="en-US" altLang="zh-TW" b="1" dirty="0">
-                <a:solidFill>
-                  <a:srgbClr val="F2E3C8"/>
-                </a:solidFill>
-                <a:latin typeface="Microsoft JhengHei" pitchFamily="34" charset="0"/>
-                <a:ea typeface="Microsoft JhengHei" pitchFamily="34" charset="-122"/>
-                <a:cs typeface="Microsoft JhengHei" pitchFamily="34" charset="-120"/>
-              </a:rPr>
-              <a:t/>
-            </a:r>
-            <a:r>
-              <a:rPr lang="en-US" altLang="zh-TW" b="1" dirty="0" err="1">
-                <a:solidFill>
-                  <a:srgbClr val="F2E3C8"/>
-                </a:solidFill>
-                <a:latin typeface="Microsoft JhengHei" pitchFamily="34" charset="0"/>
-                <a:ea typeface="Microsoft JhengHei" pitchFamily="34" charset="-122"/>
-                <a:cs typeface="Microsoft JhengHei" pitchFamily="34" charset="-120"/>
-              </a:rPr>
-              <a:t/>
-            </a:r>
-            <a:r>
-              <a:rPr lang="en-US" altLang="zh-TW" b="1" dirty="0" smtClean="0">
-                <a:solidFill>
-                  <a:srgbClr val="F2E3C8"/>
-                </a:solidFill>
-                <a:latin typeface="Microsoft JhengHei" pitchFamily="34" charset="0"/>
-                <a:ea typeface="Microsoft JhengHei" pitchFamily="34" charset="-122"/>
-                <a:cs typeface="Microsoft JhengHei" pitchFamily="34" charset="-120"/>
-              </a:rPr>
-              <a:t/>
-            </a:r>
-            <a:r>
-              <a:rPr lang="zh-TW" altLang="en-US" b="1" dirty="0" smtClean="0">
-                <a:solidFill>
-                  <a:srgbClr val="F2E3C8"/>
-                </a:solidFill>
-                <a:latin typeface="Microsoft JhengHei" pitchFamily="34" charset="0"/>
-                <a:ea typeface="Microsoft JhengHei" pitchFamily="34" charset="-122"/>
-                <a:cs typeface="Microsoft JhengHei" pitchFamily="34" charset="-120"/>
-              </a:rPr>
-              <a:t/>
-            </a:r>
-            <a:r>
-              <a:rPr lang="en-US" altLang="zh-TW" b="1" dirty="0" err="1" smtClean="0">
-                <a:solidFill>
-                  <a:srgbClr val="F2E3C8"/>
-                </a:solidFill>
-                <a:latin typeface="Microsoft JhengHei" pitchFamily="34" charset="0"/>
-                <a:ea typeface="Microsoft JhengHei" pitchFamily="34" charset="-122"/>
-                <a:cs typeface="Microsoft JhengHei" pitchFamily="34" charset="-120"/>
-              </a:rPr>
-              <a:t/>
-            </a:r>
-            <a:r>
-              <a:rPr lang="zh-TW" altLang="en-US" b="1" dirty="0" smtClean="0">
-                <a:solidFill>
-                  <a:srgbClr val="F2E3C8"/>
-                </a:solidFill>
-                <a:latin typeface="Microsoft JhengHei" pitchFamily="34" charset="0"/>
-                <a:ea typeface="Microsoft JhengHei" pitchFamily="34" charset="-122"/>
-                <a:cs typeface="Microsoft JhengHei" pitchFamily="34" charset="-120"/>
-              </a:rPr>
-              <a:t/>
-            </a:r>
-            <a:r>
-              <a:rPr lang="en-US" altLang="zh-TW" b="1" dirty="0" err="1" smtClean="0">
-                <a:solidFill>
-                  <a:srgbClr val="F2E3C8"/>
-                </a:solidFill>
-                <a:latin typeface="Microsoft JhengHei" pitchFamily="34" charset="0"/>
-                <a:ea typeface="Microsoft JhengHei" pitchFamily="34" charset="-122"/>
-                <a:cs typeface="Microsoft JhengHei" pitchFamily="34" charset="-120"/>
-              </a:rPr>
-              <a:t/>
-            </a:r>
-            <a:r>
-              <a:rPr lang="en-US" altLang="zh-TW" b="1" dirty="0" err="1">
-                <a:solidFill>
-                  <a:srgbClr val="F2E3C8"/>
-                </a:solidFill>
-                <a:latin typeface="Microsoft JhengHei" pitchFamily="34" charset="0"/>
-                <a:ea typeface="Microsoft JhengHei" pitchFamily="34" charset="-122"/>
-                <a:cs typeface="Microsoft JhengHei" pitchFamily="34" charset="-120"/>
-              </a:rPr>
-              <a:t/>
-            </a:r>
-            <a:r>
-              <a:rPr lang="en-US" altLang="zh-TW" b="1" dirty="0">
-                <a:solidFill>
-                  <a:srgbClr val="F2E3C8"/>
-                </a:solidFill>
-                <a:latin typeface="Microsoft JhengHei" pitchFamily="34" charset="0"/>
-                <a:ea typeface="Microsoft JhengHei" pitchFamily="34" charset="-122"/>
-                <a:cs typeface="Microsoft JhengHei" pitchFamily="34" charset="-120"/>
-              </a:rPr>
-              <a:t/>
             </a:r>
             <a:endParaRPr lang="zh-TW" altLang="en-US" dirty="0"/>
           </a:p>
